--- a/宣道詩/(宣道詩175)精兵興起.pptx
+++ b/宣道詩/(宣道詩175)精兵興起.pptx
@@ -2,21 +2,28 @@
 <file path=ppt/presentation.xml><?xml version="1.0" encoding="utf-8"?>
 <p:presentation xmlns:a="http://schemas.openxmlformats.org/drawingml/2006/main" xmlns:r="http://schemas.openxmlformats.org/officeDocument/2006/relationships" xmlns:p="http://schemas.openxmlformats.org/presentationml/2006/main" saveSubsetFonts="1">
   <p:sldMasterIdLst>
-    <p:sldMasterId id="2147483660" r:id="rId1"/>
+    <p:sldMasterId id="2147483672" r:id="rId1"/>
   </p:sldMasterIdLst>
   <p:sldIdLst>
-    <p:sldId id="256" r:id="rId2"/>
-    <p:sldId id="257" r:id="rId3"/>
-    <p:sldId id="258" r:id="rId4"/>
-    <p:sldId id="259" r:id="rId5"/>
-    <p:sldId id="260" r:id="rId6"/>
-    <p:sldId id="261" r:id="rId7"/>
+    <p:sldId id="393" r:id="rId2"/>
+    <p:sldId id="412" r:id="rId3"/>
+    <p:sldId id="413" r:id="rId4"/>
+    <p:sldId id="414" r:id="rId5"/>
+    <p:sldId id="415" r:id="rId6"/>
+    <p:sldId id="416" r:id="rId7"/>
+    <p:sldId id="417" r:id="rId8"/>
+    <p:sldId id="418" r:id="rId9"/>
+    <p:sldId id="419" r:id="rId10"/>
+    <p:sldId id="420" r:id="rId11"/>
+    <p:sldId id="421" r:id="rId12"/>
+    <p:sldId id="422" r:id="rId13"/>
+    <p:sldId id="423" r:id="rId14"/>
   </p:sldIdLst>
-  <p:sldSz cx="9144000" cy="6858000" type="screen4x3"/>
+  <p:sldSz cx="12192000" cy="6858000"/>
   <p:notesSz cx="6858000" cy="9144000"/>
   <p:defaultTextStyle>
     <a:defPPr>
-      <a:defRPr lang="zh-TW"/>
+      <a:defRPr lang="vi-VN"/>
     </a:defPPr>
     <a:lvl1pPr marL="0" algn="l" defTabSz="914400" rtl="0" eaLnBrk="1" latinLnBrk="0" hangingPunct="1">
       <a:defRPr sz="1800" kern="1200">
@@ -109,6 +116,22 @@
       </a:defRPr>
     </a:lvl9pPr>
   </p:defaultTextStyle>
+  <p:extLst>
+    <p:ext uri="{EFAFB233-063F-42B5-8137-9DF3F51BA10A}">
+      <p15:sldGuideLst xmlns:p15="http://schemas.microsoft.com/office/powerpoint/2012/main">
+        <p15:guide id="1" orient="horz" pos="2160" userDrawn="1">
+          <p15:clr>
+            <a:srgbClr val="A4A3A4"/>
+          </p15:clr>
+        </p15:guide>
+        <p15:guide id="2" pos="3840" userDrawn="1">
+          <p15:clr>
+            <a:srgbClr val="A4A3A4"/>
+          </p15:clr>
+        </p15:guide>
+      </p15:sldGuideLst>
+    </p:ext>
+  </p:extLst>
 </p:presentation>
 </file>
 
@@ -141,8 +164,8 @@
         </p:nvSpPr>
         <p:spPr>
           <a:xfrm>
-            <a:off x="685800" y="2130425"/>
-            <a:ext cx="7772400" cy="1470025"/>
+            <a:off x="914400" y="2130428"/>
+            <a:ext cx="10363200" cy="1470025"/>
           </a:xfrm>
         </p:spPr>
         <p:txBody>
@@ -150,8 +173,8 @@
           <a:lstStyle/>
           <a:p>
             <a:r>
-              <a:rPr lang="zh-TW" altLang="en-US" smtClean="0"/>
-              <a:t>按一下以編輯母片標題樣式</a:t>
+              <a:rPr lang="en-US" altLang="zh-TW"/>
+              <a:t>Click to edit Master title style</a:t>
             </a:r>
             <a:endParaRPr lang="zh-TW" altLang="en-US"/>
           </a:p>
@@ -169,8 +192,8 @@
         </p:nvSpPr>
         <p:spPr>
           <a:xfrm>
-            <a:off x="1371600" y="3886200"/>
-            <a:ext cx="6400800" cy="1752600"/>
+            <a:off x="1828800" y="3886200"/>
+            <a:ext cx="8534400" cy="1752600"/>
           </a:xfrm>
         </p:spPr>
         <p:txBody>
@@ -178,45 +201,99 @@
           <a:lstStyle>
             <a:lvl1pPr marL="0" indent="0" algn="ctr">
               <a:buNone/>
-              <a:defRPr/>
+              <a:defRPr>
+                <a:solidFill>
+                  <a:schemeClr val="tx1">
+                    <a:tint val="75000"/>
+                  </a:schemeClr>
+                </a:solidFill>
+              </a:defRPr>
             </a:lvl1pPr>
-            <a:lvl2pPr marL="457200" indent="0" algn="ctr">
-              <a:buNone/>
-              <a:defRPr/>
+            <a:lvl2pPr marL="609585" indent="0" algn="ctr">
+              <a:buNone/>
+              <a:defRPr>
+                <a:solidFill>
+                  <a:schemeClr val="tx1">
+                    <a:tint val="75000"/>
+                  </a:schemeClr>
+                </a:solidFill>
+              </a:defRPr>
             </a:lvl2pPr>
-            <a:lvl3pPr marL="914400" indent="0" algn="ctr">
-              <a:buNone/>
-              <a:defRPr/>
+            <a:lvl3pPr marL="1219170" indent="0" algn="ctr">
+              <a:buNone/>
+              <a:defRPr>
+                <a:solidFill>
+                  <a:schemeClr val="tx1">
+                    <a:tint val="75000"/>
+                  </a:schemeClr>
+                </a:solidFill>
+              </a:defRPr>
             </a:lvl3pPr>
-            <a:lvl4pPr marL="1371600" indent="0" algn="ctr">
-              <a:buNone/>
-              <a:defRPr/>
+            <a:lvl4pPr marL="1828754" indent="0" algn="ctr">
+              <a:buNone/>
+              <a:defRPr>
+                <a:solidFill>
+                  <a:schemeClr val="tx1">
+                    <a:tint val="75000"/>
+                  </a:schemeClr>
+                </a:solidFill>
+              </a:defRPr>
             </a:lvl4pPr>
-            <a:lvl5pPr marL="1828800" indent="0" algn="ctr">
-              <a:buNone/>
-              <a:defRPr/>
+            <a:lvl5pPr marL="2438339" indent="0" algn="ctr">
+              <a:buNone/>
+              <a:defRPr>
+                <a:solidFill>
+                  <a:schemeClr val="tx1">
+                    <a:tint val="75000"/>
+                  </a:schemeClr>
+                </a:solidFill>
+              </a:defRPr>
             </a:lvl5pPr>
-            <a:lvl6pPr marL="2286000" indent="0" algn="ctr">
-              <a:buNone/>
-              <a:defRPr/>
+            <a:lvl6pPr marL="3047924" indent="0" algn="ctr">
+              <a:buNone/>
+              <a:defRPr>
+                <a:solidFill>
+                  <a:schemeClr val="tx1">
+                    <a:tint val="75000"/>
+                  </a:schemeClr>
+                </a:solidFill>
+              </a:defRPr>
             </a:lvl6pPr>
-            <a:lvl7pPr marL="2743200" indent="0" algn="ctr">
-              <a:buNone/>
-              <a:defRPr/>
+            <a:lvl7pPr marL="3657509" indent="0" algn="ctr">
+              <a:buNone/>
+              <a:defRPr>
+                <a:solidFill>
+                  <a:schemeClr val="tx1">
+                    <a:tint val="75000"/>
+                  </a:schemeClr>
+                </a:solidFill>
+              </a:defRPr>
             </a:lvl7pPr>
-            <a:lvl8pPr marL="3200400" indent="0" algn="ctr">
-              <a:buNone/>
-              <a:defRPr/>
+            <a:lvl8pPr marL="4267093" indent="0" algn="ctr">
+              <a:buNone/>
+              <a:defRPr>
+                <a:solidFill>
+                  <a:schemeClr val="tx1">
+                    <a:tint val="75000"/>
+                  </a:schemeClr>
+                </a:solidFill>
+              </a:defRPr>
             </a:lvl8pPr>
-            <a:lvl9pPr marL="3657600" indent="0" algn="ctr">
-              <a:buNone/>
-              <a:defRPr/>
+            <a:lvl9pPr marL="4876678" indent="0" algn="ctr">
+              <a:buNone/>
+              <a:defRPr>
+                <a:solidFill>
+                  <a:schemeClr val="tx1">
+                    <a:tint val="75000"/>
+                  </a:schemeClr>
+                </a:solidFill>
+              </a:defRPr>
             </a:lvl9pPr>
           </a:lstStyle>
           <a:p>
             <a:r>
-              <a:rPr lang="zh-TW" altLang="en-US" smtClean="0"/>
-              <a:t>按一下以編輯母片副標題樣式</a:t>
+              <a:rPr lang="en-US" altLang="zh-TW"/>
+              <a:t>Click to edit Master subtitle style</a:t>
             </a:r>
             <a:endParaRPr lang="zh-TW" altLang="en-US"/>
           </a:p>
@@ -235,15 +312,11 @@
         <p:spPr/>
         <p:txBody>
           <a:bodyPr/>
-          <a:lstStyle>
-            <a:lvl1pPr>
-              <a:defRPr/>
-            </a:lvl1pPr>
-          </a:lstStyle>
+          <a:lstStyle/>
           <a:p>
             <a:fld id="{DA0BF7F6-1145-4871-A3A6-04339E39674E}" type="datetimeFigureOut">
               <a:rPr lang="zh-TW" altLang="en-US" smtClean="0"/>
-              <a:t>2015/10/18</a:t>
+              <a:t>2025/9/20</a:t>
             </a:fld>
             <a:endParaRPr lang="zh-TW" altLang="en-US"/>
           </a:p>
@@ -262,11 +335,7 @@
         <p:spPr/>
         <p:txBody>
           <a:bodyPr/>
-          <a:lstStyle>
-            <a:lvl1pPr>
-              <a:defRPr/>
-            </a:lvl1pPr>
-          </a:lstStyle>
+          <a:lstStyle/>
           <a:p>
             <a:endParaRPr lang="zh-TW" altLang="en-US"/>
           </a:p>
@@ -285,11 +354,7 @@
         <p:spPr/>
         <p:txBody>
           <a:bodyPr/>
-          <a:lstStyle>
-            <a:lvl1pPr>
-              <a:defRPr/>
-            </a:lvl1pPr>
-          </a:lstStyle>
+          <a:lstStyle/>
           <a:p>
             <a:fld id="{78D7BC5E-82BC-4BEC-98A8-777F1C9C4392}" type="slidenum">
               <a:rPr lang="zh-TW" altLang="en-US" smtClean="0"/>
@@ -300,6 +365,11 @@
         </p:txBody>
       </p:sp>
     </p:spTree>
+    <p:extLst>
+      <p:ext uri="{BB962C8B-B14F-4D97-AF65-F5344CB8AC3E}">
+        <p14:creationId xmlns:p14="http://schemas.microsoft.com/office/powerpoint/2010/main" val="2476823734"/>
+      </p:ext>
+    </p:extLst>
   </p:cSld>
   <p:clrMapOvr>
     <a:masterClrMapping/>
@@ -340,8 +410,8 @@
           <a:lstStyle/>
           <a:p>
             <a:r>
-              <a:rPr lang="zh-TW" altLang="en-US" smtClean="0"/>
-              <a:t>按一下以編輯母片標題樣式</a:t>
+              <a:rPr lang="en-US" altLang="zh-TW"/>
+              <a:t>Click to edit Master title style</a:t>
             </a:r>
             <a:endParaRPr lang="zh-TW" altLang="en-US"/>
           </a:p>
@@ -364,36 +434,36 @@
           <a:p>
             <a:pPr lvl="0"/>
             <a:r>
-              <a:rPr lang="zh-TW" altLang="en-US" smtClean="0"/>
-              <a:t>按一下以編輯母片文字樣式</a:t>
+              <a:rPr lang="en-US" altLang="zh-TW"/>
+              <a:t>Click to edit Master text styles</a:t>
             </a:r>
           </a:p>
           <a:p>
             <a:pPr lvl="1"/>
             <a:r>
-              <a:rPr lang="zh-TW" altLang="en-US" smtClean="0"/>
-              <a:t>第二層</a:t>
+              <a:rPr lang="en-US" altLang="zh-TW"/>
+              <a:t>Second level</a:t>
             </a:r>
           </a:p>
           <a:p>
             <a:pPr lvl="2"/>
             <a:r>
-              <a:rPr lang="zh-TW" altLang="en-US" smtClean="0"/>
-              <a:t>第三層</a:t>
+              <a:rPr lang="en-US" altLang="zh-TW"/>
+              <a:t>Third level</a:t>
             </a:r>
           </a:p>
           <a:p>
             <a:pPr lvl="3"/>
             <a:r>
-              <a:rPr lang="zh-TW" altLang="en-US" smtClean="0"/>
-              <a:t>第四層</a:t>
+              <a:rPr lang="en-US" altLang="zh-TW"/>
+              <a:t>Fourth level</a:t>
             </a:r>
           </a:p>
           <a:p>
             <a:pPr lvl="4"/>
             <a:r>
-              <a:rPr lang="zh-TW" altLang="en-US" smtClean="0"/>
-              <a:t>第五層</a:t>
+              <a:rPr lang="en-US" altLang="zh-TW"/>
+              <a:t>Fifth level</a:t>
             </a:r>
             <a:endParaRPr lang="zh-TW" altLang="en-US"/>
           </a:p>
@@ -412,15 +482,11 @@
         <p:spPr/>
         <p:txBody>
           <a:bodyPr/>
-          <a:lstStyle>
-            <a:lvl1pPr>
-              <a:defRPr/>
-            </a:lvl1pPr>
-          </a:lstStyle>
+          <a:lstStyle/>
           <a:p>
             <a:fld id="{DA0BF7F6-1145-4871-A3A6-04339E39674E}" type="datetimeFigureOut">
               <a:rPr lang="zh-TW" altLang="en-US" smtClean="0"/>
-              <a:t>2015/10/18</a:t>
+              <a:t>2025/9/20</a:t>
             </a:fld>
             <a:endParaRPr lang="zh-TW" altLang="en-US"/>
           </a:p>
@@ -439,11 +505,7 @@
         <p:spPr/>
         <p:txBody>
           <a:bodyPr/>
-          <a:lstStyle>
-            <a:lvl1pPr>
-              <a:defRPr/>
-            </a:lvl1pPr>
-          </a:lstStyle>
+          <a:lstStyle/>
           <a:p>
             <a:endParaRPr lang="zh-TW" altLang="en-US"/>
           </a:p>
@@ -462,11 +524,7 @@
         <p:spPr/>
         <p:txBody>
           <a:bodyPr/>
-          <a:lstStyle>
-            <a:lvl1pPr>
-              <a:defRPr/>
-            </a:lvl1pPr>
-          </a:lstStyle>
+          <a:lstStyle/>
           <a:p>
             <a:fld id="{78D7BC5E-82BC-4BEC-98A8-777F1C9C4392}" type="slidenum">
               <a:rPr lang="zh-TW" altLang="en-US" smtClean="0"/>
@@ -477,6 +535,11 @@
         </p:txBody>
       </p:sp>
     </p:spTree>
+    <p:extLst>
+      <p:ext uri="{BB962C8B-B14F-4D97-AF65-F5344CB8AC3E}">
+        <p14:creationId xmlns:p14="http://schemas.microsoft.com/office/powerpoint/2010/main" val="2509112356"/>
+      </p:ext>
+    </p:extLst>
   </p:cSld>
   <p:clrMapOvr>
     <a:masterClrMapping/>
@@ -513,8 +576,8 @@
         </p:nvSpPr>
         <p:spPr>
           <a:xfrm>
-            <a:off x="6629400" y="274638"/>
-            <a:ext cx="2057400" cy="5851525"/>
+            <a:off x="8839200" y="274639"/>
+            <a:ext cx="2743200" cy="5851525"/>
           </a:xfrm>
         </p:spPr>
         <p:txBody>
@@ -522,8 +585,8 @@
           <a:lstStyle/>
           <a:p>
             <a:r>
-              <a:rPr lang="zh-TW" altLang="en-US" smtClean="0"/>
-              <a:t>按一下以編輯母片標題樣式</a:t>
+              <a:rPr lang="en-US" altLang="zh-TW"/>
+              <a:t>Click to edit Master title style</a:t>
             </a:r>
             <a:endParaRPr lang="zh-TW" altLang="en-US"/>
           </a:p>
@@ -541,8 +604,8 @@
         </p:nvSpPr>
         <p:spPr>
           <a:xfrm>
-            <a:off x="457200" y="274638"/>
-            <a:ext cx="6019800" cy="5851525"/>
+            <a:off x="609600" y="274639"/>
+            <a:ext cx="8026400" cy="5851525"/>
           </a:xfrm>
         </p:spPr>
         <p:txBody>
@@ -551,36 +614,36 @@
           <a:p>
             <a:pPr lvl="0"/>
             <a:r>
-              <a:rPr lang="zh-TW" altLang="en-US" smtClean="0"/>
-              <a:t>按一下以編輯母片文字樣式</a:t>
+              <a:rPr lang="en-US" altLang="zh-TW"/>
+              <a:t>Click to edit Master text styles</a:t>
             </a:r>
           </a:p>
           <a:p>
             <a:pPr lvl="1"/>
             <a:r>
-              <a:rPr lang="zh-TW" altLang="en-US" smtClean="0"/>
-              <a:t>第二層</a:t>
+              <a:rPr lang="en-US" altLang="zh-TW"/>
+              <a:t>Second level</a:t>
             </a:r>
           </a:p>
           <a:p>
             <a:pPr lvl="2"/>
             <a:r>
-              <a:rPr lang="zh-TW" altLang="en-US" smtClean="0"/>
-              <a:t>第三層</a:t>
+              <a:rPr lang="en-US" altLang="zh-TW"/>
+              <a:t>Third level</a:t>
             </a:r>
           </a:p>
           <a:p>
             <a:pPr lvl="3"/>
             <a:r>
-              <a:rPr lang="zh-TW" altLang="en-US" smtClean="0"/>
-              <a:t>第四層</a:t>
+              <a:rPr lang="en-US" altLang="zh-TW"/>
+              <a:t>Fourth level</a:t>
             </a:r>
           </a:p>
           <a:p>
             <a:pPr lvl="4"/>
             <a:r>
-              <a:rPr lang="zh-TW" altLang="en-US" smtClean="0"/>
-              <a:t>第五層</a:t>
+              <a:rPr lang="en-US" altLang="zh-TW"/>
+              <a:t>Fifth level</a:t>
             </a:r>
             <a:endParaRPr lang="zh-TW" altLang="en-US"/>
           </a:p>
@@ -599,15 +662,11 @@
         <p:spPr/>
         <p:txBody>
           <a:bodyPr/>
-          <a:lstStyle>
-            <a:lvl1pPr>
-              <a:defRPr/>
-            </a:lvl1pPr>
-          </a:lstStyle>
+          <a:lstStyle/>
           <a:p>
             <a:fld id="{DA0BF7F6-1145-4871-A3A6-04339E39674E}" type="datetimeFigureOut">
               <a:rPr lang="zh-TW" altLang="en-US" smtClean="0"/>
-              <a:t>2015/10/18</a:t>
+              <a:t>2025/9/20</a:t>
             </a:fld>
             <a:endParaRPr lang="zh-TW" altLang="en-US"/>
           </a:p>
@@ -626,11 +685,7 @@
         <p:spPr/>
         <p:txBody>
           <a:bodyPr/>
-          <a:lstStyle>
-            <a:lvl1pPr>
-              <a:defRPr/>
-            </a:lvl1pPr>
-          </a:lstStyle>
+          <a:lstStyle/>
           <a:p>
             <a:endParaRPr lang="zh-TW" altLang="en-US"/>
           </a:p>
@@ -649,11 +704,7 @@
         <p:spPr/>
         <p:txBody>
           <a:bodyPr/>
-          <a:lstStyle>
-            <a:lvl1pPr>
-              <a:defRPr/>
-            </a:lvl1pPr>
-          </a:lstStyle>
+          <a:lstStyle/>
           <a:p>
             <a:fld id="{78D7BC5E-82BC-4BEC-98A8-777F1C9C4392}" type="slidenum">
               <a:rPr lang="zh-TW" altLang="en-US" smtClean="0"/>
@@ -664,6 +715,11 @@
         </p:txBody>
       </p:sp>
     </p:spTree>
+    <p:extLst>
+      <p:ext uri="{BB962C8B-B14F-4D97-AF65-F5344CB8AC3E}">
+        <p14:creationId xmlns:p14="http://schemas.microsoft.com/office/powerpoint/2010/main" val="577612051"/>
+      </p:ext>
+    </p:extLst>
   </p:cSld>
   <p:clrMapOvr>
     <a:masterClrMapping/>
@@ -704,8 +760,8 @@
           <a:lstStyle/>
           <a:p>
             <a:r>
-              <a:rPr lang="zh-TW" altLang="en-US" smtClean="0"/>
-              <a:t>按一下以編輯母片標題樣式</a:t>
+              <a:rPr lang="en-US" altLang="zh-TW"/>
+              <a:t>Click to edit Master title style</a:t>
             </a:r>
             <a:endParaRPr lang="zh-TW" altLang="en-US"/>
           </a:p>
@@ -728,36 +784,36 @@
           <a:p>
             <a:pPr lvl="0"/>
             <a:r>
-              <a:rPr lang="zh-TW" altLang="en-US" smtClean="0"/>
-              <a:t>按一下以編輯母片文字樣式</a:t>
+              <a:rPr lang="en-US" altLang="zh-TW"/>
+              <a:t>Click to edit Master text styles</a:t>
             </a:r>
           </a:p>
           <a:p>
             <a:pPr lvl="1"/>
             <a:r>
-              <a:rPr lang="zh-TW" altLang="en-US" smtClean="0"/>
-              <a:t>第二層</a:t>
+              <a:rPr lang="en-US" altLang="zh-TW"/>
+              <a:t>Second level</a:t>
             </a:r>
           </a:p>
           <a:p>
             <a:pPr lvl="2"/>
             <a:r>
-              <a:rPr lang="zh-TW" altLang="en-US" smtClean="0"/>
-              <a:t>第三層</a:t>
+              <a:rPr lang="en-US" altLang="zh-TW"/>
+              <a:t>Third level</a:t>
             </a:r>
           </a:p>
           <a:p>
             <a:pPr lvl="3"/>
             <a:r>
-              <a:rPr lang="zh-TW" altLang="en-US" smtClean="0"/>
-              <a:t>第四層</a:t>
+              <a:rPr lang="en-US" altLang="zh-TW"/>
+              <a:t>Fourth level</a:t>
             </a:r>
           </a:p>
           <a:p>
             <a:pPr lvl="4"/>
             <a:r>
-              <a:rPr lang="zh-TW" altLang="en-US" smtClean="0"/>
-              <a:t>第五層</a:t>
+              <a:rPr lang="en-US" altLang="zh-TW"/>
+              <a:t>Fifth level</a:t>
             </a:r>
             <a:endParaRPr lang="zh-TW" altLang="en-US"/>
           </a:p>
@@ -776,15 +832,11 @@
         <p:spPr/>
         <p:txBody>
           <a:bodyPr/>
-          <a:lstStyle>
-            <a:lvl1pPr>
-              <a:defRPr/>
-            </a:lvl1pPr>
-          </a:lstStyle>
+          <a:lstStyle/>
           <a:p>
             <a:fld id="{DA0BF7F6-1145-4871-A3A6-04339E39674E}" type="datetimeFigureOut">
               <a:rPr lang="zh-TW" altLang="en-US" smtClean="0"/>
-              <a:t>2015/10/18</a:t>
+              <a:t>2025/9/20</a:t>
             </a:fld>
             <a:endParaRPr lang="zh-TW" altLang="en-US"/>
           </a:p>
@@ -803,11 +855,7 @@
         <p:spPr/>
         <p:txBody>
           <a:bodyPr/>
-          <a:lstStyle>
-            <a:lvl1pPr>
-              <a:defRPr/>
-            </a:lvl1pPr>
-          </a:lstStyle>
+          <a:lstStyle/>
           <a:p>
             <a:endParaRPr lang="zh-TW" altLang="en-US"/>
           </a:p>
@@ -826,11 +874,7 @@
         <p:spPr/>
         <p:txBody>
           <a:bodyPr/>
-          <a:lstStyle>
-            <a:lvl1pPr>
-              <a:defRPr/>
-            </a:lvl1pPr>
-          </a:lstStyle>
+          <a:lstStyle/>
           <a:p>
             <a:fld id="{78D7BC5E-82BC-4BEC-98A8-777F1C9C4392}" type="slidenum">
               <a:rPr lang="zh-TW" altLang="en-US" smtClean="0"/>
@@ -841,6 +885,11 @@
         </p:txBody>
       </p:sp>
     </p:spTree>
+    <p:extLst>
+      <p:ext uri="{BB962C8B-B14F-4D97-AF65-F5344CB8AC3E}">
+        <p14:creationId xmlns:p14="http://schemas.microsoft.com/office/powerpoint/2010/main" val="1724678598"/>
+      </p:ext>
+    </p:extLst>
   </p:cSld>
   <p:clrMapOvr>
     <a:masterClrMapping/>
@@ -877,21 +926,21 @@
         </p:nvSpPr>
         <p:spPr>
           <a:xfrm>
-            <a:off x="722313" y="4406900"/>
-            <a:ext cx="7772400" cy="1362075"/>
+            <a:off x="963084" y="4406901"/>
+            <a:ext cx="10363200" cy="1362075"/>
           </a:xfrm>
         </p:spPr>
         <p:txBody>
           <a:bodyPr anchor="t"/>
           <a:lstStyle>
             <a:lvl1pPr algn="l">
-              <a:defRPr sz="4000" b="1" cap="all"/>
+              <a:defRPr sz="5333" b="1" cap="all"/>
             </a:lvl1pPr>
           </a:lstStyle>
           <a:p>
             <a:r>
-              <a:rPr lang="zh-TW" altLang="en-US" smtClean="0"/>
-              <a:t>按一下以編輯母片標題樣式</a:t>
+              <a:rPr lang="en-US" altLang="zh-TW"/>
+              <a:t>Click to edit Master title style</a:t>
             </a:r>
             <a:endParaRPr lang="zh-TW" altLang="en-US"/>
           </a:p>
@@ -909,8 +958,8 @@
         </p:nvSpPr>
         <p:spPr>
           <a:xfrm>
-            <a:off x="722313" y="2906713"/>
-            <a:ext cx="7772400" cy="1500187"/>
+            <a:off x="963084" y="2906713"/>
+            <a:ext cx="10363200" cy="1500187"/>
           </a:xfrm>
         </p:spPr>
         <p:txBody>
@@ -918,46 +967,100 @@
           <a:lstStyle>
             <a:lvl1pPr marL="0" indent="0">
               <a:buNone/>
-              <a:defRPr sz="2000"/>
+              <a:defRPr sz="2667">
+                <a:solidFill>
+                  <a:schemeClr val="tx1">
+                    <a:tint val="75000"/>
+                  </a:schemeClr>
+                </a:solidFill>
+              </a:defRPr>
             </a:lvl1pPr>
-            <a:lvl2pPr marL="457200" indent="0">
-              <a:buNone/>
-              <a:defRPr sz="1800"/>
+            <a:lvl2pPr marL="609585" indent="0">
+              <a:buNone/>
+              <a:defRPr sz="2400">
+                <a:solidFill>
+                  <a:schemeClr val="tx1">
+                    <a:tint val="75000"/>
+                  </a:schemeClr>
+                </a:solidFill>
+              </a:defRPr>
             </a:lvl2pPr>
-            <a:lvl3pPr marL="914400" indent="0">
-              <a:buNone/>
-              <a:defRPr sz="1600"/>
+            <a:lvl3pPr marL="1219170" indent="0">
+              <a:buNone/>
+              <a:defRPr sz="2133">
+                <a:solidFill>
+                  <a:schemeClr val="tx1">
+                    <a:tint val="75000"/>
+                  </a:schemeClr>
+                </a:solidFill>
+              </a:defRPr>
             </a:lvl3pPr>
-            <a:lvl4pPr marL="1371600" indent="0">
-              <a:buNone/>
-              <a:defRPr sz="1400"/>
+            <a:lvl4pPr marL="1828754" indent="0">
+              <a:buNone/>
+              <a:defRPr sz="1867">
+                <a:solidFill>
+                  <a:schemeClr val="tx1">
+                    <a:tint val="75000"/>
+                  </a:schemeClr>
+                </a:solidFill>
+              </a:defRPr>
             </a:lvl4pPr>
-            <a:lvl5pPr marL="1828800" indent="0">
-              <a:buNone/>
-              <a:defRPr sz="1400"/>
+            <a:lvl5pPr marL="2438339" indent="0">
+              <a:buNone/>
+              <a:defRPr sz="1867">
+                <a:solidFill>
+                  <a:schemeClr val="tx1">
+                    <a:tint val="75000"/>
+                  </a:schemeClr>
+                </a:solidFill>
+              </a:defRPr>
             </a:lvl5pPr>
-            <a:lvl6pPr marL="2286000" indent="0">
-              <a:buNone/>
-              <a:defRPr sz="1400"/>
+            <a:lvl6pPr marL="3047924" indent="0">
+              <a:buNone/>
+              <a:defRPr sz="1867">
+                <a:solidFill>
+                  <a:schemeClr val="tx1">
+                    <a:tint val="75000"/>
+                  </a:schemeClr>
+                </a:solidFill>
+              </a:defRPr>
             </a:lvl6pPr>
-            <a:lvl7pPr marL="2743200" indent="0">
-              <a:buNone/>
-              <a:defRPr sz="1400"/>
+            <a:lvl7pPr marL="3657509" indent="0">
+              <a:buNone/>
+              <a:defRPr sz="1867">
+                <a:solidFill>
+                  <a:schemeClr val="tx1">
+                    <a:tint val="75000"/>
+                  </a:schemeClr>
+                </a:solidFill>
+              </a:defRPr>
             </a:lvl7pPr>
-            <a:lvl8pPr marL="3200400" indent="0">
-              <a:buNone/>
-              <a:defRPr sz="1400"/>
+            <a:lvl8pPr marL="4267093" indent="0">
+              <a:buNone/>
+              <a:defRPr sz="1867">
+                <a:solidFill>
+                  <a:schemeClr val="tx1">
+                    <a:tint val="75000"/>
+                  </a:schemeClr>
+                </a:solidFill>
+              </a:defRPr>
             </a:lvl8pPr>
-            <a:lvl9pPr marL="3657600" indent="0">
-              <a:buNone/>
-              <a:defRPr sz="1400"/>
+            <a:lvl9pPr marL="4876678" indent="0">
+              <a:buNone/>
+              <a:defRPr sz="1867">
+                <a:solidFill>
+                  <a:schemeClr val="tx1">
+                    <a:tint val="75000"/>
+                  </a:schemeClr>
+                </a:solidFill>
+              </a:defRPr>
             </a:lvl9pPr>
           </a:lstStyle>
           <a:p>
             <a:pPr lvl="0"/>
             <a:r>
-              <a:rPr lang="zh-TW" altLang="en-US" smtClean="0"/>
-              <a:t>按一下以編輯母片文字樣式</a:t>
+              <a:rPr lang="en-US" altLang="zh-TW"/>
+              <a:t>Click to edit Master text styles</a:t>
             </a:r>
           </a:p>
         </p:txBody>
@@ -975,15 +1078,11 @@
         <p:spPr/>
         <p:txBody>
           <a:bodyPr/>
-          <a:lstStyle>
-            <a:lvl1pPr>
-              <a:defRPr/>
-            </a:lvl1pPr>
-          </a:lstStyle>
+          <a:lstStyle/>
           <a:p>
             <a:fld id="{DA0BF7F6-1145-4871-A3A6-04339E39674E}" type="datetimeFigureOut">
               <a:rPr lang="zh-TW" altLang="en-US" smtClean="0"/>
-              <a:t>2015/10/18</a:t>
+              <a:t>2025/9/20</a:t>
             </a:fld>
             <a:endParaRPr lang="zh-TW" altLang="en-US"/>
           </a:p>
@@ -1002,11 +1101,7 @@
         <p:spPr/>
         <p:txBody>
           <a:bodyPr/>
-          <a:lstStyle>
-            <a:lvl1pPr>
-              <a:defRPr/>
-            </a:lvl1pPr>
-          </a:lstStyle>
+          <a:lstStyle/>
           <a:p>
             <a:endParaRPr lang="zh-TW" altLang="en-US"/>
           </a:p>
@@ -1025,11 +1120,7 @@
         <p:spPr/>
         <p:txBody>
           <a:bodyPr/>
-          <a:lstStyle>
-            <a:lvl1pPr>
-              <a:defRPr/>
-            </a:lvl1pPr>
-          </a:lstStyle>
+          <a:lstStyle/>
           <a:p>
             <a:fld id="{78D7BC5E-82BC-4BEC-98A8-777F1C9C4392}" type="slidenum">
               <a:rPr lang="zh-TW" altLang="en-US" smtClean="0"/>
@@ -1040,6 +1131,11 @@
         </p:txBody>
       </p:sp>
     </p:spTree>
+    <p:extLst>
+      <p:ext uri="{BB962C8B-B14F-4D97-AF65-F5344CB8AC3E}">
+        <p14:creationId xmlns:p14="http://schemas.microsoft.com/office/powerpoint/2010/main" val="3295302382"/>
+      </p:ext>
+    </p:extLst>
   </p:cSld>
   <p:clrMapOvr>
     <a:masterClrMapping/>
@@ -1080,8 +1176,8 @@
           <a:lstStyle/>
           <a:p>
             <a:r>
-              <a:rPr lang="zh-TW" altLang="en-US" smtClean="0"/>
-              <a:t>按一下以編輯母片標題樣式</a:t>
+              <a:rPr lang="en-US" altLang="zh-TW"/>
+              <a:t>Click to edit Master title style</a:t>
             </a:r>
             <a:endParaRPr lang="zh-TW" altLang="en-US"/>
           </a:p>
@@ -1099,74 +1195,74 @@
         </p:nvSpPr>
         <p:spPr>
           <a:xfrm>
-            <a:off x="457200" y="1600200"/>
-            <a:ext cx="4038600" cy="4525963"/>
+            <a:off x="609600" y="1600201"/>
+            <a:ext cx="5384800" cy="4525963"/>
           </a:xfrm>
         </p:spPr>
         <p:txBody>
           <a:bodyPr/>
           <a:lstStyle>
             <a:lvl1pPr>
-              <a:defRPr sz="2800"/>
+              <a:defRPr sz="3733"/>
             </a:lvl1pPr>
             <a:lvl2pPr>
-              <a:defRPr sz="2400"/>
+              <a:defRPr sz="3200"/>
             </a:lvl2pPr>
             <a:lvl3pPr>
-              <a:defRPr sz="2000"/>
+              <a:defRPr sz="2667"/>
             </a:lvl3pPr>
             <a:lvl4pPr>
-              <a:defRPr sz="1800"/>
+              <a:defRPr sz="2400"/>
             </a:lvl4pPr>
             <a:lvl5pPr>
-              <a:defRPr sz="1800"/>
+              <a:defRPr sz="2400"/>
             </a:lvl5pPr>
             <a:lvl6pPr>
-              <a:defRPr sz="1800"/>
+              <a:defRPr sz="2400"/>
             </a:lvl6pPr>
             <a:lvl7pPr>
-              <a:defRPr sz="1800"/>
+              <a:defRPr sz="2400"/>
             </a:lvl7pPr>
             <a:lvl8pPr>
-              <a:defRPr sz="1800"/>
+              <a:defRPr sz="2400"/>
             </a:lvl8pPr>
             <a:lvl9pPr>
-              <a:defRPr sz="1800"/>
+              <a:defRPr sz="2400"/>
             </a:lvl9pPr>
           </a:lstStyle>
           <a:p>
             <a:pPr lvl="0"/>
             <a:r>
-              <a:rPr lang="zh-TW" altLang="en-US" smtClean="0"/>
-              <a:t>按一下以編輯母片文字樣式</a:t>
+              <a:rPr lang="en-US" altLang="zh-TW"/>
+              <a:t>Click to edit Master text styles</a:t>
             </a:r>
           </a:p>
           <a:p>
             <a:pPr lvl="1"/>
             <a:r>
-              <a:rPr lang="zh-TW" altLang="en-US" smtClean="0"/>
-              <a:t>第二層</a:t>
+              <a:rPr lang="en-US" altLang="zh-TW"/>
+              <a:t>Second level</a:t>
             </a:r>
           </a:p>
           <a:p>
             <a:pPr lvl="2"/>
             <a:r>
-              <a:rPr lang="zh-TW" altLang="en-US" smtClean="0"/>
-              <a:t>第三層</a:t>
+              <a:rPr lang="en-US" altLang="zh-TW"/>
+              <a:t>Third level</a:t>
             </a:r>
           </a:p>
           <a:p>
             <a:pPr lvl="3"/>
             <a:r>
-              <a:rPr lang="zh-TW" altLang="en-US" smtClean="0"/>
-              <a:t>第四層</a:t>
+              <a:rPr lang="en-US" altLang="zh-TW"/>
+              <a:t>Fourth level</a:t>
             </a:r>
           </a:p>
           <a:p>
             <a:pPr lvl="4"/>
             <a:r>
-              <a:rPr lang="zh-TW" altLang="en-US" smtClean="0"/>
-              <a:t>第五層</a:t>
+              <a:rPr lang="en-US" altLang="zh-TW"/>
+              <a:t>Fifth level</a:t>
             </a:r>
             <a:endParaRPr lang="zh-TW" altLang="en-US"/>
           </a:p>
@@ -1184,74 +1280,74 @@
         </p:nvSpPr>
         <p:spPr>
           <a:xfrm>
-            <a:off x="4648200" y="1600200"/>
-            <a:ext cx="4038600" cy="4525963"/>
+            <a:off x="6197600" y="1600201"/>
+            <a:ext cx="5384800" cy="4525963"/>
           </a:xfrm>
         </p:spPr>
         <p:txBody>
           <a:bodyPr/>
           <a:lstStyle>
             <a:lvl1pPr>
-              <a:defRPr sz="2800"/>
+              <a:defRPr sz="3733"/>
             </a:lvl1pPr>
             <a:lvl2pPr>
-              <a:defRPr sz="2400"/>
+              <a:defRPr sz="3200"/>
             </a:lvl2pPr>
             <a:lvl3pPr>
-              <a:defRPr sz="2000"/>
+              <a:defRPr sz="2667"/>
             </a:lvl3pPr>
             <a:lvl4pPr>
-              <a:defRPr sz="1800"/>
+              <a:defRPr sz="2400"/>
             </a:lvl4pPr>
             <a:lvl5pPr>
-              <a:defRPr sz="1800"/>
+              <a:defRPr sz="2400"/>
             </a:lvl5pPr>
             <a:lvl6pPr>
-              <a:defRPr sz="1800"/>
+              <a:defRPr sz="2400"/>
             </a:lvl6pPr>
             <a:lvl7pPr>
-              <a:defRPr sz="1800"/>
+              <a:defRPr sz="2400"/>
             </a:lvl7pPr>
             <a:lvl8pPr>
-              <a:defRPr sz="1800"/>
+              <a:defRPr sz="2400"/>
             </a:lvl8pPr>
             <a:lvl9pPr>
-              <a:defRPr sz="1800"/>
+              <a:defRPr sz="2400"/>
             </a:lvl9pPr>
           </a:lstStyle>
           <a:p>
             <a:pPr lvl="0"/>
             <a:r>
-              <a:rPr lang="zh-TW" altLang="en-US" smtClean="0"/>
-              <a:t>按一下以編輯母片文字樣式</a:t>
+              <a:rPr lang="en-US" altLang="zh-TW"/>
+              <a:t>Click to edit Master text styles</a:t>
             </a:r>
           </a:p>
           <a:p>
             <a:pPr lvl="1"/>
             <a:r>
-              <a:rPr lang="zh-TW" altLang="en-US" smtClean="0"/>
-              <a:t>第二層</a:t>
+              <a:rPr lang="en-US" altLang="zh-TW"/>
+              <a:t>Second level</a:t>
             </a:r>
           </a:p>
           <a:p>
             <a:pPr lvl="2"/>
             <a:r>
-              <a:rPr lang="zh-TW" altLang="en-US" smtClean="0"/>
-              <a:t>第三層</a:t>
+              <a:rPr lang="en-US" altLang="zh-TW"/>
+              <a:t>Third level</a:t>
             </a:r>
           </a:p>
           <a:p>
             <a:pPr lvl="3"/>
             <a:r>
-              <a:rPr lang="zh-TW" altLang="en-US" smtClean="0"/>
-              <a:t>第四層</a:t>
+              <a:rPr lang="en-US" altLang="zh-TW"/>
+              <a:t>Fourth level</a:t>
             </a:r>
           </a:p>
           <a:p>
             <a:pPr lvl="4"/>
             <a:r>
-              <a:rPr lang="zh-TW" altLang="en-US" smtClean="0"/>
-              <a:t>第五層</a:t>
+              <a:rPr lang="en-US" altLang="zh-TW"/>
+              <a:t>Fifth level</a:t>
             </a:r>
             <a:endParaRPr lang="zh-TW" altLang="en-US"/>
           </a:p>
@@ -1270,15 +1366,11 @@
         <p:spPr/>
         <p:txBody>
           <a:bodyPr/>
-          <a:lstStyle>
-            <a:lvl1pPr>
-              <a:defRPr/>
-            </a:lvl1pPr>
-          </a:lstStyle>
+          <a:lstStyle/>
           <a:p>
             <a:fld id="{DA0BF7F6-1145-4871-A3A6-04339E39674E}" type="datetimeFigureOut">
               <a:rPr lang="zh-TW" altLang="en-US" smtClean="0"/>
-              <a:t>2015/10/18</a:t>
+              <a:t>2025/9/20</a:t>
             </a:fld>
             <a:endParaRPr lang="zh-TW" altLang="en-US"/>
           </a:p>
@@ -1297,11 +1389,7 @@
         <p:spPr/>
         <p:txBody>
           <a:bodyPr/>
-          <a:lstStyle>
-            <a:lvl1pPr>
-              <a:defRPr/>
-            </a:lvl1pPr>
-          </a:lstStyle>
+          <a:lstStyle/>
           <a:p>
             <a:endParaRPr lang="zh-TW" altLang="en-US"/>
           </a:p>
@@ -1320,11 +1408,7 @@
         <p:spPr/>
         <p:txBody>
           <a:bodyPr/>
-          <a:lstStyle>
-            <a:lvl1pPr>
-              <a:defRPr/>
-            </a:lvl1pPr>
-          </a:lstStyle>
+          <a:lstStyle/>
           <a:p>
             <a:fld id="{78D7BC5E-82BC-4BEC-98A8-777F1C9C4392}" type="slidenum">
               <a:rPr lang="zh-TW" altLang="en-US" smtClean="0"/>
@@ -1335,6 +1419,11 @@
         </p:txBody>
       </p:sp>
     </p:spTree>
+    <p:extLst>
+      <p:ext uri="{BB962C8B-B14F-4D97-AF65-F5344CB8AC3E}">
+        <p14:creationId xmlns:p14="http://schemas.microsoft.com/office/powerpoint/2010/main" val="4013229183"/>
+      </p:ext>
+    </p:extLst>
   </p:cSld>
   <p:clrMapOvr>
     <a:masterClrMapping/>
@@ -1379,8 +1468,8 @@
           </a:lstStyle>
           <a:p>
             <a:r>
-              <a:rPr lang="zh-TW" altLang="en-US" smtClean="0"/>
-              <a:t>按一下以編輯母片標題樣式</a:t>
+              <a:rPr lang="en-US" altLang="zh-TW"/>
+              <a:t>Click to edit Master title style</a:t>
             </a:r>
             <a:endParaRPr lang="zh-TW" altLang="en-US"/>
           </a:p>
@@ -1398,8 +1487,8 @@
         </p:nvSpPr>
         <p:spPr>
           <a:xfrm>
-            <a:off x="457200" y="1535113"/>
-            <a:ext cx="4040188" cy="639762"/>
+            <a:off x="609600" y="1535113"/>
+            <a:ext cx="5386917" cy="639763"/>
           </a:xfrm>
         </p:spPr>
         <p:txBody>
@@ -1407,46 +1496,46 @@
           <a:lstStyle>
             <a:lvl1pPr marL="0" indent="0">
               <a:buNone/>
+              <a:defRPr sz="3200" b="1"/>
+            </a:lvl1pPr>
+            <a:lvl2pPr marL="609585" indent="0">
+              <a:buNone/>
+              <a:defRPr sz="2667" b="1"/>
+            </a:lvl2pPr>
+            <a:lvl3pPr marL="1219170" indent="0">
+              <a:buNone/>
               <a:defRPr sz="2400" b="1"/>
-            </a:lvl1pPr>
-            <a:lvl2pPr marL="457200" indent="0">
-              <a:buNone/>
-              <a:defRPr sz="2000" b="1"/>
-            </a:lvl2pPr>
-            <a:lvl3pPr marL="914400" indent="0">
-              <a:buNone/>
-              <a:defRPr sz="1800" b="1"/>
             </a:lvl3pPr>
-            <a:lvl4pPr marL="1371600" indent="0">
-              <a:buNone/>
-              <a:defRPr sz="1600" b="1"/>
+            <a:lvl4pPr marL="1828754" indent="0">
+              <a:buNone/>
+              <a:defRPr sz="2133" b="1"/>
             </a:lvl4pPr>
-            <a:lvl5pPr marL="1828800" indent="0">
-              <a:buNone/>
-              <a:defRPr sz="1600" b="1"/>
+            <a:lvl5pPr marL="2438339" indent="0">
+              <a:buNone/>
+              <a:defRPr sz="2133" b="1"/>
             </a:lvl5pPr>
-            <a:lvl6pPr marL="2286000" indent="0">
-              <a:buNone/>
-              <a:defRPr sz="1600" b="1"/>
+            <a:lvl6pPr marL="3047924" indent="0">
+              <a:buNone/>
+              <a:defRPr sz="2133" b="1"/>
             </a:lvl6pPr>
-            <a:lvl7pPr marL="2743200" indent="0">
-              <a:buNone/>
-              <a:defRPr sz="1600" b="1"/>
+            <a:lvl7pPr marL="3657509" indent="0">
+              <a:buNone/>
+              <a:defRPr sz="2133" b="1"/>
             </a:lvl7pPr>
-            <a:lvl8pPr marL="3200400" indent="0">
-              <a:buNone/>
-              <a:defRPr sz="1600" b="1"/>
+            <a:lvl8pPr marL="4267093" indent="0">
+              <a:buNone/>
+              <a:defRPr sz="2133" b="1"/>
             </a:lvl8pPr>
-            <a:lvl9pPr marL="3657600" indent="0">
-              <a:buNone/>
-              <a:defRPr sz="1600" b="1"/>
+            <a:lvl9pPr marL="4876678" indent="0">
+              <a:buNone/>
+              <a:defRPr sz="2133" b="1"/>
             </a:lvl9pPr>
           </a:lstStyle>
           <a:p>
             <a:pPr lvl="0"/>
             <a:r>
-              <a:rPr lang="zh-TW" altLang="en-US" smtClean="0"/>
-              <a:t>按一下以編輯母片文字樣式</a:t>
+              <a:rPr lang="en-US" altLang="zh-TW"/>
+              <a:t>Click to edit Master text styles</a:t>
             </a:r>
           </a:p>
         </p:txBody>
@@ -1463,74 +1552,74 @@
         </p:nvSpPr>
         <p:spPr>
           <a:xfrm>
-            <a:off x="457200" y="2174875"/>
-            <a:ext cx="4040188" cy="3951288"/>
+            <a:off x="609600" y="2174875"/>
+            <a:ext cx="5386917" cy="3951288"/>
           </a:xfrm>
         </p:spPr>
         <p:txBody>
           <a:bodyPr/>
           <a:lstStyle>
             <a:lvl1pPr>
-              <a:defRPr sz="2400"/>
+              <a:defRPr sz="3200"/>
             </a:lvl1pPr>
             <a:lvl2pPr>
-              <a:defRPr sz="2000"/>
+              <a:defRPr sz="2667"/>
             </a:lvl2pPr>
             <a:lvl3pPr>
-              <a:defRPr sz="1800"/>
+              <a:defRPr sz="2400"/>
             </a:lvl3pPr>
             <a:lvl4pPr>
-              <a:defRPr sz="1600"/>
+              <a:defRPr sz="2133"/>
             </a:lvl4pPr>
             <a:lvl5pPr>
-              <a:defRPr sz="1600"/>
+              <a:defRPr sz="2133"/>
             </a:lvl5pPr>
             <a:lvl6pPr>
-              <a:defRPr sz="1600"/>
+              <a:defRPr sz="2133"/>
             </a:lvl6pPr>
             <a:lvl7pPr>
-              <a:defRPr sz="1600"/>
+              <a:defRPr sz="2133"/>
             </a:lvl7pPr>
             <a:lvl8pPr>
-              <a:defRPr sz="1600"/>
+              <a:defRPr sz="2133"/>
             </a:lvl8pPr>
             <a:lvl9pPr>
-              <a:defRPr sz="1600"/>
+              <a:defRPr sz="2133"/>
             </a:lvl9pPr>
           </a:lstStyle>
           <a:p>
             <a:pPr lvl="0"/>
             <a:r>
-              <a:rPr lang="zh-TW" altLang="en-US" smtClean="0"/>
-              <a:t>按一下以編輯母片文字樣式</a:t>
+              <a:rPr lang="en-US" altLang="zh-TW"/>
+              <a:t>Click to edit Master text styles</a:t>
             </a:r>
           </a:p>
           <a:p>
             <a:pPr lvl="1"/>
             <a:r>
-              <a:rPr lang="zh-TW" altLang="en-US" smtClean="0"/>
-              <a:t>第二層</a:t>
+              <a:rPr lang="en-US" altLang="zh-TW"/>
+              <a:t>Second level</a:t>
             </a:r>
           </a:p>
           <a:p>
             <a:pPr lvl="2"/>
             <a:r>
-              <a:rPr lang="zh-TW" altLang="en-US" smtClean="0"/>
-              <a:t>第三層</a:t>
+              <a:rPr lang="en-US" altLang="zh-TW"/>
+              <a:t>Third level</a:t>
             </a:r>
           </a:p>
           <a:p>
             <a:pPr lvl="3"/>
             <a:r>
-              <a:rPr lang="zh-TW" altLang="en-US" smtClean="0"/>
-              <a:t>第四層</a:t>
+              <a:rPr lang="en-US" altLang="zh-TW"/>
+              <a:t>Fourth level</a:t>
             </a:r>
           </a:p>
           <a:p>
             <a:pPr lvl="4"/>
             <a:r>
-              <a:rPr lang="zh-TW" altLang="en-US" smtClean="0"/>
-              <a:t>第五層</a:t>
+              <a:rPr lang="en-US" altLang="zh-TW"/>
+              <a:t>Fifth level</a:t>
             </a:r>
             <a:endParaRPr lang="zh-TW" altLang="en-US"/>
           </a:p>
@@ -1548,8 +1637,8 @@
         </p:nvSpPr>
         <p:spPr>
           <a:xfrm>
-            <a:off x="4645025" y="1535113"/>
-            <a:ext cx="4041775" cy="639762"/>
+            <a:off x="6193372" y="1535113"/>
+            <a:ext cx="5389033" cy="639763"/>
           </a:xfrm>
         </p:spPr>
         <p:txBody>
@@ -1557,46 +1646,46 @@
           <a:lstStyle>
             <a:lvl1pPr marL="0" indent="0">
               <a:buNone/>
+              <a:defRPr sz="3200" b="1"/>
+            </a:lvl1pPr>
+            <a:lvl2pPr marL="609585" indent="0">
+              <a:buNone/>
+              <a:defRPr sz="2667" b="1"/>
+            </a:lvl2pPr>
+            <a:lvl3pPr marL="1219170" indent="0">
+              <a:buNone/>
               <a:defRPr sz="2400" b="1"/>
-            </a:lvl1pPr>
-            <a:lvl2pPr marL="457200" indent="0">
-              <a:buNone/>
-              <a:defRPr sz="2000" b="1"/>
-            </a:lvl2pPr>
-            <a:lvl3pPr marL="914400" indent="0">
-              <a:buNone/>
-              <a:defRPr sz="1800" b="1"/>
             </a:lvl3pPr>
-            <a:lvl4pPr marL="1371600" indent="0">
-              <a:buNone/>
-              <a:defRPr sz="1600" b="1"/>
+            <a:lvl4pPr marL="1828754" indent="0">
+              <a:buNone/>
+              <a:defRPr sz="2133" b="1"/>
             </a:lvl4pPr>
-            <a:lvl5pPr marL="1828800" indent="0">
-              <a:buNone/>
-              <a:defRPr sz="1600" b="1"/>
+            <a:lvl5pPr marL="2438339" indent="0">
+              <a:buNone/>
+              <a:defRPr sz="2133" b="1"/>
             </a:lvl5pPr>
-            <a:lvl6pPr marL="2286000" indent="0">
-              <a:buNone/>
-              <a:defRPr sz="1600" b="1"/>
+            <a:lvl6pPr marL="3047924" indent="0">
+              <a:buNone/>
+              <a:defRPr sz="2133" b="1"/>
             </a:lvl6pPr>
-            <a:lvl7pPr marL="2743200" indent="0">
-              <a:buNone/>
-              <a:defRPr sz="1600" b="1"/>
+            <a:lvl7pPr marL="3657509" indent="0">
+              <a:buNone/>
+              <a:defRPr sz="2133" b="1"/>
             </a:lvl7pPr>
-            <a:lvl8pPr marL="3200400" indent="0">
-              <a:buNone/>
-              <a:defRPr sz="1600" b="1"/>
+            <a:lvl8pPr marL="4267093" indent="0">
+              <a:buNone/>
+              <a:defRPr sz="2133" b="1"/>
             </a:lvl8pPr>
-            <a:lvl9pPr marL="3657600" indent="0">
-              <a:buNone/>
-              <a:defRPr sz="1600" b="1"/>
+            <a:lvl9pPr marL="4876678" indent="0">
+              <a:buNone/>
+              <a:defRPr sz="2133" b="1"/>
             </a:lvl9pPr>
           </a:lstStyle>
           <a:p>
             <a:pPr lvl="0"/>
             <a:r>
-              <a:rPr lang="zh-TW" altLang="en-US" smtClean="0"/>
-              <a:t>按一下以編輯母片文字樣式</a:t>
+              <a:rPr lang="en-US" altLang="zh-TW"/>
+              <a:t>Click to edit Master text styles</a:t>
             </a:r>
           </a:p>
         </p:txBody>
@@ -1613,74 +1702,74 @@
         </p:nvSpPr>
         <p:spPr>
           <a:xfrm>
-            <a:off x="4645025" y="2174875"/>
-            <a:ext cx="4041775" cy="3951288"/>
+            <a:off x="6193372" y="2174875"/>
+            <a:ext cx="5389033" cy="3951288"/>
           </a:xfrm>
         </p:spPr>
         <p:txBody>
           <a:bodyPr/>
           <a:lstStyle>
             <a:lvl1pPr>
-              <a:defRPr sz="2400"/>
+              <a:defRPr sz="3200"/>
             </a:lvl1pPr>
             <a:lvl2pPr>
-              <a:defRPr sz="2000"/>
+              <a:defRPr sz="2667"/>
             </a:lvl2pPr>
             <a:lvl3pPr>
-              <a:defRPr sz="1800"/>
+              <a:defRPr sz="2400"/>
             </a:lvl3pPr>
             <a:lvl4pPr>
-              <a:defRPr sz="1600"/>
+              <a:defRPr sz="2133"/>
             </a:lvl4pPr>
             <a:lvl5pPr>
-              <a:defRPr sz="1600"/>
+              <a:defRPr sz="2133"/>
             </a:lvl5pPr>
             <a:lvl6pPr>
-              <a:defRPr sz="1600"/>
+              <a:defRPr sz="2133"/>
             </a:lvl6pPr>
             <a:lvl7pPr>
-              <a:defRPr sz="1600"/>
+              <a:defRPr sz="2133"/>
             </a:lvl7pPr>
             <a:lvl8pPr>
-              <a:defRPr sz="1600"/>
+              <a:defRPr sz="2133"/>
             </a:lvl8pPr>
             <a:lvl9pPr>
-              <a:defRPr sz="1600"/>
+              <a:defRPr sz="2133"/>
             </a:lvl9pPr>
           </a:lstStyle>
           <a:p>
             <a:pPr lvl="0"/>
             <a:r>
-              <a:rPr lang="zh-TW" altLang="en-US" smtClean="0"/>
-              <a:t>按一下以編輯母片文字樣式</a:t>
+              <a:rPr lang="en-US" altLang="zh-TW"/>
+              <a:t>Click to edit Master text styles</a:t>
             </a:r>
           </a:p>
           <a:p>
             <a:pPr lvl="1"/>
             <a:r>
-              <a:rPr lang="zh-TW" altLang="en-US" smtClean="0"/>
-              <a:t>第二層</a:t>
+              <a:rPr lang="en-US" altLang="zh-TW"/>
+              <a:t>Second level</a:t>
             </a:r>
           </a:p>
           <a:p>
             <a:pPr lvl="2"/>
             <a:r>
-              <a:rPr lang="zh-TW" altLang="en-US" smtClean="0"/>
-              <a:t>第三層</a:t>
+              <a:rPr lang="en-US" altLang="zh-TW"/>
+              <a:t>Third level</a:t>
             </a:r>
           </a:p>
           <a:p>
             <a:pPr lvl="3"/>
             <a:r>
-              <a:rPr lang="zh-TW" altLang="en-US" smtClean="0"/>
-              <a:t>第四層</a:t>
+              <a:rPr lang="en-US" altLang="zh-TW"/>
+              <a:t>Fourth level</a:t>
             </a:r>
           </a:p>
           <a:p>
             <a:pPr lvl="4"/>
             <a:r>
-              <a:rPr lang="zh-TW" altLang="en-US" smtClean="0"/>
-              <a:t>第五層</a:t>
+              <a:rPr lang="en-US" altLang="zh-TW"/>
+              <a:t>Fifth level</a:t>
             </a:r>
             <a:endParaRPr lang="zh-TW" altLang="en-US"/>
           </a:p>
@@ -1699,15 +1788,11 @@
         <p:spPr/>
         <p:txBody>
           <a:bodyPr/>
-          <a:lstStyle>
-            <a:lvl1pPr>
-              <a:defRPr/>
-            </a:lvl1pPr>
-          </a:lstStyle>
+          <a:lstStyle/>
           <a:p>
             <a:fld id="{DA0BF7F6-1145-4871-A3A6-04339E39674E}" type="datetimeFigureOut">
               <a:rPr lang="zh-TW" altLang="en-US" smtClean="0"/>
-              <a:t>2015/10/18</a:t>
+              <a:t>2025/9/20</a:t>
             </a:fld>
             <a:endParaRPr lang="zh-TW" altLang="en-US"/>
           </a:p>
@@ -1726,11 +1811,7 @@
         <p:spPr/>
         <p:txBody>
           <a:bodyPr/>
-          <a:lstStyle>
-            <a:lvl1pPr>
-              <a:defRPr/>
-            </a:lvl1pPr>
-          </a:lstStyle>
+          <a:lstStyle/>
           <a:p>
             <a:endParaRPr lang="zh-TW" altLang="en-US"/>
           </a:p>
@@ -1749,11 +1830,7 @@
         <p:spPr/>
         <p:txBody>
           <a:bodyPr/>
-          <a:lstStyle>
-            <a:lvl1pPr>
-              <a:defRPr/>
-            </a:lvl1pPr>
-          </a:lstStyle>
+          <a:lstStyle/>
           <a:p>
             <a:fld id="{78D7BC5E-82BC-4BEC-98A8-777F1C9C4392}" type="slidenum">
               <a:rPr lang="zh-TW" altLang="en-US" smtClean="0"/>
@@ -1764,6 +1841,11 @@
         </p:txBody>
       </p:sp>
     </p:spTree>
+    <p:extLst>
+      <p:ext uri="{BB962C8B-B14F-4D97-AF65-F5344CB8AC3E}">
+        <p14:creationId xmlns:p14="http://schemas.microsoft.com/office/powerpoint/2010/main" val="2511106371"/>
+      </p:ext>
+    </p:extLst>
   </p:cSld>
   <p:clrMapOvr>
     <a:masterClrMapping/>
@@ -1804,8 +1886,8 @@
           <a:lstStyle/>
           <a:p>
             <a:r>
-              <a:rPr lang="zh-TW" altLang="en-US" smtClean="0"/>
-              <a:t>按一下以編輯母片標題樣式</a:t>
+              <a:rPr lang="en-US" altLang="zh-TW"/>
+              <a:t>Click to edit Master title style</a:t>
             </a:r>
             <a:endParaRPr lang="zh-TW" altLang="en-US"/>
           </a:p>
@@ -1824,15 +1906,11 @@
         <p:spPr/>
         <p:txBody>
           <a:bodyPr/>
-          <a:lstStyle>
-            <a:lvl1pPr>
-              <a:defRPr/>
-            </a:lvl1pPr>
-          </a:lstStyle>
+          <a:lstStyle/>
           <a:p>
             <a:fld id="{DA0BF7F6-1145-4871-A3A6-04339E39674E}" type="datetimeFigureOut">
               <a:rPr lang="zh-TW" altLang="en-US" smtClean="0"/>
-              <a:t>2015/10/18</a:t>
+              <a:t>2025/9/20</a:t>
             </a:fld>
             <a:endParaRPr lang="zh-TW" altLang="en-US"/>
           </a:p>
@@ -1851,11 +1929,7 @@
         <p:spPr/>
         <p:txBody>
           <a:bodyPr/>
-          <a:lstStyle>
-            <a:lvl1pPr>
-              <a:defRPr/>
-            </a:lvl1pPr>
-          </a:lstStyle>
+          <a:lstStyle/>
           <a:p>
             <a:endParaRPr lang="zh-TW" altLang="en-US"/>
           </a:p>
@@ -1874,11 +1948,7 @@
         <p:spPr/>
         <p:txBody>
           <a:bodyPr/>
-          <a:lstStyle>
-            <a:lvl1pPr>
-              <a:defRPr/>
-            </a:lvl1pPr>
-          </a:lstStyle>
+          <a:lstStyle/>
           <a:p>
             <a:fld id="{78D7BC5E-82BC-4BEC-98A8-777F1C9C4392}" type="slidenum">
               <a:rPr lang="zh-TW" altLang="en-US" smtClean="0"/>
@@ -1889,6 +1959,11 @@
         </p:txBody>
       </p:sp>
     </p:spTree>
+    <p:extLst>
+      <p:ext uri="{BB962C8B-B14F-4D97-AF65-F5344CB8AC3E}">
+        <p14:creationId xmlns:p14="http://schemas.microsoft.com/office/powerpoint/2010/main" val="3506414863"/>
+      </p:ext>
+    </p:extLst>
   </p:cSld>
   <p:clrMapOvr>
     <a:masterClrMapping/>
@@ -1926,15 +2001,11 @@
         <p:spPr/>
         <p:txBody>
           <a:bodyPr/>
-          <a:lstStyle>
-            <a:lvl1pPr>
-              <a:defRPr/>
-            </a:lvl1pPr>
-          </a:lstStyle>
+          <a:lstStyle/>
           <a:p>
             <a:fld id="{DA0BF7F6-1145-4871-A3A6-04339E39674E}" type="datetimeFigureOut">
               <a:rPr lang="zh-TW" altLang="en-US" smtClean="0"/>
-              <a:t>2015/10/18</a:t>
+              <a:t>2025/9/20</a:t>
             </a:fld>
             <a:endParaRPr lang="zh-TW" altLang="en-US"/>
           </a:p>
@@ -1953,11 +2024,7 @@
         <p:spPr/>
         <p:txBody>
           <a:bodyPr/>
-          <a:lstStyle>
-            <a:lvl1pPr>
-              <a:defRPr/>
-            </a:lvl1pPr>
-          </a:lstStyle>
+          <a:lstStyle/>
           <a:p>
             <a:endParaRPr lang="zh-TW" altLang="en-US"/>
           </a:p>
@@ -1976,11 +2043,7 @@
         <p:spPr/>
         <p:txBody>
           <a:bodyPr/>
-          <a:lstStyle>
-            <a:lvl1pPr>
-              <a:defRPr/>
-            </a:lvl1pPr>
-          </a:lstStyle>
+          <a:lstStyle/>
           <a:p>
             <a:fld id="{78D7BC5E-82BC-4BEC-98A8-777F1C9C4392}" type="slidenum">
               <a:rPr lang="zh-TW" altLang="en-US" smtClean="0"/>
@@ -1991,6 +2054,11 @@
         </p:txBody>
       </p:sp>
     </p:spTree>
+    <p:extLst>
+      <p:ext uri="{BB962C8B-B14F-4D97-AF65-F5344CB8AC3E}">
+        <p14:creationId xmlns:p14="http://schemas.microsoft.com/office/powerpoint/2010/main" val="203416110"/>
+      </p:ext>
+    </p:extLst>
   </p:cSld>
   <p:clrMapOvr>
     <a:masterClrMapping/>
@@ -2027,21 +2095,21 @@
         </p:nvSpPr>
         <p:spPr>
           <a:xfrm>
-            <a:off x="457200" y="273050"/>
-            <a:ext cx="3008313" cy="1162050"/>
+            <a:off x="609603" y="273049"/>
+            <a:ext cx="4011084" cy="1162051"/>
           </a:xfrm>
         </p:spPr>
         <p:txBody>
           <a:bodyPr anchor="b"/>
           <a:lstStyle>
             <a:lvl1pPr algn="l">
-              <a:defRPr sz="2000" b="1"/>
+              <a:defRPr sz="2667" b="1"/>
             </a:lvl1pPr>
           </a:lstStyle>
           <a:p>
             <a:r>
-              <a:rPr lang="zh-TW" altLang="en-US" smtClean="0"/>
-              <a:t>按一下以編輯母片標題樣式</a:t>
+              <a:rPr lang="en-US" altLang="zh-TW"/>
+              <a:t>Click to edit Master title style</a:t>
             </a:r>
             <a:endParaRPr lang="zh-TW" altLang="en-US"/>
           </a:p>
@@ -2059,74 +2127,74 @@
         </p:nvSpPr>
         <p:spPr>
           <a:xfrm>
-            <a:off x="3575050" y="273050"/>
-            <a:ext cx="5111750" cy="5853113"/>
+            <a:off x="4766733" y="273053"/>
+            <a:ext cx="6815667" cy="5853113"/>
           </a:xfrm>
         </p:spPr>
         <p:txBody>
           <a:bodyPr/>
           <a:lstStyle>
             <a:lvl1pPr>
-              <a:defRPr sz="3200"/>
+              <a:defRPr sz="4267"/>
             </a:lvl1pPr>
             <a:lvl2pPr>
-              <a:defRPr sz="2800"/>
+              <a:defRPr sz="3733"/>
             </a:lvl2pPr>
             <a:lvl3pPr>
-              <a:defRPr sz="2400"/>
+              <a:defRPr sz="3200"/>
             </a:lvl3pPr>
             <a:lvl4pPr>
-              <a:defRPr sz="2000"/>
+              <a:defRPr sz="2667"/>
             </a:lvl4pPr>
             <a:lvl5pPr>
-              <a:defRPr sz="2000"/>
+              <a:defRPr sz="2667"/>
             </a:lvl5pPr>
             <a:lvl6pPr>
-              <a:defRPr sz="2000"/>
+              <a:defRPr sz="2667"/>
             </a:lvl6pPr>
             <a:lvl7pPr>
-              <a:defRPr sz="2000"/>
+              <a:defRPr sz="2667"/>
             </a:lvl7pPr>
             <a:lvl8pPr>
-              <a:defRPr sz="2000"/>
+              <a:defRPr sz="2667"/>
             </a:lvl8pPr>
             <a:lvl9pPr>
-              <a:defRPr sz="2000"/>
+              <a:defRPr sz="2667"/>
             </a:lvl9pPr>
           </a:lstStyle>
           <a:p>
             <a:pPr lvl="0"/>
             <a:r>
-              <a:rPr lang="zh-TW" altLang="en-US" smtClean="0"/>
-              <a:t>按一下以編輯母片文字樣式</a:t>
+              <a:rPr lang="en-US" altLang="zh-TW"/>
+              <a:t>Click to edit Master text styles</a:t>
             </a:r>
           </a:p>
           <a:p>
             <a:pPr lvl="1"/>
             <a:r>
-              <a:rPr lang="zh-TW" altLang="en-US" smtClean="0"/>
-              <a:t>第二層</a:t>
+              <a:rPr lang="en-US" altLang="zh-TW"/>
+              <a:t>Second level</a:t>
             </a:r>
           </a:p>
           <a:p>
             <a:pPr lvl="2"/>
             <a:r>
-              <a:rPr lang="zh-TW" altLang="en-US" smtClean="0"/>
-              <a:t>第三層</a:t>
+              <a:rPr lang="en-US" altLang="zh-TW"/>
+              <a:t>Third level</a:t>
             </a:r>
           </a:p>
           <a:p>
             <a:pPr lvl="3"/>
             <a:r>
-              <a:rPr lang="zh-TW" altLang="en-US" smtClean="0"/>
-              <a:t>第四層</a:t>
+              <a:rPr lang="en-US" altLang="zh-TW"/>
+              <a:t>Fourth level</a:t>
             </a:r>
           </a:p>
           <a:p>
             <a:pPr lvl="4"/>
             <a:r>
-              <a:rPr lang="zh-TW" altLang="en-US" smtClean="0"/>
-              <a:t>第五層</a:t>
+              <a:rPr lang="en-US" altLang="zh-TW"/>
+              <a:t>Fifth level</a:t>
             </a:r>
             <a:endParaRPr lang="zh-TW" altLang="en-US"/>
           </a:p>
@@ -2144,8 +2212,8 @@
         </p:nvSpPr>
         <p:spPr>
           <a:xfrm>
-            <a:off x="457200" y="1435100"/>
-            <a:ext cx="3008313" cy="4691063"/>
+            <a:off x="609603" y="1435103"/>
+            <a:ext cx="4011084" cy="4691063"/>
           </a:xfrm>
         </p:spPr>
         <p:txBody>
@@ -2153,46 +2221,46 @@
           <a:lstStyle>
             <a:lvl1pPr marL="0" indent="0">
               <a:buNone/>
-              <a:defRPr sz="1400"/>
+              <a:defRPr sz="1867"/>
             </a:lvl1pPr>
-            <a:lvl2pPr marL="457200" indent="0">
+            <a:lvl2pPr marL="609585" indent="0">
+              <a:buNone/>
+              <a:defRPr sz="1600"/>
+            </a:lvl2pPr>
+            <a:lvl3pPr marL="1219170" indent="0">
+              <a:buNone/>
+              <a:defRPr sz="1333"/>
+            </a:lvl3pPr>
+            <a:lvl4pPr marL="1828754" indent="0">
               <a:buNone/>
               <a:defRPr sz="1200"/>
-            </a:lvl2pPr>
-            <a:lvl3pPr marL="914400" indent="0">
-              <a:buNone/>
-              <a:defRPr sz="1000"/>
-            </a:lvl3pPr>
-            <a:lvl4pPr marL="1371600" indent="0">
-              <a:buNone/>
-              <a:defRPr sz="900"/>
             </a:lvl4pPr>
-            <a:lvl5pPr marL="1828800" indent="0">
-              <a:buNone/>
-              <a:defRPr sz="900"/>
+            <a:lvl5pPr marL="2438339" indent="0">
+              <a:buNone/>
+              <a:defRPr sz="1200"/>
             </a:lvl5pPr>
-            <a:lvl6pPr marL="2286000" indent="0">
-              <a:buNone/>
-              <a:defRPr sz="900"/>
+            <a:lvl6pPr marL="3047924" indent="0">
+              <a:buNone/>
+              <a:defRPr sz="1200"/>
             </a:lvl6pPr>
-            <a:lvl7pPr marL="2743200" indent="0">
-              <a:buNone/>
-              <a:defRPr sz="900"/>
+            <a:lvl7pPr marL="3657509" indent="0">
+              <a:buNone/>
+              <a:defRPr sz="1200"/>
             </a:lvl7pPr>
-            <a:lvl8pPr marL="3200400" indent="0">
-              <a:buNone/>
-              <a:defRPr sz="900"/>
+            <a:lvl8pPr marL="4267093" indent="0">
+              <a:buNone/>
+              <a:defRPr sz="1200"/>
             </a:lvl8pPr>
-            <a:lvl9pPr marL="3657600" indent="0">
-              <a:buNone/>
-              <a:defRPr sz="900"/>
+            <a:lvl9pPr marL="4876678" indent="0">
+              <a:buNone/>
+              <a:defRPr sz="1200"/>
             </a:lvl9pPr>
           </a:lstStyle>
           <a:p>
             <a:pPr lvl="0"/>
             <a:r>
-              <a:rPr lang="zh-TW" altLang="en-US" smtClean="0"/>
-              <a:t>按一下以編輯母片文字樣式</a:t>
+              <a:rPr lang="en-US" altLang="zh-TW"/>
+              <a:t>Click to edit Master text styles</a:t>
             </a:r>
           </a:p>
         </p:txBody>
@@ -2210,15 +2278,11 @@
         <p:spPr/>
         <p:txBody>
           <a:bodyPr/>
-          <a:lstStyle>
-            <a:lvl1pPr>
-              <a:defRPr/>
-            </a:lvl1pPr>
-          </a:lstStyle>
+          <a:lstStyle/>
           <a:p>
             <a:fld id="{DA0BF7F6-1145-4871-A3A6-04339E39674E}" type="datetimeFigureOut">
               <a:rPr lang="zh-TW" altLang="en-US" smtClean="0"/>
-              <a:t>2015/10/18</a:t>
+              <a:t>2025/9/20</a:t>
             </a:fld>
             <a:endParaRPr lang="zh-TW" altLang="en-US"/>
           </a:p>
@@ -2237,11 +2301,7 @@
         <p:spPr/>
         <p:txBody>
           <a:bodyPr/>
-          <a:lstStyle>
-            <a:lvl1pPr>
-              <a:defRPr/>
-            </a:lvl1pPr>
-          </a:lstStyle>
+          <a:lstStyle/>
           <a:p>
             <a:endParaRPr lang="zh-TW" altLang="en-US"/>
           </a:p>
@@ -2260,11 +2320,7 @@
         <p:spPr/>
         <p:txBody>
           <a:bodyPr/>
-          <a:lstStyle>
-            <a:lvl1pPr>
-              <a:defRPr/>
-            </a:lvl1pPr>
-          </a:lstStyle>
+          <a:lstStyle/>
           <a:p>
             <a:fld id="{78D7BC5E-82BC-4BEC-98A8-777F1C9C4392}" type="slidenum">
               <a:rPr lang="zh-TW" altLang="en-US" smtClean="0"/>
@@ -2275,6 +2331,11 @@
         </p:txBody>
       </p:sp>
     </p:spTree>
+    <p:extLst>
+      <p:ext uri="{BB962C8B-B14F-4D97-AF65-F5344CB8AC3E}">
+        <p14:creationId xmlns:p14="http://schemas.microsoft.com/office/powerpoint/2010/main" val="2110796878"/>
+      </p:ext>
+    </p:extLst>
   </p:cSld>
   <p:clrMapOvr>
     <a:masterClrMapping/>
@@ -2311,21 +2372,21 @@
         </p:nvSpPr>
         <p:spPr>
           <a:xfrm>
-            <a:off x="1792288" y="4800600"/>
-            <a:ext cx="5486400" cy="566738"/>
+            <a:off x="2389717" y="4800601"/>
+            <a:ext cx="7315200" cy="566739"/>
           </a:xfrm>
         </p:spPr>
         <p:txBody>
           <a:bodyPr anchor="b"/>
           <a:lstStyle>
             <a:lvl1pPr algn="l">
-              <a:defRPr sz="2000" b="1"/>
+              <a:defRPr sz="2667" b="1"/>
             </a:lvl1pPr>
           </a:lstStyle>
           <a:p>
             <a:r>
-              <a:rPr lang="zh-TW" altLang="en-US" smtClean="0"/>
-              <a:t>按一下以編輯母片標題樣式</a:t>
+              <a:rPr lang="en-US" altLang="zh-TW"/>
+              <a:t>Click to edit Master title style</a:t>
             </a:r>
             <a:endParaRPr lang="zh-TW" altLang="en-US"/>
           </a:p>
@@ -2343,8 +2404,8 @@
         </p:nvSpPr>
         <p:spPr>
           <a:xfrm>
-            <a:off x="1792288" y="612775"/>
-            <a:ext cx="5486400" cy="4114800"/>
+            <a:off x="2389717" y="612775"/>
+            <a:ext cx="7315200" cy="4114800"/>
           </a:xfrm>
         </p:spPr>
         <p:txBody>
@@ -2352,45 +2413,45 @@
           <a:lstStyle>
             <a:lvl1pPr marL="0" indent="0">
               <a:buNone/>
+              <a:defRPr sz="4267"/>
+            </a:lvl1pPr>
+            <a:lvl2pPr marL="609585" indent="0">
+              <a:buNone/>
+              <a:defRPr sz="3733"/>
+            </a:lvl2pPr>
+            <a:lvl3pPr marL="1219170" indent="0">
+              <a:buNone/>
               <a:defRPr sz="3200"/>
-            </a:lvl1pPr>
-            <a:lvl2pPr marL="457200" indent="0">
-              <a:buNone/>
-              <a:defRPr sz="2800"/>
-            </a:lvl2pPr>
-            <a:lvl3pPr marL="914400" indent="0">
-              <a:buNone/>
-              <a:defRPr sz="2400"/>
             </a:lvl3pPr>
-            <a:lvl4pPr marL="1371600" indent="0">
-              <a:buNone/>
-              <a:defRPr sz="2000"/>
+            <a:lvl4pPr marL="1828754" indent="0">
+              <a:buNone/>
+              <a:defRPr sz="2667"/>
             </a:lvl4pPr>
-            <a:lvl5pPr marL="1828800" indent="0">
-              <a:buNone/>
-              <a:defRPr sz="2000"/>
+            <a:lvl5pPr marL="2438339" indent="0">
+              <a:buNone/>
+              <a:defRPr sz="2667"/>
             </a:lvl5pPr>
-            <a:lvl6pPr marL="2286000" indent="0">
-              <a:buNone/>
-              <a:defRPr sz="2000"/>
+            <a:lvl6pPr marL="3047924" indent="0">
+              <a:buNone/>
+              <a:defRPr sz="2667"/>
             </a:lvl6pPr>
-            <a:lvl7pPr marL="2743200" indent="0">
-              <a:buNone/>
-              <a:defRPr sz="2000"/>
+            <a:lvl7pPr marL="3657509" indent="0">
+              <a:buNone/>
+              <a:defRPr sz="2667"/>
             </a:lvl7pPr>
-            <a:lvl8pPr marL="3200400" indent="0">
-              <a:buNone/>
-              <a:defRPr sz="2000"/>
+            <a:lvl8pPr marL="4267093" indent="0">
+              <a:buNone/>
+              <a:defRPr sz="2667"/>
             </a:lvl8pPr>
-            <a:lvl9pPr marL="3657600" indent="0">
-              <a:buNone/>
-              <a:defRPr sz="2000"/>
+            <a:lvl9pPr marL="4876678" indent="0">
+              <a:buNone/>
+              <a:defRPr sz="2667"/>
             </a:lvl9pPr>
           </a:lstStyle>
           <a:p>
             <a:r>
-              <a:rPr lang="zh-TW" altLang="en-US" smtClean="0"/>
-              <a:t>按一下圖示以新增圖片</a:t>
+              <a:rPr lang="en-US" altLang="zh-TW"/>
+              <a:t>Click icon to add picture</a:t>
             </a:r>
             <a:endParaRPr lang="zh-TW" altLang="en-US"/>
           </a:p>
@@ -2408,8 +2469,8 @@
         </p:nvSpPr>
         <p:spPr>
           <a:xfrm>
-            <a:off x="1792288" y="5367338"/>
-            <a:ext cx="5486400" cy="804862"/>
+            <a:off x="2389717" y="5367339"/>
+            <a:ext cx="7315200" cy="804863"/>
           </a:xfrm>
         </p:spPr>
         <p:txBody>
@@ -2417,46 +2478,46 @@
           <a:lstStyle>
             <a:lvl1pPr marL="0" indent="0">
               <a:buNone/>
-              <a:defRPr sz="1400"/>
+              <a:defRPr sz="1867"/>
             </a:lvl1pPr>
-            <a:lvl2pPr marL="457200" indent="0">
+            <a:lvl2pPr marL="609585" indent="0">
+              <a:buNone/>
+              <a:defRPr sz="1600"/>
+            </a:lvl2pPr>
+            <a:lvl3pPr marL="1219170" indent="0">
+              <a:buNone/>
+              <a:defRPr sz="1333"/>
+            </a:lvl3pPr>
+            <a:lvl4pPr marL="1828754" indent="0">
               <a:buNone/>
               <a:defRPr sz="1200"/>
-            </a:lvl2pPr>
-            <a:lvl3pPr marL="914400" indent="0">
-              <a:buNone/>
-              <a:defRPr sz="1000"/>
-            </a:lvl3pPr>
-            <a:lvl4pPr marL="1371600" indent="0">
-              <a:buNone/>
-              <a:defRPr sz="900"/>
             </a:lvl4pPr>
-            <a:lvl5pPr marL="1828800" indent="0">
-              <a:buNone/>
-              <a:defRPr sz="900"/>
+            <a:lvl5pPr marL="2438339" indent="0">
+              <a:buNone/>
+              <a:defRPr sz="1200"/>
             </a:lvl5pPr>
-            <a:lvl6pPr marL="2286000" indent="0">
-              <a:buNone/>
-              <a:defRPr sz="900"/>
+            <a:lvl6pPr marL="3047924" indent="0">
+              <a:buNone/>
+              <a:defRPr sz="1200"/>
             </a:lvl6pPr>
-            <a:lvl7pPr marL="2743200" indent="0">
-              <a:buNone/>
-              <a:defRPr sz="900"/>
+            <a:lvl7pPr marL="3657509" indent="0">
+              <a:buNone/>
+              <a:defRPr sz="1200"/>
             </a:lvl7pPr>
-            <a:lvl8pPr marL="3200400" indent="0">
-              <a:buNone/>
-              <a:defRPr sz="900"/>
+            <a:lvl8pPr marL="4267093" indent="0">
+              <a:buNone/>
+              <a:defRPr sz="1200"/>
             </a:lvl8pPr>
-            <a:lvl9pPr marL="3657600" indent="0">
-              <a:buNone/>
-              <a:defRPr sz="900"/>
+            <a:lvl9pPr marL="4876678" indent="0">
+              <a:buNone/>
+              <a:defRPr sz="1200"/>
             </a:lvl9pPr>
           </a:lstStyle>
           <a:p>
             <a:pPr lvl="0"/>
             <a:r>
-              <a:rPr lang="zh-TW" altLang="en-US" smtClean="0"/>
-              <a:t>按一下以編輯母片文字樣式</a:t>
+              <a:rPr lang="en-US" altLang="zh-TW"/>
+              <a:t>Click to edit Master text styles</a:t>
             </a:r>
           </a:p>
         </p:txBody>
@@ -2474,15 +2535,11 @@
         <p:spPr/>
         <p:txBody>
           <a:bodyPr/>
-          <a:lstStyle>
-            <a:lvl1pPr>
-              <a:defRPr/>
-            </a:lvl1pPr>
-          </a:lstStyle>
+          <a:lstStyle/>
           <a:p>
             <a:fld id="{DA0BF7F6-1145-4871-A3A6-04339E39674E}" type="datetimeFigureOut">
               <a:rPr lang="zh-TW" altLang="en-US" smtClean="0"/>
-              <a:t>2015/10/18</a:t>
+              <a:t>2025/9/20</a:t>
             </a:fld>
             <a:endParaRPr lang="zh-TW" altLang="en-US"/>
           </a:p>
@@ -2501,11 +2558,7 @@
         <p:spPr/>
         <p:txBody>
           <a:bodyPr/>
-          <a:lstStyle>
-            <a:lvl1pPr>
-              <a:defRPr/>
-            </a:lvl1pPr>
-          </a:lstStyle>
+          <a:lstStyle/>
           <a:p>
             <a:endParaRPr lang="zh-TW" altLang="en-US"/>
           </a:p>
@@ -2524,11 +2577,7 @@
         <p:spPr/>
         <p:txBody>
           <a:bodyPr/>
-          <a:lstStyle>
-            <a:lvl1pPr>
-              <a:defRPr/>
-            </a:lvl1pPr>
-          </a:lstStyle>
+          <a:lstStyle/>
           <a:p>
             <a:fld id="{78D7BC5E-82BC-4BEC-98A8-777F1C9C4392}" type="slidenum">
               <a:rPr lang="zh-TW" altLang="en-US" smtClean="0"/>
@@ -2539,6 +2588,11 @@
         </p:txBody>
       </p:sp>
     </p:spTree>
+    <p:extLst>
+      <p:ext uri="{BB962C8B-B14F-4D97-AF65-F5344CB8AC3E}">
+        <p14:creationId xmlns:p14="http://schemas.microsoft.com/office/powerpoint/2010/main" val="2866804554"/>
+      </p:ext>
+    </p:extLst>
   </p:cSld>
   <p:clrMapOvr>
     <a:masterClrMapping/>
@@ -2551,12 +2605,10 @@
   <p:cSld>
     <p:bg>
       <p:bgPr>
-        <a:blipFill dpi="0" rotWithShape="0">
+        <a:blipFill dpi="0" rotWithShape="1">
           <a:blip r:embed="rId13"/>
           <a:srcRect/>
-          <a:stretch>
-            <a:fillRect/>
-          </a:stretch>
+          <a:tile tx="0" ty="0" sx="100000" sy="100000" flip="none" algn="tl"/>
         </a:blipFill>
         <a:effectLst/>
       </p:bgPr>
@@ -2577,162 +2629,133 @@
       </p:grpSpPr>
       <p:sp>
         <p:nvSpPr>
-          <p:cNvPr id="1026" name="Rectangle 2"/>
-          <p:cNvSpPr>
-            <a:spLocks noGrp="1" noChangeArrowheads="1"/>
+          <p:cNvPr id="2" name="標題版面配置區 1"/>
+          <p:cNvSpPr>
+            <a:spLocks noGrp="1"/>
           </p:cNvSpPr>
           <p:nvPr>
             <p:ph type="title"/>
           </p:nvPr>
         </p:nvSpPr>
-        <p:spPr bwMode="auto">
+        <p:spPr>
           <a:xfrm>
-            <a:off x="457200" y="274638"/>
-            <a:ext cx="8229600" cy="1143000"/>
+            <a:off x="609600" y="274637"/>
+            <a:ext cx="10972800" cy="1143000"/>
           </a:xfrm>
           <a:prstGeom prst="rect">
             <a:avLst/>
           </a:prstGeom>
-          <a:noFill/>
-          <a:ln w="9525">
-            <a:noFill/>
-            <a:miter lim="800000"/>
-            <a:headEnd/>
-            <a:tailEnd/>
-          </a:ln>
-          <a:effectLst/>
         </p:spPr>
         <p:txBody>
-          <a:bodyPr vert="horz" wrap="square" lIns="91440" tIns="45720" rIns="91440" bIns="45720" numCol="1" anchor="ctr" anchorCtr="0" compatLnSpc="1">
-            <a:prstTxWarp prst="textNoShape">
-              <a:avLst/>
-            </a:prstTxWarp>
+          <a:bodyPr vert="horz" lIns="91440" tIns="45720" rIns="91440" bIns="45720" rtlCol="0" anchor="ctr">
+            <a:normAutofit/>
           </a:bodyPr>
           <a:lstStyle/>
           <a:p>
-            <a:pPr lvl="0"/>
-            <a:r>
-              <a:rPr lang="es-ES" altLang="zh-CN" smtClean="0"/>
-              <a:t>Haga clic para cambiar el estilo de título	</a:t>
-            </a:r>
-          </a:p>
-        </p:txBody>
-      </p:sp>
-      <p:sp>
-        <p:nvSpPr>
-          <p:cNvPr id="1027" name="Rectangle 3"/>
-          <p:cNvSpPr>
-            <a:spLocks noGrp="1" noChangeArrowheads="1"/>
+            <a:r>
+              <a:rPr lang="zh-TW" altLang="en-US"/>
+              <a:t>按一下以編輯母片標題樣式</a:t>
+            </a:r>
+          </a:p>
+        </p:txBody>
+      </p:sp>
+      <p:sp>
+        <p:nvSpPr>
+          <p:cNvPr id="3" name="文字版面配置區 2"/>
+          <p:cNvSpPr>
+            <a:spLocks noGrp="1"/>
           </p:cNvSpPr>
           <p:nvPr>
             <p:ph type="body" idx="1"/>
           </p:nvPr>
         </p:nvSpPr>
-        <p:spPr bwMode="auto">
+        <p:spPr>
           <a:xfrm>
-            <a:off x="457200" y="1600200"/>
-            <a:ext cx="8229600" cy="4525963"/>
+            <a:off x="609600" y="1600201"/>
+            <a:ext cx="10972800" cy="4525963"/>
           </a:xfrm>
           <a:prstGeom prst="rect">
             <a:avLst/>
           </a:prstGeom>
-          <a:noFill/>
-          <a:ln w="9525">
-            <a:noFill/>
-            <a:miter lim="800000"/>
-            <a:headEnd/>
-            <a:tailEnd/>
-          </a:ln>
-          <a:effectLst/>
         </p:spPr>
         <p:txBody>
-          <a:bodyPr vert="horz" wrap="square" lIns="91440" tIns="45720" rIns="91440" bIns="45720" numCol="1" anchor="t" anchorCtr="0" compatLnSpc="1">
-            <a:prstTxWarp prst="textNoShape">
-              <a:avLst/>
-            </a:prstTxWarp>
+          <a:bodyPr vert="horz" lIns="91440" tIns="45720" rIns="91440" bIns="45720" rtlCol="0">
+            <a:normAutofit/>
           </a:bodyPr>
           <a:lstStyle/>
           <a:p>
             <a:pPr lvl="0"/>
             <a:r>
-              <a:rPr lang="es-ES" altLang="zh-CN" smtClean="0"/>
-              <a:t>Haga clic para modificar el estilo de texto del patrón</a:t>
+              <a:rPr lang="zh-TW" altLang="en-US"/>
+              <a:t>按一下以編輯母片文字樣式</a:t>
             </a:r>
           </a:p>
           <a:p>
             <a:pPr lvl="1"/>
             <a:r>
-              <a:rPr lang="es-ES" altLang="zh-CN" smtClean="0"/>
-              <a:t>Segundo nivel</a:t>
+              <a:rPr lang="zh-TW" altLang="en-US"/>
+              <a:t>第二層</a:t>
             </a:r>
           </a:p>
           <a:p>
             <a:pPr lvl="2"/>
             <a:r>
-              <a:rPr lang="es-ES" altLang="zh-CN" smtClean="0"/>
-              <a:t>Tercer nivel</a:t>
+              <a:rPr lang="zh-TW" altLang="en-US"/>
+              <a:t>第三層</a:t>
             </a:r>
           </a:p>
           <a:p>
             <a:pPr lvl="3"/>
             <a:r>
-              <a:rPr lang="es-ES" altLang="zh-CN" smtClean="0"/>
-              <a:t>Cuarto nivel</a:t>
+              <a:rPr lang="zh-TW" altLang="en-US"/>
+              <a:t>第四層</a:t>
             </a:r>
           </a:p>
           <a:p>
             <a:pPr lvl="4"/>
             <a:r>
-              <a:rPr lang="es-ES" altLang="zh-CN" smtClean="0"/>
-              <a:t>Quinto nivel</a:t>
-            </a:r>
-          </a:p>
-        </p:txBody>
-      </p:sp>
-      <p:sp>
-        <p:nvSpPr>
-          <p:cNvPr id="1028" name="Rectangle 4"/>
-          <p:cNvSpPr>
-            <a:spLocks noGrp="1" noChangeArrowheads="1"/>
+              <a:rPr lang="zh-TW" altLang="en-US"/>
+              <a:t>第五層</a:t>
+            </a:r>
+          </a:p>
+        </p:txBody>
+      </p:sp>
+      <p:sp>
+        <p:nvSpPr>
+          <p:cNvPr id="4" name="日期版面配置區 3"/>
+          <p:cNvSpPr>
+            <a:spLocks noGrp="1"/>
           </p:cNvSpPr>
           <p:nvPr>
             <p:ph type="dt" sz="half" idx="2"/>
           </p:nvPr>
         </p:nvSpPr>
-        <p:spPr bwMode="auto">
+        <p:spPr>
           <a:xfrm>
-            <a:off x="457200" y="6245225"/>
-            <a:ext cx="2133600" cy="476250"/>
+            <a:off x="609600" y="6356352"/>
+            <a:ext cx="2844800" cy="365125"/>
           </a:xfrm>
           <a:prstGeom prst="rect">
             <a:avLst/>
           </a:prstGeom>
-          <a:noFill/>
-          <a:ln w="9525">
-            <a:noFill/>
-            <a:miter lim="800000"/>
-            <a:headEnd/>
-            <a:tailEnd/>
-          </a:ln>
-          <a:effectLst/>
         </p:spPr>
         <p:txBody>
-          <a:bodyPr vert="horz" wrap="square" lIns="91440" tIns="45720" rIns="91440" bIns="45720" numCol="1" anchor="t" anchorCtr="0" compatLnSpc="1">
-            <a:prstTxWarp prst="textNoShape">
-              <a:avLst/>
-            </a:prstTxWarp>
-          </a:bodyPr>
+          <a:bodyPr vert="horz" lIns="91440" tIns="45720" rIns="91440" bIns="45720" rtlCol="0" anchor="ctr"/>
           <a:lstStyle>
-            <a:lvl1pPr>
-              <a:defRPr sz="1400">
-                <a:ea typeface="宋体" pitchFamily="2" charset="-122"/>
+            <a:lvl1pPr algn="l">
+              <a:defRPr sz="1600">
+                <a:solidFill>
+                  <a:schemeClr val="tx1">
+                    <a:tint val="75000"/>
+                  </a:schemeClr>
+                </a:solidFill>
               </a:defRPr>
             </a:lvl1pPr>
           </a:lstStyle>
           <a:p>
             <a:fld id="{DA0BF7F6-1145-4871-A3A6-04339E39674E}" type="datetimeFigureOut">
               <a:rPr lang="zh-TW" altLang="en-US" smtClean="0"/>
-              <a:t>2015/10/18</a:t>
+              <a:t>2025/9/20</a:t>
             </a:fld>
             <a:endParaRPr lang="zh-TW" altLang="en-US"/>
           </a:p>
@@ -2740,41 +2763,33 @@
       </p:sp>
       <p:sp>
         <p:nvSpPr>
-          <p:cNvPr id="1029" name="Rectangle 5"/>
-          <p:cNvSpPr>
-            <a:spLocks noGrp="1" noChangeArrowheads="1"/>
+          <p:cNvPr id="5" name="頁尾版面配置區 4"/>
+          <p:cNvSpPr>
+            <a:spLocks noGrp="1"/>
           </p:cNvSpPr>
           <p:nvPr>
             <p:ph type="ftr" sz="quarter" idx="3"/>
           </p:nvPr>
         </p:nvSpPr>
-        <p:spPr bwMode="auto">
+        <p:spPr>
           <a:xfrm>
-            <a:off x="3124200" y="6245225"/>
-            <a:ext cx="2895600" cy="476250"/>
+            <a:off x="4165600" y="6356352"/>
+            <a:ext cx="3860800" cy="365125"/>
           </a:xfrm>
           <a:prstGeom prst="rect">
             <a:avLst/>
           </a:prstGeom>
-          <a:noFill/>
-          <a:ln w="9525">
-            <a:noFill/>
-            <a:miter lim="800000"/>
-            <a:headEnd/>
-            <a:tailEnd/>
-          </a:ln>
-          <a:effectLst/>
         </p:spPr>
         <p:txBody>
-          <a:bodyPr vert="horz" wrap="square" lIns="91440" tIns="45720" rIns="91440" bIns="45720" numCol="1" anchor="t" anchorCtr="0" compatLnSpc="1">
-            <a:prstTxWarp prst="textNoShape">
-              <a:avLst/>
-            </a:prstTxWarp>
-          </a:bodyPr>
+          <a:bodyPr vert="horz" lIns="91440" tIns="45720" rIns="91440" bIns="45720" rtlCol="0" anchor="ctr"/>
           <a:lstStyle>
             <a:lvl1pPr algn="ctr">
-              <a:defRPr sz="1400">
-                <a:ea typeface="宋体" pitchFamily="2" charset="-122"/>
+              <a:defRPr sz="1600">
+                <a:solidFill>
+                  <a:schemeClr val="tx1">
+                    <a:tint val="75000"/>
+                  </a:schemeClr>
+                </a:solidFill>
               </a:defRPr>
             </a:lvl1pPr>
           </a:lstStyle>
@@ -2785,41 +2800,33 @@
       </p:sp>
       <p:sp>
         <p:nvSpPr>
-          <p:cNvPr id="1030" name="Rectangle 6"/>
-          <p:cNvSpPr>
-            <a:spLocks noGrp="1" noChangeArrowheads="1"/>
+          <p:cNvPr id="6" name="投影片編號版面配置區 5"/>
+          <p:cNvSpPr>
+            <a:spLocks noGrp="1"/>
           </p:cNvSpPr>
           <p:nvPr>
             <p:ph type="sldNum" sz="quarter" idx="4"/>
           </p:nvPr>
         </p:nvSpPr>
-        <p:spPr bwMode="auto">
+        <p:spPr>
           <a:xfrm>
-            <a:off x="6553200" y="6245225"/>
-            <a:ext cx="2133600" cy="476250"/>
+            <a:off x="8737600" y="6356352"/>
+            <a:ext cx="2844800" cy="365125"/>
           </a:xfrm>
           <a:prstGeom prst="rect">
             <a:avLst/>
           </a:prstGeom>
-          <a:noFill/>
-          <a:ln w="9525">
-            <a:noFill/>
-            <a:miter lim="800000"/>
-            <a:headEnd/>
-            <a:tailEnd/>
-          </a:ln>
-          <a:effectLst/>
         </p:spPr>
         <p:txBody>
-          <a:bodyPr vert="horz" wrap="square" lIns="91440" tIns="45720" rIns="91440" bIns="45720" numCol="1" anchor="t" anchorCtr="0" compatLnSpc="1">
-            <a:prstTxWarp prst="textNoShape">
-              <a:avLst/>
-            </a:prstTxWarp>
-          </a:bodyPr>
+          <a:bodyPr vert="horz" lIns="91440" tIns="45720" rIns="91440" bIns="45720" rtlCol="0" anchor="ctr"/>
           <a:lstStyle>
             <a:lvl1pPr algn="r">
-              <a:defRPr sz="1400">
-                <a:ea typeface="宋体" pitchFamily="2" charset="-122"/>
+              <a:defRPr sz="1600">
+                <a:solidFill>
+                  <a:schemeClr val="tx1">
+                    <a:tint val="75000"/>
+                  </a:schemeClr>
+                </a:solidFill>
               </a:defRPr>
             </a:lvl1pPr>
           </a:lstStyle>
@@ -2833,170 +2840,51 @@
         </p:txBody>
       </p:sp>
     </p:spTree>
+    <p:extLst>
+      <p:ext uri="{BB962C8B-B14F-4D97-AF65-F5344CB8AC3E}">
+        <p14:creationId xmlns:p14="http://schemas.microsoft.com/office/powerpoint/2010/main" val="2527353120"/>
+      </p:ext>
+    </p:extLst>
   </p:cSld>
   <p:clrMap bg1="lt1" tx1="dk1" bg2="lt2" tx2="dk2" accent1="accent1" accent2="accent2" accent3="accent3" accent4="accent4" accent5="accent5" accent6="accent6" hlink="hlink" folHlink="folHlink"/>
   <p:sldLayoutIdLst>
-    <p:sldLayoutId id="2147483661" r:id="rId1"/>
-    <p:sldLayoutId id="2147483662" r:id="rId2"/>
-    <p:sldLayoutId id="2147483663" r:id="rId3"/>
-    <p:sldLayoutId id="2147483664" r:id="rId4"/>
-    <p:sldLayoutId id="2147483665" r:id="rId5"/>
-    <p:sldLayoutId id="2147483666" r:id="rId6"/>
-    <p:sldLayoutId id="2147483667" r:id="rId7"/>
-    <p:sldLayoutId id="2147483668" r:id="rId8"/>
-    <p:sldLayoutId id="2147483669" r:id="rId9"/>
-    <p:sldLayoutId id="2147483670" r:id="rId10"/>
-    <p:sldLayoutId id="2147483671" r:id="rId11"/>
+    <p:sldLayoutId id="2147483673" r:id="rId1"/>
+    <p:sldLayoutId id="2147483674" r:id="rId2"/>
+    <p:sldLayoutId id="2147483675" r:id="rId3"/>
+    <p:sldLayoutId id="2147483676" r:id="rId4"/>
+    <p:sldLayoutId id="2147483677" r:id="rId5"/>
+    <p:sldLayoutId id="2147483678" r:id="rId6"/>
+    <p:sldLayoutId id="2147483679" r:id="rId7"/>
+    <p:sldLayoutId id="2147483680" r:id="rId8"/>
+    <p:sldLayoutId id="2147483681" r:id="rId9"/>
+    <p:sldLayoutId id="2147483682" r:id="rId10"/>
+    <p:sldLayoutId id="2147483683" r:id="rId11"/>
   </p:sldLayoutIdLst>
   <p:txStyles>
     <p:titleStyle>
-      <a:lvl1pPr algn="ctr" rtl="0" eaLnBrk="1" fontAlgn="base" hangingPunct="1">
+      <a:lvl1pPr algn="ctr" defTabSz="1219170" rtl="0" eaLnBrk="1" latinLnBrk="0" hangingPunct="1">
         <a:spcBef>
           <a:spcPct val="0"/>
         </a:spcBef>
-        <a:spcAft>
-          <a:spcPct val="0"/>
-        </a:spcAft>
-        <a:defRPr sz="4400">
+        <a:buNone/>
+        <a:defRPr sz="5867" kern="1200">
           <a:solidFill>
-            <a:schemeClr val="tx2"/>
+            <a:schemeClr val="tx1"/>
           </a:solidFill>
           <a:latin typeface="+mj-lt"/>
           <a:ea typeface="+mj-ea"/>
           <a:cs typeface="+mj-cs"/>
         </a:defRPr>
       </a:lvl1pPr>
-      <a:lvl2pPr algn="ctr" rtl="0" eaLnBrk="1" fontAlgn="base" hangingPunct="1">
-        <a:spcBef>
-          <a:spcPct val="0"/>
-        </a:spcBef>
-        <a:spcAft>
-          <a:spcPct val="0"/>
-        </a:spcAft>
-        <a:defRPr sz="4400">
-          <a:solidFill>
-            <a:schemeClr val="tx2"/>
-          </a:solidFill>
-          <a:latin typeface="Arial" charset="0"/>
-          <a:cs typeface="Arial" charset="0"/>
-        </a:defRPr>
-      </a:lvl2pPr>
-      <a:lvl3pPr algn="ctr" rtl="0" eaLnBrk="1" fontAlgn="base" hangingPunct="1">
-        <a:spcBef>
-          <a:spcPct val="0"/>
-        </a:spcBef>
-        <a:spcAft>
-          <a:spcPct val="0"/>
-        </a:spcAft>
-        <a:defRPr sz="4400">
-          <a:solidFill>
-            <a:schemeClr val="tx2"/>
-          </a:solidFill>
-          <a:latin typeface="Arial" charset="0"/>
-          <a:cs typeface="Arial" charset="0"/>
-        </a:defRPr>
-      </a:lvl3pPr>
-      <a:lvl4pPr algn="ctr" rtl="0" eaLnBrk="1" fontAlgn="base" hangingPunct="1">
-        <a:spcBef>
-          <a:spcPct val="0"/>
-        </a:spcBef>
-        <a:spcAft>
-          <a:spcPct val="0"/>
-        </a:spcAft>
-        <a:defRPr sz="4400">
-          <a:solidFill>
-            <a:schemeClr val="tx2"/>
-          </a:solidFill>
-          <a:latin typeface="Arial" charset="0"/>
-          <a:cs typeface="Arial" charset="0"/>
-        </a:defRPr>
-      </a:lvl4pPr>
-      <a:lvl5pPr algn="ctr" rtl="0" eaLnBrk="1" fontAlgn="base" hangingPunct="1">
-        <a:spcBef>
-          <a:spcPct val="0"/>
-        </a:spcBef>
-        <a:spcAft>
-          <a:spcPct val="0"/>
-        </a:spcAft>
-        <a:defRPr sz="4400">
-          <a:solidFill>
-            <a:schemeClr val="tx2"/>
-          </a:solidFill>
-          <a:latin typeface="Arial" charset="0"/>
-          <a:cs typeface="Arial" charset="0"/>
-        </a:defRPr>
-      </a:lvl5pPr>
-      <a:lvl6pPr marL="457200" algn="ctr" rtl="0" eaLnBrk="1" fontAlgn="base" hangingPunct="1">
-        <a:spcBef>
-          <a:spcPct val="0"/>
-        </a:spcBef>
-        <a:spcAft>
-          <a:spcPct val="0"/>
-        </a:spcAft>
-        <a:defRPr sz="4400">
-          <a:solidFill>
-            <a:schemeClr val="tx2"/>
-          </a:solidFill>
-          <a:latin typeface="Arial" charset="0"/>
-          <a:cs typeface="Arial" charset="0"/>
-        </a:defRPr>
-      </a:lvl6pPr>
-      <a:lvl7pPr marL="914400" algn="ctr" rtl="0" eaLnBrk="1" fontAlgn="base" hangingPunct="1">
-        <a:spcBef>
-          <a:spcPct val="0"/>
-        </a:spcBef>
-        <a:spcAft>
-          <a:spcPct val="0"/>
-        </a:spcAft>
-        <a:defRPr sz="4400">
-          <a:solidFill>
-            <a:schemeClr val="tx2"/>
-          </a:solidFill>
-          <a:latin typeface="Arial" charset="0"/>
-          <a:cs typeface="Arial" charset="0"/>
-        </a:defRPr>
-      </a:lvl7pPr>
-      <a:lvl8pPr marL="1371600" algn="ctr" rtl="0" eaLnBrk="1" fontAlgn="base" hangingPunct="1">
-        <a:spcBef>
-          <a:spcPct val="0"/>
-        </a:spcBef>
-        <a:spcAft>
-          <a:spcPct val="0"/>
-        </a:spcAft>
-        <a:defRPr sz="4400">
-          <a:solidFill>
-            <a:schemeClr val="tx2"/>
-          </a:solidFill>
-          <a:latin typeface="Arial" charset="0"/>
-          <a:cs typeface="Arial" charset="0"/>
-        </a:defRPr>
-      </a:lvl8pPr>
-      <a:lvl9pPr marL="1828800" algn="ctr" rtl="0" eaLnBrk="1" fontAlgn="base" hangingPunct="1">
-        <a:spcBef>
-          <a:spcPct val="0"/>
-        </a:spcBef>
-        <a:spcAft>
-          <a:spcPct val="0"/>
-        </a:spcAft>
-        <a:defRPr sz="4400">
-          <a:solidFill>
-            <a:schemeClr val="tx2"/>
-          </a:solidFill>
-          <a:latin typeface="Arial" charset="0"/>
-          <a:cs typeface="Arial" charset="0"/>
-        </a:defRPr>
-      </a:lvl9pPr>
     </p:titleStyle>
     <p:bodyStyle>
-      <a:lvl1pPr marL="342900" indent="-342900" algn="l" rtl="0" eaLnBrk="1" fontAlgn="base" hangingPunct="1">
+      <a:lvl1pPr marL="457189" indent="-457189" algn="l" defTabSz="1219170" rtl="0" eaLnBrk="1" latinLnBrk="0" hangingPunct="1">
         <a:spcBef>
           <a:spcPct val="20000"/>
         </a:spcBef>
-        <a:spcAft>
-          <a:spcPct val="0"/>
-        </a:spcAft>
+        <a:buFont typeface="Arial" panose="02080604020202020204" pitchFamily="34" charset="0"/>
         <a:buChar char="•"/>
-        <a:defRPr sz="3200">
+        <a:defRPr sz="4267" kern="1200">
           <a:solidFill>
             <a:schemeClr val="tx1"/>
           </a:solidFill>
@@ -3005,131 +2893,123 @@
           <a:cs typeface="+mn-cs"/>
         </a:defRPr>
       </a:lvl1pPr>
-      <a:lvl2pPr marL="742950" indent="-285750" algn="l" rtl="0" eaLnBrk="1" fontAlgn="base" hangingPunct="1">
+      <a:lvl2pPr marL="990575" indent="-380990" algn="l" defTabSz="1219170" rtl="0" eaLnBrk="1" latinLnBrk="0" hangingPunct="1">
         <a:spcBef>
           <a:spcPct val="20000"/>
         </a:spcBef>
-        <a:spcAft>
-          <a:spcPct val="0"/>
-        </a:spcAft>
+        <a:buFont typeface="Arial" panose="02080604020202020204" pitchFamily="34" charset="0"/>
         <a:buChar char="–"/>
-        <a:defRPr sz="2800">
+        <a:defRPr sz="3733" kern="1200">
           <a:solidFill>
             <a:schemeClr val="tx1"/>
           </a:solidFill>
           <a:latin typeface="+mn-lt"/>
+          <a:ea typeface="+mn-ea"/>
           <a:cs typeface="+mn-cs"/>
         </a:defRPr>
       </a:lvl2pPr>
-      <a:lvl3pPr marL="1143000" indent="-228600" algn="l" rtl="0" eaLnBrk="1" fontAlgn="base" hangingPunct="1">
+      <a:lvl3pPr marL="1523962" indent="-304792" algn="l" defTabSz="1219170" rtl="0" eaLnBrk="1" latinLnBrk="0" hangingPunct="1">
         <a:spcBef>
           <a:spcPct val="20000"/>
         </a:spcBef>
-        <a:spcAft>
-          <a:spcPct val="0"/>
-        </a:spcAft>
+        <a:buFont typeface="Arial" panose="02080604020202020204" pitchFamily="34" charset="0"/>
         <a:buChar char="•"/>
-        <a:defRPr sz="2400">
+        <a:defRPr sz="3200" kern="1200">
           <a:solidFill>
             <a:schemeClr val="tx1"/>
           </a:solidFill>
           <a:latin typeface="+mn-lt"/>
+          <a:ea typeface="+mn-ea"/>
           <a:cs typeface="+mn-cs"/>
         </a:defRPr>
       </a:lvl3pPr>
-      <a:lvl4pPr marL="1600200" indent="-228600" algn="l" rtl="0" eaLnBrk="1" fontAlgn="base" hangingPunct="1">
+      <a:lvl4pPr marL="2133547" indent="-304792" algn="l" defTabSz="1219170" rtl="0" eaLnBrk="1" latinLnBrk="0" hangingPunct="1">
         <a:spcBef>
           <a:spcPct val="20000"/>
         </a:spcBef>
-        <a:spcAft>
-          <a:spcPct val="0"/>
-        </a:spcAft>
+        <a:buFont typeface="Arial" panose="02080604020202020204" pitchFamily="34" charset="0"/>
         <a:buChar char="–"/>
-        <a:defRPr sz="2000">
+        <a:defRPr sz="2667" kern="1200">
           <a:solidFill>
             <a:schemeClr val="tx1"/>
           </a:solidFill>
           <a:latin typeface="+mn-lt"/>
+          <a:ea typeface="+mn-ea"/>
           <a:cs typeface="+mn-cs"/>
         </a:defRPr>
       </a:lvl4pPr>
-      <a:lvl5pPr marL="2057400" indent="-228600" algn="l" rtl="0" eaLnBrk="1" fontAlgn="base" hangingPunct="1">
+      <a:lvl5pPr marL="2743131" indent="-304792" algn="l" defTabSz="1219170" rtl="0" eaLnBrk="1" latinLnBrk="0" hangingPunct="1">
         <a:spcBef>
           <a:spcPct val="20000"/>
         </a:spcBef>
-        <a:spcAft>
-          <a:spcPct val="0"/>
-        </a:spcAft>
+        <a:buFont typeface="Arial" panose="02080604020202020204" pitchFamily="34" charset="0"/>
         <a:buChar char="»"/>
-        <a:defRPr sz="2000">
+        <a:defRPr sz="2667" kern="1200">
           <a:solidFill>
             <a:schemeClr val="tx1"/>
           </a:solidFill>
           <a:latin typeface="+mn-lt"/>
+          <a:ea typeface="+mn-ea"/>
           <a:cs typeface="+mn-cs"/>
         </a:defRPr>
       </a:lvl5pPr>
-      <a:lvl6pPr marL="2514600" indent="-228600" algn="l" rtl="0" eaLnBrk="1" fontAlgn="base" hangingPunct="1">
+      <a:lvl6pPr marL="3352716" indent="-304792" algn="l" defTabSz="1219170" rtl="0" eaLnBrk="1" latinLnBrk="0" hangingPunct="1">
         <a:spcBef>
           <a:spcPct val="20000"/>
         </a:spcBef>
-        <a:spcAft>
-          <a:spcPct val="0"/>
-        </a:spcAft>
-        <a:buChar char="»"/>
-        <a:defRPr sz="2000">
+        <a:buFont typeface="Arial" panose="02080604020202020204" pitchFamily="34" charset="0"/>
+        <a:buChar char="•"/>
+        <a:defRPr sz="2667" kern="1200">
           <a:solidFill>
             <a:schemeClr val="tx1"/>
           </a:solidFill>
           <a:latin typeface="+mn-lt"/>
+          <a:ea typeface="+mn-ea"/>
           <a:cs typeface="+mn-cs"/>
         </a:defRPr>
       </a:lvl6pPr>
-      <a:lvl7pPr marL="2971800" indent="-228600" algn="l" rtl="0" eaLnBrk="1" fontAlgn="base" hangingPunct="1">
+      <a:lvl7pPr marL="3962301" indent="-304792" algn="l" defTabSz="1219170" rtl="0" eaLnBrk="1" latinLnBrk="0" hangingPunct="1">
         <a:spcBef>
           <a:spcPct val="20000"/>
         </a:spcBef>
-        <a:spcAft>
-          <a:spcPct val="0"/>
-        </a:spcAft>
-        <a:buChar char="»"/>
-        <a:defRPr sz="2000">
+        <a:buFont typeface="Arial" panose="02080604020202020204" pitchFamily="34" charset="0"/>
+        <a:buChar char="•"/>
+        <a:defRPr sz="2667" kern="1200">
           <a:solidFill>
             <a:schemeClr val="tx1"/>
           </a:solidFill>
           <a:latin typeface="+mn-lt"/>
+          <a:ea typeface="+mn-ea"/>
           <a:cs typeface="+mn-cs"/>
         </a:defRPr>
       </a:lvl7pPr>
-      <a:lvl8pPr marL="3429000" indent="-228600" algn="l" rtl="0" eaLnBrk="1" fontAlgn="base" hangingPunct="1">
+      <a:lvl8pPr marL="4571886" indent="-304792" algn="l" defTabSz="1219170" rtl="0" eaLnBrk="1" latinLnBrk="0" hangingPunct="1">
         <a:spcBef>
           <a:spcPct val="20000"/>
         </a:spcBef>
-        <a:spcAft>
-          <a:spcPct val="0"/>
-        </a:spcAft>
-        <a:buChar char="»"/>
-        <a:defRPr sz="2000">
+        <a:buFont typeface="Arial" panose="02080604020202020204" pitchFamily="34" charset="0"/>
+        <a:buChar char="•"/>
+        <a:defRPr sz="2667" kern="1200">
           <a:solidFill>
             <a:schemeClr val="tx1"/>
           </a:solidFill>
           <a:latin typeface="+mn-lt"/>
+          <a:ea typeface="+mn-ea"/>
           <a:cs typeface="+mn-cs"/>
         </a:defRPr>
       </a:lvl8pPr>
-      <a:lvl9pPr marL="3886200" indent="-228600" algn="l" rtl="0" eaLnBrk="1" fontAlgn="base" hangingPunct="1">
+      <a:lvl9pPr marL="5181470" indent="-304792" algn="l" defTabSz="1219170" rtl="0" eaLnBrk="1" latinLnBrk="0" hangingPunct="1">
         <a:spcBef>
           <a:spcPct val="20000"/>
         </a:spcBef>
-        <a:spcAft>
-          <a:spcPct val="0"/>
-        </a:spcAft>
-        <a:buChar char="»"/>
-        <a:defRPr sz="2000">
+        <a:buFont typeface="Arial" panose="02080604020202020204" pitchFamily="34" charset="0"/>
+        <a:buChar char="•"/>
+        <a:defRPr sz="2667" kern="1200">
           <a:solidFill>
             <a:schemeClr val="tx1"/>
           </a:solidFill>
           <a:latin typeface="+mn-lt"/>
+          <a:ea typeface="+mn-ea"/>
           <a:cs typeface="+mn-cs"/>
         </a:defRPr>
       </a:lvl9pPr>
@@ -3138,8 +3018,8 @@
       <a:defPPr>
         <a:defRPr lang="zh-TW"/>
       </a:defPPr>
-      <a:lvl1pPr marL="0" algn="l" defTabSz="914400" rtl="0" eaLnBrk="1" latinLnBrk="0" hangingPunct="1">
-        <a:defRPr sz="1800" kern="1200">
+      <a:lvl1pPr marL="0" algn="l" defTabSz="1219170" rtl="0" eaLnBrk="1" latinLnBrk="0" hangingPunct="1">
+        <a:defRPr sz="2400" kern="1200">
           <a:solidFill>
             <a:schemeClr val="tx1"/>
           </a:solidFill>
@@ -3148,8 +3028,8 @@
           <a:cs typeface="+mn-cs"/>
         </a:defRPr>
       </a:lvl1pPr>
-      <a:lvl2pPr marL="457200" algn="l" defTabSz="914400" rtl="0" eaLnBrk="1" latinLnBrk="0" hangingPunct="1">
-        <a:defRPr sz="1800" kern="1200">
+      <a:lvl2pPr marL="609585" algn="l" defTabSz="1219170" rtl="0" eaLnBrk="1" latinLnBrk="0" hangingPunct="1">
+        <a:defRPr sz="2400" kern="1200">
           <a:solidFill>
             <a:schemeClr val="tx1"/>
           </a:solidFill>
@@ -3158,8 +3038,8 @@
           <a:cs typeface="+mn-cs"/>
         </a:defRPr>
       </a:lvl2pPr>
-      <a:lvl3pPr marL="914400" algn="l" defTabSz="914400" rtl="0" eaLnBrk="1" latinLnBrk="0" hangingPunct="1">
-        <a:defRPr sz="1800" kern="1200">
+      <a:lvl3pPr marL="1219170" algn="l" defTabSz="1219170" rtl="0" eaLnBrk="1" latinLnBrk="0" hangingPunct="1">
+        <a:defRPr sz="2400" kern="1200">
           <a:solidFill>
             <a:schemeClr val="tx1"/>
           </a:solidFill>
@@ -3168,8 +3048,8 @@
           <a:cs typeface="+mn-cs"/>
         </a:defRPr>
       </a:lvl3pPr>
-      <a:lvl4pPr marL="1371600" algn="l" defTabSz="914400" rtl="0" eaLnBrk="1" latinLnBrk="0" hangingPunct="1">
-        <a:defRPr sz="1800" kern="1200">
+      <a:lvl4pPr marL="1828754" algn="l" defTabSz="1219170" rtl="0" eaLnBrk="1" latinLnBrk="0" hangingPunct="1">
+        <a:defRPr sz="2400" kern="1200">
           <a:solidFill>
             <a:schemeClr val="tx1"/>
           </a:solidFill>
@@ -3178,8 +3058,8 @@
           <a:cs typeface="+mn-cs"/>
         </a:defRPr>
       </a:lvl4pPr>
-      <a:lvl5pPr marL="1828800" algn="l" defTabSz="914400" rtl="0" eaLnBrk="1" latinLnBrk="0" hangingPunct="1">
-        <a:defRPr sz="1800" kern="1200">
+      <a:lvl5pPr marL="2438339" algn="l" defTabSz="1219170" rtl="0" eaLnBrk="1" latinLnBrk="0" hangingPunct="1">
+        <a:defRPr sz="2400" kern="1200">
           <a:solidFill>
             <a:schemeClr val="tx1"/>
           </a:solidFill>
@@ -3188,8 +3068,8 @@
           <a:cs typeface="+mn-cs"/>
         </a:defRPr>
       </a:lvl5pPr>
-      <a:lvl6pPr marL="2286000" algn="l" defTabSz="914400" rtl="0" eaLnBrk="1" latinLnBrk="0" hangingPunct="1">
-        <a:defRPr sz="1800" kern="1200">
+      <a:lvl6pPr marL="3047924" algn="l" defTabSz="1219170" rtl="0" eaLnBrk="1" latinLnBrk="0" hangingPunct="1">
+        <a:defRPr sz="2400" kern="1200">
           <a:solidFill>
             <a:schemeClr val="tx1"/>
           </a:solidFill>
@@ -3198,8 +3078,8 @@
           <a:cs typeface="+mn-cs"/>
         </a:defRPr>
       </a:lvl6pPr>
-      <a:lvl7pPr marL="2743200" algn="l" defTabSz="914400" rtl="0" eaLnBrk="1" latinLnBrk="0" hangingPunct="1">
-        <a:defRPr sz="1800" kern="1200">
+      <a:lvl7pPr marL="3657509" algn="l" defTabSz="1219170" rtl="0" eaLnBrk="1" latinLnBrk="0" hangingPunct="1">
+        <a:defRPr sz="2400" kern="1200">
           <a:solidFill>
             <a:schemeClr val="tx1"/>
           </a:solidFill>
@@ -3208,8 +3088,8 @@
           <a:cs typeface="+mn-cs"/>
         </a:defRPr>
       </a:lvl7pPr>
-      <a:lvl8pPr marL="3200400" algn="l" defTabSz="914400" rtl="0" eaLnBrk="1" latinLnBrk="0" hangingPunct="1">
-        <a:defRPr sz="1800" kern="1200">
+      <a:lvl8pPr marL="4267093" algn="l" defTabSz="1219170" rtl="0" eaLnBrk="1" latinLnBrk="0" hangingPunct="1">
+        <a:defRPr sz="2400" kern="1200">
           <a:solidFill>
             <a:schemeClr val="tx1"/>
           </a:solidFill>
@@ -3218,8 +3098,8 @@
           <a:cs typeface="+mn-cs"/>
         </a:defRPr>
       </a:lvl8pPr>
-      <a:lvl9pPr marL="3657600" algn="l" defTabSz="914400" rtl="0" eaLnBrk="1" latinLnBrk="0" hangingPunct="1">
-        <a:defRPr sz="1800" kern="1200">
+      <a:lvl9pPr marL="4876678" algn="l" defTabSz="1219170" rtl="0" eaLnBrk="1" latinLnBrk="0" hangingPunct="1">
+        <a:defRPr sz="2400" kern="1200">
           <a:solidFill>
             <a:schemeClr val="tx1"/>
           </a:solidFill>
@@ -3260,21 +3140,133 @@
             <p:ph type="title"/>
           </p:nvPr>
         </p:nvSpPr>
-        <p:spPr/>
-        <p:txBody>
-          <a:bodyPr/>
-          <a:lstStyle/>
-          <a:p>
-            <a:r>
-              <a:rPr lang="zh-TW" altLang="en-US" dirty="0"/>
+        <p:spPr>
+          <a:xfrm>
+            <a:off x="0" y="2660915"/>
+            <a:ext cx="12192000" cy="1143000"/>
+          </a:xfrm>
+        </p:spPr>
+        <p:txBody>
+          <a:bodyPr>
+            <a:noAutofit/>
+          </a:bodyPr>
+          <a:lstStyle/>
+          <a:p>
+            <a:r>
+              <a:rPr lang="zh-CN" altLang="en-US" sz="5333" b="1" u="sng" dirty="0">
+                <a:solidFill>
+                  <a:srgbClr val="000066"/>
+                </a:solidFill>
+                <a:effectLst>
+                  <a:outerShdw blurRad="38100" dist="38100" dir="2700000" algn="tl">
+                    <a:srgbClr val="000000">
+                      <a:alpha val="43137"/>
+                    </a:srgbClr>
+                  </a:outerShdw>
+                </a:effectLst>
+                <a:latin typeface="微軟正黑體" pitchFamily="34" charset="-120"/>
+                <a:ea typeface="微軟正黑體" pitchFamily="34" charset="-120"/>
+              </a:rPr>
+              <a:t>宣道詩 </a:t>
+            </a:r>
+            <a:r>
+              <a:rPr lang="en-US" altLang="zh-CN" sz="5333" b="1" u="sng" dirty="0">
+                <a:solidFill>
+                  <a:srgbClr val="000066"/>
+                </a:solidFill>
+                <a:effectLst>
+                  <a:outerShdw blurRad="38100" dist="38100" dir="2700000" algn="tl">
+                    <a:srgbClr val="000000">
+                      <a:alpha val="43137"/>
+                    </a:srgbClr>
+                  </a:outerShdw>
+                </a:effectLst>
+                <a:latin typeface="微軟正黑體" pitchFamily="34" charset="-120"/>
+                <a:ea typeface="微軟正黑體" pitchFamily="34" charset="-120"/>
+              </a:rPr>
+              <a:t>175</a:t>
+            </a:r>
+            <a:br>
+              <a:rPr lang="en-US" altLang="zh-CN" sz="7200" b="1" i="1" dirty="0">
+                <a:solidFill>
+                  <a:srgbClr val="660033"/>
+                </a:solidFill>
+                <a:effectLst>
+                  <a:outerShdw blurRad="38100" dist="38100" dir="2700000" algn="tl">
+                    <a:srgbClr val="000000">
+                      <a:alpha val="43137"/>
+                    </a:srgbClr>
+                  </a:outerShdw>
+                </a:effectLst>
+                <a:latin typeface="微軟正黑體" pitchFamily="34" charset="-120"/>
+                <a:ea typeface="微軟正黑體" pitchFamily="34" charset="-120"/>
+              </a:rPr>
+            </a:br>
+            <a:r>
+              <a:rPr lang="zh-TW" altLang="en-US" sz="8000" b="1" dirty="0">
+                <a:solidFill>
+                  <a:srgbClr val="660033"/>
+                </a:solidFill>
+                <a:effectLst>
+                  <a:outerShdw blurRad="38100" dist="38100" dir="2700000" algn="tl">
+                    <a:srgbClr val="000000">
+                      <a:alpha val="43137"/>
+                    </a:srgbClr>
+                  </a:outerShdw>
+                </a:effectLst>
+                <a:latin typeface="微軟正黑體" pitchFamily="34" charset="-120"/>
+                <a:ea typeface="微軟正黑體" pitchFamily="34" charset="-120"/>
+              </a:rPr>
               <a:t>精兵興起</a:t>
             </a:r>
           </a:p>
         </p:txBody>
       </p:sp>
-      <p:sp>
-        <p:nvSpPr>
-          <p:cNvPr id="5" name="內容版面配置區 4"/>
+    </p:spTree>
+    <p:extLst>
+      <p:ext uri="{BB962C8B-B14F-4D97-AF65-F5344CB8AC3E}">
+        <p14:creationId xmlns:p14="http://schemas.microsoft.com/office/powerpoint/2010/main" val="3724263107"/>
+      </p:ext>
+    </p:extLst>
+  </p:cSld>
+  <p:clrMapOvr>
+    <a:masterClrMapping/>
+  </p:clrMapOvr>
+</p:sld>
+</file>
+
+<file path=ppt/slides/slide10.xml><?xml version="1.0" encoding="utf-8"?>
+<p:sld xmlns:a="http://schemas.openxmlformats.org/drawingml/2006/main" xmlns:r="http://schemas.openxmlformats.org/officeDocument/2006/relationships" xmlns:p="http://schemas.openxmlformats.org/presentationml/2006/main">
+  <p:cSld>
+    <p:spTree>
+      <p:nvGrpSpPr>
+        <p:cNvPr id="1" name="">
+          <a:extLst>
+            <a:ext uri="{FF2B5EF4-FFF2-40B4-BE49-F238E27FC236}">
+              <a16:creationId xmlns:a16="http://schemas.microsoft.com/office/drawing/2014/main" id="{64A90372-3516-EFEF-1A01-85634FD573BA}"/>
+            </a:ext>
+          </a:extLst>
+        </p:cNvPr>
+        <p:cNvGrpSpPr/>
+        <p:nvPr/>
+      </p:nvGrpSpPr>
+      <p:grpSpPr>
+        <a:xfrm>
+          <a:off x="0" y="0"/>
+          <a:ext cx="0" cy="0"/>
+          <a:chOff x="0" y="0"/>
+          <a:chExt cx="0" cy="0"/>
+        </a:xfrm>
+      </p:grpSpPr>
+      <p:sp>
+        <p:nvSpPr>
+          <p:cNvPr id="5" name="內容版面配置區 4">
+            <a:extLst>
+              <a:ext uri="{FF2B5EF4-FFF2-40B4-BE49-F238E27FC236}">
+                <a16:creationId xmlns:a16="http://schemas.microsoft.com/office/drawing/2014/main" id="{EDE2E23F-3D6A-D1BB-3594-5FE900F83801}"/>
+              </a:ext>
+            </a:extLst>
+          </p:cNvPr>
           <p:cNvSpPr>
             <a:spLocks noGrp="1"/>
           </p:cNvSpPr>
@@ -3282,56 +3274,430 @@
             <p:ph idx="1"/>
           </p:nvPr>
         </p:nvSpPr>
-        <p:spPr/>
-        <p:txBody>
-          <a:bodyPr>
+        <p:spPr>
+          <a:xfrm>
+            <a:off x="0" y="2084851"/>
+            <a:ext cx="12192000" cy="2404863"/>
+          </a:xfrm>
+        </p:spPr>
+        <p:txBody>
+          <a:bodyPr anchor="ctr">
             <a:normAutofit/>
           </a:bodyPr>
           <a:lstStyle/>
           <a:p>
-            <a:pPr algn="ctr">
+            <a:pPr marL="0" indent="0" algn="ctr">
               <a:buNone/>
             </a:pPr>
             <a:r>
-              <a:rPr lang="zh-TW" altLang="en-US" sz="5400" dirty="0"/>
-              <a:t>仇敵已接近 戰號急吹起</a:t>
-            </a:r>
-          </a:p>
-          <a:p>
-            <a:pPr algn="ctr">
+              <a:rPr lang="zh-TW" altLang="en-US" sz="6400" b="1" dirty="0">
+                <a:solidFill>
+                  <a:srgbClr val="660033"/>
+                </a:solidFill>
+                <a:latin typeface="Microsoft JhengHei" pitchFamily="34" charset="-120"/>
+                <a:ea typeface="Microsoft JhengHei" pitchFamily="34" charset="-120"/>
+              </a:rPr>
+              <a:t>萬軍耶和華  聽我心呼籲</a:t>
+            </a:r>
+          </a:p>
+          <a:p>
+            <a:pPr marL="0" indent="0" algn="ctr">
               <a:buNone/>
             </a:pPr>
             <a:r>
-              <a:rPr lang="zh-TW" altLang="en-US" sz="5400" dirty="0"/>
-              <a:t>穿全副軍裝立敵前</a:t>
-            </a:r>
-          </a:p>
-          <a:p>
-            <a:pPr algn="ctr">
+              <a:rPr lang="zh-TW" altLang="en-US" sz="6400" b="1" dirty="0">
+                <a:solidFill>
+                  <a:srgbClr val="660033"/>
+                </a:solidFill>
+                <a:latin typeface="Microsoft JhengHei" pitchFamily="34" charset="-120"/>
+                <a:ea typeface="Microsoft JhengHei" pitchFamily="34" charset="-120"/>
+              </a:rPr>
+              <a:t>援助我們照主恩典</a:t>
+            </a:r>
+          </a:p>
+        </p:txBody>
+      </p:sp>
+      <p:sp>
+        <p:nvSpPr>
+          <p:cNvPr id="3" name="TextBox 2">
+            <a:extLst>
+              <a:ext uri="{FF2B5EF4-FFF2-40B4-BE49-F238E27FC236}">
+                <a16:creationId xmlns:a16="http://schemas.microsoft.com/office/drawing/2014/main" id="{14CAF37C-0E6D-1248-9649-8A9803B1B5A1}"/>
+              </a:ext>
+            </a:extLst>
+          </p:cNvPr>
+          <p:cNvSpPr txBox="1"/>
+          <p:nvPr/>
+        </p:nvSpPr>
+        <p:spPr>
+          <a:xfrm>
+            <a:off x="0" y="5061182"/>
+            <a:ext cx="12192000" cy="707886"/>
+          </a:xfrm>
+          <a:prstGeom prst="rect">
+            <a:avLst/>
+          </a:prstGeom>
+          <a:noFill/>
+        </p:spPr>
+        <p:txBody>
+          <a:bodyPr wrap="square" rtlCol="0">
+            <a:spAutoFit/>
+          </a:bodyPr>
+          <a:lstStyle/>
+          <a:p>
+            <a:pPr algn="ctr"/>
+            <a:r>
+              <a:rPr lang="en-US" sz="4000" b="1" dirty="0">
+                <a:solidFill>
+                  <a:srgbClr val="660033"/>
+                </a:solidFill>
+              </a:rPr>
+              <a:t>( 3 / 3 )</a:t>
+            </a:r>
+            <a:endParaRPr lang="vi-VN" sz="4000" b="1" dirty="0">
+              <a:solidFill>
+                <a:srgbClr val="660033"/>
+              </a:solidFill>
+            </a:endParaRPr>
+          </a:p>
+        </p:txBody>
+      </p:sp>
+    </p:spTree>
+    <p:extLst>
+      <p:ext uri="{BB962C8B-B14F-4D97-AF65-F5344CB8AC3E}">
+        <p14:creationId xmlns:p14="http://schemas.microsoft.com/office/powerpoint/2010/main" val="629912726"/>
+      </p:ext>
+    </p:extLst>
+  </p:cSld>
+  <p:clrMapOvr>
+    <a:masterClrMapping/>
+  </p:clrMapOvr>
+</p:sld>
+</file>
+
+<file path=ppt/slides/slide11.xml><?xml version="1.0" encoding="utf-8"?>
+<p:sld xmlns:a="http://schemas.openxmlformats.org/drawingml/2006/main" xmlns:r="http://schemas.openxmlformats.org/officeDocument/2006/relationships" xmlns:p="http://schemas.openxmlformats.org/presentationml/2006/main">
+  <p:cSld>
+    <p:spTree>
+      <p:nvGrpSpPr>
+        <p:cNvPr id="1" name="">
+          <a:extLst>
+            <a:ext uri="{FF2B5EF4-FFF2-40B4-BE49-F238E27FC236}">
+              <a16:creationId xmlns:a16="http://schemas.microsoft.com/office/drawing/2014/main" id="{829CB52A-CACA-8C17-2A4A-5E1E931EFB58}"/>
+            </a:ext>
+          </a:extLst>
+        </p:cNvPr>
+        <p:cNvGrpSpPr/>
+        <p:nvPr/>
+      </p:nvGrpSpPr>
+      <p:grpSpPr>
+        <a:xfrm>
+          <a:off x="0" y="0"/>
+          <a:ext cx="0" cy="0"/>
+          <a:chOff x="0" y="0"/>
+          <a:chExt cx="0" cy="0"/>
+        </a:xfrm>
+      </p:grpSpPr>
+      <p:sp>
+        <p:nvSpPr>
+          <p:cNvPr id="5" name="內容版面配置區 4">
+            <a:extLst>
+              <a:ext uri="{FF2B5EF4-FFF2-40B4-BE49-F238E27FC236}">
+                <a16:creationId xmlns:a16="http://schemas.microsoft.com/office/drawing/2014/main" id="{F39D580B-95AD-6D10-9E16-3EFF09EA575D}"/>
+              </a:ext>
+            </a:extLst>
+          </p:cNvPr>
+          <p:cNvSpPr>
+            <a:spLocks noGrp="1"/>
+          </p:cNvSpPr>
+          <p:nvPr>
+            <p:ph idx="1"/>
+          </p:nvPr>
+        </p:nvSpPr>
+        <p:spPr>
+          <a:xfrm>
+            <a:off x="0" y="2084851"/>
+            <a:ext cx="12192000" cy="2404863"/>
+          </a:xfrm>
+        </p:spPr>
+        <p:txBody>
+          <a:bodyPr anchor="ctr">
+            <a:normAutofit/>
+          </a:bodyPr>
+          <a:lstStyle/>
+          <a:p>
+            <a:pPr marL="0" indent="0" algn="ctr">
               <a:buNone/>
             </a:pPr>
             <a:r>
-              <a:rPr lang="zh-TW" altLang="en-US" sz="5400" dirty="0"/>
-              <a:t>高舉主基督榮耀十字旗</a:t>
-            </a:r>
-          </a:p>
-          <a:p>
-            <a:pPr algn="ctr">
+              <a:rPr lang="zh-TW" altLang="en-US" sz="6400" b="1" dirty="0">
+                <a:solidFill>
+                  <a:srgbClr val="660033"/>
+                </a:solidFill>
+                <a:latin typeface="Microsoft JhengHei" pitchFamily="34" charset="-120"/>
+                <a:ea typeface="Microsoft JhengHei" pitchFamily="34" charset="-120"/>
+              </a:rPr>
+              <a:t>戰爭過去後高聲唱凱歌</a:t>
+            </a:r>
+          </a:p>
+          <a:p>
+            <a:pPr marL="0" indent="0" algn="ctr">
               <a:buNone/>
             </a:pPr>
             <a:r>
-              <a:rPr lang="zh-TW" altLang="en-US" sz="5400" dirty="0"/>
-              <a:t>得勝全然信靠主聖</a:t>
-            </a:r>
-            <a:r>
-              <a:rPr lang="zh-TW" altLang="en-US" sz="5400" dirty="0" smtClean="0"/>
-              <a:t>言</a:t>
-            </a:r>
-            <a:endParaRPr lang="zh-TW" altLang="en-US" sz="5400" dirty="0"/>
+              <a:rPr lang="zh-TW" altLang="en-US" sz="6400" b="1" dirty="0">
+                <a:solidFill>
+                  <a:srgbClr val="660033"/>
+                </a:solidFill>
+                <a:latin typeface="Microsoft JhengHei" pitchFamily="34" charset="-120"/>
+                <a:ea typeface="Microsoft JhengHei" pitchFamily="34" charset="-120"/>
+              </a:rPr>
+              <a:t>頭戴冠冕榮耀站主前</a:t>
+            </a:r>
+          </a:p>
+        </p:txBody>
+      </p:sp>
+      <p:sp>
+        <p:nvSpPr>
+          <p:cNvPr id="3" name="TextBox 2">
+            <a:extLst>
+              <a:ext uri="{FF2B5EF4-FFF2-40B4-BE49-F238E27FC236}">
+                <a16:creationId xmlns:a16="http://schemas.microsoft.com/office/drawing/2014/main" id="{646EDED7-CEDE-6714-2B09-3EF4889805F0}"/>
+              </a:ext>
+            </a:extLst>
+          </p:cNvPr>
+          <p:cNvSpPr txBox="1"/>
+          <p:nvPr/>
+        </p:nvSpPr>
+        <p:spPr>
+          <a:xfrm>
+            <a:off x="0" y="5061182"/>
+            <a:ext cx="12192000" cy="707886"/>
+          </a:xfrm>
+          <a:prstGeom prst="rect">
+            <a:avLst/>
+          </a:prstGeom>
+          <a:noFill/>
+        </p:spPr>
+        <p:txBody>
+          <a:bodyPr wrap="square" rtlCol="0">
+            <a:spAutoFit/>
+          </a:bodyPr>
+          <a:lstStyle/>
+          <a:p>
+            <a:pPr algn="ctr"/>
+            <a:r>
+              <a:rPr lang="en-US" sz="4000" b="1" dirty="0">
+                <a:solidFill>
+                  <a:srgbClr val="660033"/>
+                </a:solidFill>
+              </a:rPr>
+              <a:t>( 3 / 3 )</a:t>
+            </a:r>
+            <a:endParaRPr lang="vi-VN" sz="4000" b="1" dirty="0">
+              <a:solidFill>
+                <a:srgbClr val="660033"/>
+              </a:solidFill>
+            </a:endParaRPr>
           </a:p>
         </p:txBody>
       </p:sp>
     </p:spTree>
+    <p:extLst>
+      <p:ext uri="{BB962C8B-B14F-4D97-AF65-F5344CB8AC3E}">
+        <p14:creationId xmlns:p14="http://schemas.microsoft.com/office/powerpoint/2010/main" val="184466553"/>
+      </p:ext>
+    </p:extLst>
+  </p:cSld>
+  <p:clrMapOvr>
+    <a:masterClrMapping/>
+  </p:clrMapOvr>
+</p:sld>
+</file>
+
+<file path=ppt/slides/slide12.xml><?xml version="1.0" encoding="utf-8"?>
+<p:sld xmlns:a="http://schemas.openxmlformats.org/drawingml/2006/main" xmlns:r="http://schemas.openxmlformats.org/officeDocument/2006/relationships" xmlns:p="http://schemas.openxmlformats.org/presentationml/2006/main">
+  <p:cSld>
+    <p:spTree>
+      <p:nvGrpSpPr>
+        <p:cNvPr id="1" name="">
+          <a:extLst>
+            <a:ext uri="{FF2B5EF4-FFF2-40B4-BE49-F238E27FC236}">
+              <a16:creationId xmlns:a16="http://schemas.microsoft.com/office/drawing/2014/main" id="{C8C5CF44-D17C-6729-A4F0-1FB593131878}"/>
+            </a:ext>
+          </a:extLst>
+        </p:cNvPr>
+        <p:cNvGrpSpPr/>
+        <p:nvPr/>
+      </p:nvGrpSpPr>
+      <p:grpSpPr>
+        <a:xfrm>
+          <a:off x="0" y="0"/>
+          <a:ext cx="0" cy="0"/>
+          <a:chOff x="0" y="0"/>
+          <a:chExt cx="0" cy="0"/>
+        </a:xfrm>
+      </p:grpSpPr>
+      <p:sp>
+        <p:nvSpPr>
+          <p:cNvPr id="5" name="內容版面配置區 4">
+            <a:extLst>
+              <a:ext uri="{FF2B5EF4-FFF2-40B4-BE49-F238E27FC236}">
+                <a16:creationId xmlns:a16="http://schemas.microsoft.com/office/drawing/2014/main" id="{39A388E8-2916-A0CD-9E63-A94A70DB88A8}"/>
+              </a:ext>
+            </a:extLst>
+          </p:cNvPr>
+          <p:cNvSpPr>
+            <a:spLocks noGrp="1"/>
+          </p:cNvSpPr>
+          <p:nvPr>
+            <p:ph idx="1"/>
+          </p:nvPr>
+        </p:nvSpPr>
+        <p:spPr>
+          <a:xfrm>
+            <a:off x="0" y="2084851"/>
+            <a:ext cx="12192000" cy="2404863"/>
+          </a:xfrm>
+        </p:spPr>
+        <p:txBody>
+          <a:bodyPr anchor="ctr">
+            <a:normAutofit/>
+          </a:bodyPr>
+          <a:lstStyle/>
+          <a:p>
+            <a:pPr marL="0" indent="0" algn="ctr">
+              <a:buNone/>
+            </a:pPr>
+            <a:r>
+              <a:rPr lang="zh-TW" altLang="en-US" sz="6400" b="1" dirty="0">
+                <a:solidFill>
+                  <a:srgbClr val="660033"/>
+                </a:solidFill>
+                <a:latin typeface="Microsoft JhengHei" pitchFamily="34" charset="-120"/>
+                <a:ea typeface="Microsoft JhengHei" pitchFamily="34" charset="-120"/>
+              </a:rPr>
+              <a:t>精兵興起  集隊主旌旗下</a:t>
+            </a:r>
+          </a:p>
+          <a:p>
+            <a:pPr marL="0" indent="0" algn="ctr">
+              <a:buNone/>
+            </a:pPr>
+            <a:r>
+              <a:rPr lang="zh-TW" altLang="en-US" sz="6400" b="1" dirty="0">
+                <a:solidFill>
+                  <a:srgbClr val="660033"/>
+                </a:solidFill>
+                <a:latin typeface="Microsoft JhengHei" pitchFamily="34" charset="-120"/>
+                <a:ea typeface="Microsoft JhengHei" pitchFamily="34" charset="-120"/>
+              </a:rPr>
+              <a:t>預備前進 將此令傳開</a:t>
+            </a:r>
+          </a:p>
+        </p:txBody>
+      </p:sp>
+    </p:spTree>
+    <p:extLst>
+      <p:ext uri="{BB962C8B-B14F-4D97-AF65-F5344CB8AC3E}">
+        <p14:creationId xmlns:p14="http://schemas.microsoft.com/office/powerpoint/2010/main" val="183686782"/>
+      </p:ext>
+    </p:extLst>
+  </p:cSld>
+  <p:clrMapOvr>
+    <a:masterClrMapping/>
+  </p:clrMapOvr>
+</p:sld>
+</file>
+
+<file path=ppt/slides/slide13.xml><?xml version="1.0" encoding="utf-8"?>
+<p:sld xmlns:a="http://schemas.openxmlformats.org/drawingml/2006/main" xmlns:r="http://schemas.openxmlformats.org/officeDocument/2006/relationships" xmlns:p="http://schemas.openxmlformats.org/presentationml/2006/main">
+  <p:cSld>
+    <p:spTree>
+      <p:nvGrpSpPr>
+        <p:cNvPr id="1" name="">
+          <a:extLst>
+            <a:ext uri="{FF2B5EF4-FFF2-40B4-BE49-F238E27FC236}">
+              <a16:creationId xmlns:a16="http://schemas.microsoft.com/office/drawing/2014/main" id="{DF07E4EA-6465-F8AD-98CE-DDA019696CD5}"/>
+            </a:ext>
+          </a:extLst>
+        </p:cNvPr>
+        <p:cNvGrpSpPr/>
+        <p:nvPr/>
+      </p:nvGrpSpPr>
+      <p:grpSpPr>
+        <a:xfrm>
+          <a:off x="0" y="0"/>
+          <a:ext cx="0" cy="0"/>
+          <a:chOff x="0" y="0"/>
+          <a:chExt cx="0" cy="0"/>
+        </a:xfrm>
+      </p:grpSpPr>
+      <p:sp>
+        <p:nvSpPr>
+          <p:cNvPr id="5" name="內容版面配置區 4">
+            <a:extLst>
+              <a:ext uri="{FF2B5EF4-FFF2-40B4-BE49-F238E27FC236}">
+                <a16:creationId xmlns:a16="http://schemas.microsoft.com/office/drawing/2014/main" id="{D7A893E8-29CA-44E9-853C-2353C30B124C}"/>
+              </a:ext>
+            </a:extLst>
+          </p:cNvPr>
+          <p:cNvSpPr>
+            <a:spLocks noGrp="1"/>
+          </p:cNvSpPr>
+          <p:nvPr>
+            <p:ph idx="1"/>
+          </p:nvPr>
+        </p:nvSpPr>
+        <p:spPr>
+          <a:xfrm>
+            <a:off x="0" y="2084851"/>
+            <a:ext cx="12192000" cy="2404863"/>
+          </a:xfrm>
+        </p:spPr>
+        <p:txBody>
+          <a:bodyPr anchor="ctr">
+            <a:normAutofit/>
+          </a:bodyPr>
+          <a:lstStyle/>
+          <a:p>
+            <a:pPr marL="0" indent="0" algn="ctr">
+              <a:buNone/>
+            </a:pPr>
+            <a:r>
+              <a:rPr lang="zh-TW" altLang="en-US" sz="6400" b="1" dirty="0">
+                <a:solidFill>
+                  <a:srgbClr val="660033"/>
+                </a:solidFill>
+                <a:latin typeface="Microsoft JhengHei" pitchFamily="34" charset="-120"/>
+                <a:ea typeface="Microsoft JhengHei" pitchFamily="34" charset="-120"/>
+              </a:rPr>
+              <a:t>向前  向前  高聲唱和散那</a:t>
+            </a:r>
+          </a:p>
+          <a:p>
+            <a:pPr marL="0" indent="0" algn="ctr">
+              <a:buNone/>
+            </a:pPr>
+            <a:r>
+              <a:rPr lang="zh-TW" altLang="en-US" sz="6400" b="1" dirty="0">
+                <a:solidFill>
+                  <a:srgbClr val="660033"/>
+                </a:solidFill>
+                <a:latin typeface="Microsoft JhengHei" pitchFamily="34" charset="-120"/>
+                <a:ea typeface="Microsoft JhengHei" pitchFamily="34" charset="-120"/>
+              </a:rPr>
+              <a:t>基督為此雄師之元帥</a:t>
+            </a:r>
+          </a:p>
+        </p:txBody>
+      </p:sp>
+    </p:spTree>
+    <p:extLst>
+      <p:ext uri="{BB962C8B-B14F-4D97-AF65-F5344CB8AC3E}">
+        <p14:creationId xmlns:p14="http://schemas.microsoft.com/office/powerpoint/2010/main" val="2250250895"/>
+      </p:ext>
+    </p:extLst>
   </p:cSld>
   <p:clrMapOvr>
     <a:masterClrMapping/>
@@ -3358,28 +3724,6 @@
       </p:grpSpPr>
       <p:sp>
         <p:nvSpPr>
-          <p:cNvPr id="4" name="標題 3"/>
-          <p:cNvSpPr>
-            <a:spLocks noGrp="1"/>
-          </p:cNvSpPr>
-          <p:nvPr>
-            <p:ph type="title"/>
-          </p:nvPr>
-        </p:nvSpPr>
-        <p:spPr/>
-        <p:txBody>
-          <a:bodyPr/>
-          <a:lstStyle/>
-          <a:p>
-            <a:r>
-              <a:rPr lang="zh-TW" altLang="en-US" dirty="0"/>
-              <a:t>精兵興起</a:t>
-            </a:r>
-          </a:p>
-        </p:txBody>
-      </p:sp>
-      <p:sp>
-        <p:nvSpPr>
           <p:cNvPr id="5" name="內容版面配置區 4"/>
           <p:cNvSpPr>
             <a:spLocks noGrp="1"/>
@@ -3388,51 +3732,94 @@
             <p:ph idx="1"/>
           </p:nvPr>
         </p:nvSpPr>
-        <p:spPr/>
-        <p:txBody>
-          <a:bodyPr>
+        <p:spPr>
+          <a:xfrm>
+            <a:off x="0" y="2084851"/>
+            <a:ext cx="12192000" cy="2404863"/>
+          </a:xfrm>
+        </p:spPr>
+        <p:txBody>
+          <a:bodyPr anchor="ctr">
             <a:normAutofit/>
           </a:bodyPr>
           <a:lstStyle/>
           <a:p>
-            <a:pPr algn="ctr">
+            <a:pPr marL="0" indent="0" algn="ctr">
               <a:buNone/>
             </a:pPr>
             <a:r>
-              <a:rPr lang="zh-TW" altLang="en-US" sz="5400" dirty="0"/>
-              <a:t>精兵興起 集隊主旌旗下</a:t>
-            </a:r>
-          </a:p>
-          <a:p>
-            <a:pPr algn="ctr">
+              <a:rPr lang="zh-TW" altLang="en-US" sz="6400" b="1" dirty="0">
+                <a:solidFill>
+                  <a:srgbClr val="660033"/>
+                </a:solidFill>
+                <a:latin typeface="Microsoft JhengHei" pitchFamily="34" charset="-120"/>
+                <a:ea typeface="Microsoft JhengHei" pitchFamily="34" charset="-120"/>
+              </a:rPr>
+              <a:t>仇敵已接近  戰號急吹起</a:t>
+            </a:r>
+          </a:p>
+          <a:p>
+            <a:pPr marL="0" indent="0" algn="ctr">
               <a:buNone/>
             </a:pPr>
             <a:r>
-              <a:rPr lang="zh-TW" altLang="en-US" sz="5400" dirty="0"/>
-              <a:t>預備前進 將此令傳開</a:t>
-            </a:r>
-          </a:p>
-          <a:p>
-            <a:pPr algn="ctr">
-              <a:buNone/>
-            </a:pPr>
-            <a:r>
-              <a:rPr lang="zh-TW" altLang="en-US" sz="5400" dirty="0"/>
-              <a:t>向前 向前 高聲唱和散那</a:t>
-            </a:r>
-          </a:p>
-          <a:p>
-            <a:pPr algn="ctr">
-              <a:buNone/>
-            </a:pPr>
-            <a:r>
-              <a:rPr lang="zh-TW" altLang="en-US" sz="5400" dirty="0"/>
-              <a:t>基督為此雄師之元帥</a:t>
-            </a:r>
+              <a:rPr lang="zh-TW" altLang="en-US" sz="6400" b="1" dirty="0">
+                <a:solidFill>
+                  <a:srgbClr val="660033"/>
+                </a:solidFill>
+                <a:latin typeface="Microsoft JhengHei" pitchFamily="34" charset="-120"/>
+                <a:ea typeface="Microsoft JhengHei" pitchFamily="34" charset="-120"/>
+              </a:rPr>
+              <a:t>穿全副軍裝立敵前</a:t>
+            </a:r>
+          </a:p>
+        </p:txBody>
+      </p:sp>
+      <p:sp>
+        <p:nvSpPr>
+          <p:cNvPr id="3" name="TextBox 2"/>
+          <p:cNvSpPr txBox="1"/>
+          <p:nvPr/>
+        </p:nvSpPr>
+        <p:spPr>
+          <a:xfrm>
+            <a:off x="0" y="5061182"/>
+            <a:ext cx="12192000" cy="707886"/>
+          </a:xfrm>
+          <a:prstGeom prst="rect">
+            <a:avLst/>
+          </a:prstGeom>
+          <a:noFill/>
+        </p:spPr>
+        <p:txBody>
+          <a:bodyPr wrap="square" rtlCol="0">
+            <a:spAutoFit/>
+          </a:bodyPr>
+          <a:lstStyle/>
+          <a:p>
+            <a:pPr algn="ctr"/>
+            <a:r>
+              <a:rPr lang="en-US" sz="4000" b="1" dirty="0">
+                <a:solidFill>
+                  <a:srgbClr val="660033"/>
+                </a:solidFill>
+              </a:rPr>
+              <a:t>( 1 / 3 )</a:t>
+            </a:r>
+            <a:endParaRPr lang="vi-VN" sz="4000" b="1" dirty="0">
+              <a:solidFill>
+                <a:srgbClr val="660033"/>
+              </a:solidFill>
+            </a:endParaRPr>
           </a:p>
         </p:txBody>
       </p:sp>
     </p:spTree>
+    <p:extLst>
+      <p:ext uri="{BB962C8B-B14F-4D97-AF65-F5344CB8AC3E}">
+        <p14:creationId xmlns:p14="http://schemas.microsoft.com/office/powerpoint/2010/main" val="1407003638"/>
+      </p:ext>
+    </p:extLst>
   </p:cSld>
   <p:clrMapOvr>
     <a:masterClrMapping/>
@@ -3445,7 +3832,13 @@
   <p:cSld>
     <p:spTree>
       <p:nvGrpSpPr>
-        <p:cNvPr id="1" name=""/>
+        <p:cNvPr id="1" name="">
+          <a:extLst>
+            <a:ext uri="{FF2B5EF4-FFF2-40B4-BE49-F238E27FC236}">
+              <a16:creationId xmlns:a16="http://schemas.microsoft.com/office/drawing/2014/main" id="{92969DAB-7DC7-ACCB-4742-C995C50921EE}"/>
+            </a:ext>
+          </a:extLst>
+        </p:cNvPr>
         <p:cNvGrpSpPr/>
         <p:nvPr/>
       </p:nvGrpSpPr>
@@ -3459,29 +3852,13 @@
       </p:grpSpPr>
       <p:sp>
         <p:nvSpPr>
-          <p:cNvPr id="4" name="標題 3"/>
-          <p:cNvSpPr>
-            <a:spLocks noGrp="1"/>
-          </p:cNvSpPr>
-          <p:nvPr>
-            <p:ph type="title"/>
-          </p:nvPr>
-        </p:nvSpPr>
-        <p:spPr/>
-        <p:txBody>
-          <a:bodyPr/>
-          <a:lstStyle/>
-          <a:p>
-            <a:r>
-              <a:rPr lang="zh-TW" altLang="en-US" dirty="0"/>
-              <a:t>精兵興起</a:t>
-            </a:r>
-          </a:p>
-        </p:txBody>
-      </p:sp>
-      <p:sp>
-        <p:nvSpPr>
-          <p:cNvPr id="5" name="內容版面配置區 4"/>
+          <p:cNvPr id="5" name="內容版面配置區 4">
+            <a:extLst>
+              <a:ext uri="{FF2B5EF4-FFF2-40B4-BE49-F238E27FC236}">
+                <a16:creationId xmlns:a16="http://schemas.microsoft.com/office/drawing/2014/main" id="{45823D10-9E1F-BDB4-97D4-5E4C4B9D54F9}"/>
+              </a:ext>
+            </a:extLst>
+          </p:cNvPr>
           <p:cNvSpPr>
             <a:spLocks noGrp="1"/>
           </p:cNvSpPr>
@@ -3489,51 +3866,100 @@
             <p:ph idx="1"/>
           </p:nvPr>
         </p:nvSpPr>
-        <p:spPr/>
-        <p:txBody>
-          <a:bodyPr>
+        <p:spPr>
+          <a:xfrm>
+            <a:off x="0" y="2084851"/>
+            <a:ext cx="12192000" cy="2404863"/>
+          </a:xfrm>
+        </p:spPr>
+        <p:txBody>
+          <a:bodyPr anchor="ctr">
             <a:normAutofit/>
           </a:bodyPr>
           <a:lstStyle/>
           <a:p>
-            <a:pPr algn="ctr">
+            <a:pPr marL="0" indent="0" algn="ctr">
               <a:buNone/>
             </a:pPr>
             <a:r>
-              <a:rPr lang="zh-TW" altLang="en-US" sz="5400" dirty="0"/>
-              <a:t>大家向前進 勇敢戰善戰</a:t>
-            </a:r>
-          </a:p>
-          <a:p>
-            <a:pPr algn="ctr">
+              <a:rPr lang="zh-TW" altLang="en-US" sz="6400" b="1" dirty="0">
+                <a:solidFill>
+                  <a:srgbClr val="660033"/>
+                </a:solidFill>
+                <a:latin typeface="Microsoft JhengHei" pitchFamily="34" charset="-120"/>
+                <a:ea typeface="Microsoft JhengHei" pitchFamily="34" charset="-120"/>
+              </a:rPr>
+              <a:t>高舉主基督榮耀十字旗</a:t>
+            </a:r>
+          </a:p>
+          <a:p>
+            <a:pPr marL="0" indent="0" algn="ctr">
               <a:buNone/>
             </a:pPr>
             <a:r>
-              <a:rPr lang="zh-TW" altLang="en-US" sz="5400" dirty="0"/>
-              <a:t>主義顯明必操勝算</a:t>
-            </a:r>
-          </a:p>
-          <a:p>
-            <a:pPr algn="ctr">
-              <a:buNone/>
-            </a:pPr>
-            <a:r>
-              <a:rPr lang="zh-TW" altLang="en-US" sz="5400" dirty="0"/>
-              <a:t>盾甲與旌旗照耀在光中</a:t>
-            </a:r>
-          </a:p>
-          <a:p>
-            <a:pPr algn="ctr">
-              <a:buNone/>
-            </a:pPr>
-            <a:r>
-              <a:rPr lang="zh-TW" altLang="en-US" sz="5400" dirty="0"/>
-              <a:t>為主真理而戰必凱旋</a:t>
-            </a:r>
+              <a:rPr lang="zh-TW" altLang="en-US" sz="6400" b="1" dirty="0">
+                <a:solidFill>
+                  <a:srgbClr val="660033"/>
+                </a:solidFill>
+                <a:latin typeface="Microsoft JhengHei" pitchFamily="34" charset="-120"/>
+                <a:ea typeface="Microsoft JhengHei" pitchFamily="34" charset="-120"/>
+              </a:rPr>
+              <a:t>得勝全然信靠主聖言</a:t>
+            </a:r>
+          </a:p>
+        </p:txBody>
+      </p:sp>
+      <p:sp>
+        <p:nvSpPr>
+          <p:cNvPr id="3" name="TextBox 2">
+            <a:extLst>
+              <a:ext uri="{FF2B5EF4-FFF2-40B4-BE49-F238E27FC236}">
+                <a16:creationId xmlns:a16="http://schemas.microsoft.com/office/drawing/2014/main" id="{9FA7EAD9-1464-6FF7-9575-C887BD51BCAF}"/>
+              </a:ext>
+            </a:extLst>
+          </p:cNvPr>
+          <p:cNvSpPr txBox="1"/>
+          <p:nvPr/>
+        </p:nvSpPr>
+        <p:spPr>
+          <a:xfrm>
+            <a:off x="0" y="5061182"/>
+            <a:ext cx="12192000" cy="707886"/>
+          </a:xfrm>
+          <a:prstGeom prst="rect">
+            <a:avLst/>
+          </a:prstGeom>
+          <a:noFill/>
+        </p:spPr>
+        <p:txBody>
+          <a:bodyPr wrap="square" rtlCol="0">
+            <a:spAutoFit/>
+          </a:bodyPr>
+          <a:lstStyle/>
+          <a:p>
+            <a:pPr algn="ctr"/>
+            <a:r>
+              <a:rPr lang="en-US" sz="4000" b="1" dirty="0">
+                <a:solidFill>
+                  <a:srgbClr val="660033"/>
+                </a:solidFill>
+              </a:rPr>
+              <a:t>( 1 / 3 )</a:t>
+            </a:r>
+            <a:endParaRPr lang="vi-VN" sz="4000" b="1" dirty="0">
+              <a:solidFill>
+                <a:srgbClr val="660033"/>
+              </a:solidFill>
+            </a:endParaRPr>
           </a:p>
         </p:txBody>
       </p:sp>
     </p:spTree>
+    <p:extLst>
+      <p:ext uri="{BB962C8B-B14F-4D97-AF65-F5344CB8AC3E}">
+        <p14:creationId xmlns:p14="http://schemas.microsoft.com/office/powerpoint/2010/main" val="868465514"/>
+      </p:ext>
+    </p:extLst>
   </p:cSld>
   <p:clrMapOvr>
     <a:masterClrMapping/>
@@ -3546,7 +3972,13 @@
   <p:cSld>
     <p:spTree>
       <p:nvGrpSpPr>
-        <p:cNvPr id="1" name=""/>
+        <p:cNvPr id="1" name="">
+          <a:extLst>
+            <a:ext uri="{FF2B5EF4-FFF2-40B4-BE49-F238E27FC236}">
+              <a16:creationId xmlns:a16="http://schemas.microsoft.com/office/drawing/2014/main" id="{2432A56B-5482-9332-37EB-C7F25B5A0686}"/>
+            </a:ext>
+          </a:extLst>
+        </p:cNvPr>
         <p:cNvGrpSpPr/>
         <p:nvPr/>
       </p:nvGrpSpPr>
@@ -3560,29 +3992,13 @@
       </p:grpSpPr>
       <p:sp>
         <p:nvSpPr>
-          <p:cNvPr id="4" name="標題 3"/>
-          <p:cNvSpPr>
-            <a:spLocks noGrp="1"/>
-          </p:cNvSpPr>
-          <p:nvPr>
-            <p:ph type="title"/>
-          </p:nvPr>
-        </p:nvSpPr>
-        <p:spPr/>
-        <p:txBody>
-          <a:bodyPr/>
-          <a:lstStyle/>
-          <a:p>
-            <a:r>
-              <a:rPr lang="zh-TW" altLang="en-US" dirty="0"/>
-              <a:t>精兵興起</a:t>
-            </a:r>
-          </a:p>
-        </p:txBody>
-      </p:sp>
-      <p:sp>
-        <p:nvSpPr>
-          <p:cNvPr id="5" name="內容版面配置區 4"/>
+          <p:cNvPr id="5" name="內容版面配置區 4">
+            <a:extLst>
+              <a:ext uri="{FF2B5EF4-FFF2-40B4-BE49-F238E27FC236}">
+                <a16:creationId xmlns:a16="http://schemas.microsoft.com/office/drawing/2014/main" id="{CFAE3080-5444-CE12-97E6-B4D5AF7C9141}"/>
+              </a:ext>
+            </a:extLst>
+          </p:cNvPr>
           <p:cNvSpPr>
             <a:spLocks noGrp="1"/>
           </p:cNvSpPr>
@@ -3590,51 +4006,55 @@
             <p:ph idx="1"/>
           </p:nvPr>
         </p:nvSpPr>
-        <p:spPr/>
-        <p:txBody>
-          <a:bodyPr>
+        <p:spPr>
+          <a:xfrm>
+            <a:off x="0" y="2084851"/>
+            <a:ext cx="12192000" cy="2404863"/>
+          </a:xfrm>
+        </p:spPr>
+        <p:txBody>
+          <a:bodyPr anchor="ctr">
             <a:normAutofit/>
           </a:bodyPr>
           <a:lstStyle/>
           <a:p>
-            <a:pPr algn="ctr">
+            <a:pPr marL="0" indent="0" algn="ctr">
               <a:buNone/>
             </a:pPr>
             <a:r>
-              <a:rPr lang="zh-TW" altLang="en-US" sz="5400" dirty="0"/>
-              <a:t>精兵興起 集隊主旌旗下</a:t>
-            </a:r>
-          </a:p>
-          <a:p>
-            <a:pPr algn="ctr">
+              <a:rPr lang="zh-TW" altLang="en-US" sz="6400" b="1" dirty="0">
+                <a:solidFill>
+                  <a:srgbClr val="660033"/>
+                </a:solidFill>
+                <a:latin typeface="Microsoft JhengHei" pitchFamily="34" charset="-120"/>
+                <a:ea typeface="Microsoft JhengHei" pitchFamily="34" charset="-120"/>
+              </a:rPr>
+              <a:t>精兵興起  集隊主旌旗下</a:t>
+            </a:r>
+          </a:p>
+          <a:p>
+            <a:pPr marL="0" indent="0" algn="ctr">
               <a:buNone/>
             </a:pPr>
             <a:r>
-              <a:rPr lang="zh-TW" altLang="en-US" sz="5400" dirty="0"/>
+              <a:rPr lang="zh-TW" altLang="en-US" sz="6400" b="1" dirty="0">
+                <a:solidFill>
+                  <a:srgbClr val="660033"/>
+                </a:solidFill>
+                <a:latin typeface="Microsoft JhengHei" pitchFamily="34" charset="-120"/>
+                <a:ea typeface="Microsoft JhengHei" pitchFamily="34" charset="-120"/>
+              </a:rPr>
               <a:t>預備前進 將此令傳開</a:t>
             </a:r>
           </a:p>
-          <a:p>
-            <a:pPr algn="ctr">
-              <a:buNone/>
-            </a:pPr>
-            <a:r>
-              <a:rPr lang="zh-TW" altLang="en-US" sz="5400" dirty="0"/>
-              <a:t>向前 向前 高聲唱和散那</a:t>
-            </a:r>
-          </a:p>
-          <a:p>
-            <a:pPr algn="ctr">
-              <a:buNone/>
-            </a:pPr>
-            <a:r>
-              <a:rPr lang="zh-TW" altLang="en-US" sz="5400" dirty="0"/>
-              <a:t>基督為此雄師之元帥</a:t>
-            </a:r>
-          </a:p>
         </p:txBody>
       </p:sp>
     </p:spTree>
+    <p:extLst>
+      <p:ext uri="{BB962C8B-B14F-4D97-AF65-F5344CB8AC3E}">
+        <p14:creationId xmlns:p14="http://schemas.microsoft.com/office/powerpoint/2010/main" val="4136553082"/>
+      </p:ext>
+    </p:extLst>
   </p:cSld>
   <p:clrMapOvr>
     <a:masterClrMapping/>
@@ -3647,7 +4067,13 @@
   <p:cSld>
     <p:spTree>
       <p:nvGrpSpPr>
-        <p:cNvPr id="1" name=""/>
+        <p:cNvPr id="1" name="">
+          <a:extLst>
+            <a:ext uri="{FF2B5EF4-FFF2-40B4-BE49-F238E27FC236}">
+              <a16:creationId xmlns:a16="http://schemas.microsoft.com/office/drawing/2014/main" id="{C4EF9B0C-B27F-DE0B-725D-01C598E39694}"/>
+            </a:ext>
+          </a:extLst>
+        </p:cNvPr>
         <p:cNvGrpSpPr/>
         <p:nvPr/>
       </p:nvGrpSpPr>
@@ -3661,29 +4087,13 @@
       </p:grpSpPr>
       <p:sp>
         <p:nvSpPr>
-          <p:cNvPr id="4" name="標題 3"/>
-          <p:cNvSpPr>
-            <a:spLocks noGrp="1"/>
-          </p:cNvSpPr>
-          <p:nvPr>
-            <p:ph type="title"/>
-          </p:nvPr>
-        </p:nvSpPr>
-        <p:spPr/>
-        <p:txBody>
-          <a:bodyPr/>
-          <a:lstStyle/>
-          <a:p>
-            <a:r>
-              <a:rPr lang="zh-TW" altLang="en-US" dirty="0"/>
-              <a:t>精兵興起</a:t>
-            </a:r>
-          </a:p>
-        </p:txBody>
-      </p:sp>
-      <p:sp>
-        <p:nvSpPr>
-          <p:cNvPr id="5" name="內容版面配置區 4"/>
+          <p:cNvPr id="5" name="內容版面配置區 4">
+            <a:extLst>
+              <a:ext uri="{FF2B5EF4-FFF2-40B4-BE49-F238E27FC236}">
+                <a16:creationId xmlns:a16="http://schemas.microsoft.com/office/drawing/2014/main" id="{FE3674A2-3C18-F8E9-6D86-AF76DD32531F}"/>
+              </a:ext>
+            </a:extLst>
+          </p:cNvPr>
           <p:cNvSpPr>
             <a:spLocks noGrp="1"/>
           </p:cNvSpPr>
@@ -3691,51 +4101,55 @@
             <p:ph idx="1"/>
           </p:nvPr>
         </p:nvSpPr>
-        <p:spPr/>
-        <p:txBody>
-          <a:bodyPr>
+        <p:spPr>
+          <a:xfrm>
+            <a:off x="0" y="2084851"/>
+            <a:ext cx="12192000" cy="2404863"/>
+          </a:xfrm>
+        </p:spPr>
+        <p:txBody>
+          <a:bodyPr anchor="ctr">
             <a:normAutofit/>
           </a:bodyPr>
           <a:lstStyle/>
           <a:p>
-            <a:pPr algn="ctr">
+            <a:pPr marL="0" indent="0" algn="ctr">
               <a:buNone/>
             </a:pPr>
             <a:r>
-              <a:rPr lang="zh-TW" altLang="en-US" sz="5400" dirty="0"/>
-              <a:t>萬軍耶和華 聽我心呼籲</a:t>
-            </a:r>
-          </a:p>
-          <a:p>
-            <a:pPr algn="ctr">
+              <a:rPr lang="zh-TW" altLang="en-US" sz="6400" b="1" dirty="0">
+                <a:solidFill>
+                  <a:srgbClr val="660033"/>
+                </a:solidFill>
+                <a:latin typeface="Microsoft JhengHei" pitchFamily="34" charset="-120"/>
+                <a:ea typeface="Microsoft JhengHei" pitchFamily="34" charset="-120"/>
+              </a:rPr>
+              <a:t>向前  向前  高聲唱和散那</a:t>
+            </a:r>
+          </a:p>
+          <a:p>
+            <a:pPr marL="0" indent="0" algn="ctr">
               <a:buNone/>
             </a:pPr>
             <a:r>
-              <a:rPr lang="zh-TW" altLang="en-US" sz="5400" dirty="0"/>
-              <a:t>援助我們照主恩典</a:t>
-            </a:r>
-          </a:p>
-          <a:p>
-            <a:pPr algn="ctr">
-              <a:buNone/>
-            </a:pPr>
-            <a:r>
-              <a:rPr lang="zh-TW" altLang="en-US" sz="5400" dirty="0"/>
-              <a:t>戰爭過去後高聲唱凱歌</a:t>
-            </a:r>
-          </a:p>
-          <a:p>
-            <a:pPr algn="ctr">
-              <a:buNone/>
-            </a:pPr>
-            <a:r>
-              <a:rPr lang="zh-TW" altLang="en-US" sz="5400" dirty="0"/>
-              <a:t>頭戴冠冕榮耀站主前</a:t>
+              <a:rPr lang="zh-TW" altLang="en-US" sz="6400" b="1" dirty="0">
+                <a:solidFill>
+                  <a:srgbClr val="660033"/>
+                </a:solidFill>
+                <a:latin typeface="Microsoft JhengHei" pitchFamily="34" charset="-120"/>
+                <a:ea typeface="Microsoft JhengHei" pitchFamily="34" charset="-120"/>
+              </a:rPr>
+              <a:t>基督為此雄師之元帥</a:t>
             </a:r>
           </a:p>
         </p:txBody>
       </p:sp>
     </p:spTree>
+    <p:extLst>
+      <p:ext uri="{BB962C8B-B14F-4D97-AF65-F5344CB8AC3E}">
+        <p14:creationId xmlns:p14="http://schemas.microsoft.com/office/powerpoint/2010/main" val="2079118726"/>
+      </p:ext>
+    </p:extLst>
   </p:cSld>
   <p:clrMapOvr>
     <a:masterClrMapping/>
@@ -3748,7 +4162,13 @@
   <p:cSld>
     <p:spTree>
       <p:nvGrpSpPr>
-        <p:cNvPr id="1" name=""/>
+        <p:cNvPr id="1" name="">
+          <a:extLst>
+            <a:ext uri="{FF2B5EF4-FFF2-40B4-BE49-F238E27FC236}">
+              <a16:creationId xmlns:a16="http://schemas.microsoft.com/office/drawing/2014/main" id="{176B573F-8B5A-EBFA-BF26-261D2620C0EB}"/>
+            </a:ext>
+          </a:extLst>
+        </p:cNvPr>
         <p:cNvGrpSpPr/>
         <p:nvPr/>
       </p:nvGrpSpPr>
@@ -3762,29 +4182,13 @@
       </p:grpSpPr>
       <p:sp>
         <p:nvSpPr>
-          <p:cNvPr id="4" name="標題 3"/>
-          <p:cNvSpPr>
-            <a:spLocks noGrp="1"/>
-          </p:cNvSpPr>
-          <p:nvPr>
-            <p:ph type="title"/>
-          </p:nvPr>
-        </p:nvSpPr>
-        <p:spPr/>
-        <p:txBody>
-          <a:bodyPr/>
-          <a:lstStyle/>
-          <a:p>
-            <a:r>
-              <a:rPr lang="zh-TW" altLang="en-US" dirty="0"/>
-              <a:t>精兵興起</a:t>
-            </a:r>
-          </a:p>
-        </p:txBody>
-      </p:sp>
-      <p:sp>
-        <p:nvSpPr>
-          <p:cNvPr id="5" name="內容版面配置區 4"/>
+          <p:cNvPr id="5" name="內容版面配置區 4">
+            <a:extLst>
+              <a:ext uri="{FF2B5EF4-FFF2-40B4-BE49-F238E27FC236}">
+                <a16:creationId xmlns:a16="http://schemas.microsoft.com/office/drawing/2014/main" id="{E577D791-4C7F-37A7-26AE-4B470062CFB5}"/>
+              </a:ext>
+            </a:extLst>
+          </p:cNvPr>
           <p:cNvSpPr>
             <a:spLocks noGrp="1"/>
           </p:cNvSpPr>
@@ -3792,51 +4196,430 @@
             <p:ph idx="1"/>
           </p:nvPr>
         </p:nvSpPr>
-        <p:spPr/>
-        <p:txBody>
-          <a:bodyPr>
+        <p:spPr>
+          <a:xfrm>
+            <a:off x="0" y="2084851"/>
+            <a:ext cx="12192000" cy="2404863"/>
+          </a:xfrm>
+        </p:spPr>
+        <p:txBody>
+          <a:bodyPr anchor="ctr">
             <a:normAutofit/>
           </a:bodyPr>
           <a:lstStyle/>
           <a:p>
-            <a:pPr algn="ctr">
+            <a:pPr marL="0" indent="0" algn="ctr">
               <a:buNone/>
             </a:pPr>
             <a:r>
-              <a:rPr lang="zh-TW" altLang="en-US" sz="5400" dirty="0"/>
-              <a:t>精兵興起 集隊主旌旗下</a:t>
-            </a:r>
-          </a:p>
-          <a:p>
-            <a:pPr algn="ctr">
+              <a:rPr lang="zh-TW" altLang="en-US" sz="6400" b="1" dirty="0">
+                <a:solidFill>
+                  <a:srgbClr val="660033"/>
+                </a:solidFill>
+                <a:latin typeface="Microsoft JhengHei" pitchFamily="34" charset="-120"/>
+                <a:ea typeface="Microsoft JhengHei" pitchFamily="34" charset="-120"/>
+              </a:rPr>
+              <a:t>大家向前進  勇敢戰善戰</a:t>
+            </a:r>
+          </a:p>
+          <a:p>
+            <a:pPr marL="0" indent="0" algn="ctr">
               <a:buNone/>
             </a:pPr>
             <a:r>
-              <a:rPr lang="zh-TW" altLang="en-US" sz="5400" dirty="0"/>
+              <a:rPr lang="zh-TW" altLang="en-US" sz="6400" b="1" dirty="0">
+                <a:solidFill>
+                  <a:srgbClr val="660033"/>
+                </a:solidFill>
+                <a:latin typeface="Microsoft JhengHei" pitchFamily="34" charset="-120"/>
+                <a:ea typeface="Microsoft JhengHei" pitchFamily="34" charset="-120"/>
+              </a:rPr>
+              <a:t>主義顯明必操勝算</a:t>
+            </a:r>
+          </a:p>
+        </p:txBody>
+      </p:sp>
+      <p:sp>
+        <p:nvSpPr>
+          <p:cNvPr id="3" name="TextBox 2">
+            <a:extLst>
+              <a:ext uri="{FF2B5EF4-FFF2-40B4-BE49-F238E27FC236}">
+                <a16:creationId xmlns:a16="http://schemas.microsoft.com/office/drawing/2014/main" id="{4C8FF137-5407-4F11-C85A-929339BA4698}"/>
+              </a:ext>
+            </a:extLst>
+          </p:cNvPr>
+          <p:cNvSpPr txBox="1"/>
+          <p:nvPr/>
+        </p:nvSpPr>
+        <p:spPr>
+          <a:xfrm>
+            <a:off x="0" y="5061182"/>
+            <a:ext cx="12192000" cy="707886"/>
+          </a:xfrm>
+          <a:prstGeom prst="rect">
+            <a:avLst/>
+          </a:prstGeom>
+          <a:noFill/>
+        </p:spPr>
+        <p:txBody>
+          <a:bodyPr wrap="square" rtlCol="0">
+            <a:spAutoFit/>
+          </a:bodyPr>
+          <a:lstStyle/>
+          <a:p>
+            <a:pPr algn="ctr"/>
+            <a:r>
+              <a:rPr lang="en-US" sz="4000" b="1" dirty="0">
+                <a:solidFill>
+                  <a:srgbClr val="660033"/>
+                </a:solidFill>
+              </a:rPr>
+              <a:t>( 2 / 3 )</a:t>
+            </a:r>
+            <a:endParaRPr lang="vi-VN" sz="4000" b="1" dirty="0">
+              <a:solidFill>
+                <a:srgbClr val="660033"/>
+              </a:solidFill>
+            </a:endParaRPr>
+          </a:p>
+        </p:txBody>
+      </p:sp>
+    </p:spTree>
+    <p:extLst>
+      <p:ext uri="{BB962C8B-B14F-4D97-AF65-F5344CB8AC3E}">
+        <p14:creationId xmlns:p14="http://schemas.microsoft.com/office/powerpoint/2010/main" val="1016864624"/>
+      </p:ext>
+    </p:extLst>
+  </p:cSld>
+  <p:clrMapOvr>
+    <a:masterClrMapping/>
+  </p:clrMapOvr>
+</p:sld>
+</file>
+
+<file path=ppt/slides/slide7.xml><?xml version="1.0" encoding="utf-8"?>
+<p:sld xmlns:a="http://schemas.openxmlformats.org/drawingml/2006/main" xmlns:r="http://schemas.openxmlformats.org/officeDocument/2006/relationships" xmlns:p="http://schemas.openxmlformats.org/presentationml/2006/main">
+  <p:cSld>
+    <p:spTree>
+      <p:nvGrpSpPr>
+        <p:cNvPr id="1" name="">
+          <a:extLst>
+            <a:ext uri="{FF2B5EF4-FFF2-40B4-BE49-F238E27FC236}">
+              <a16:creationId xmlns:a16="http://schemas.microsoft.com/office/drawing/2014/main" id="{1E62677F-EBDF-7EDC-9807-B7B25BC9BC55}"/>
+            </a:ext>
+          </a:extLst>
+        </p:cNvPr>
+        <p:cNvGrpSpPr/>
+        <p:nvPr/>
+      </p:nvGrpSpPr>
+      <p:grpSpPr>
+        <a:xfrm>
+          <a:off x="0" y="0"/>
+          <a:ext cx="0" cy="0"/>
+          <a:chOff x="0" y="0"/>
+          <a:chExt cx="0" cy="0"/>
+        </a:xfrm>
+      </p:grpSpPr>
+      <p:sp>
+        <p:nvSpPr>
+          <p:cNvPr id="5" name="內容版面配置區 4">
+            <a:extLst>
+              <a:ext uri="{FF2B5EF4-FFF2-40B4-BE49-F238E27FC236}">
+                <a16:creationId xmlns:a16="http://schemas.microsoft.com/office/drawing/2014/main" id="{20F588F5-2558-089E-F45C-FF8F0CB24A60}"/>
+              </a:ext>
+            </a:extLst>
+          </p:cNvPr>
+          <p:cNvSpPr>
+            <a:spLocks noGrp="1"/>
+          </p:cNvSpPr>
+          <p:nvPr>
+            <p:ph idx="1"/>
+          </p:nvPr>
+        </p:nvSpPr>
+        <p:spPr>
+          <a:xfrm>
+            <a:off x="0" y="2084851"/>
+            <a:ext cx="12192000" cy="2404863"/>
+          </a:xfrm>
+        </p:spPr>
+        <p:txBody>
+          <a:bodyPr anchor="ctr">
+            <a:normAutofit/>
+          </a:bodyPr>
+          <a:lstStyle/>
+          <a:p>
+            <a:pPr marL="0" indent="0" algn="ctr">
+              <a:buNone/>
+            </a:pPr>
+            <a:r>
+              <a:rPr lang="zh-TW" altLang="en-US" sz="6400" b="1" dirty="0">
+                <a:solidFill>
+                  <a:srgbClr val="660033"/>
+                </a:solidFill>
+                <a:latin typeface="Microsoft JhengHei" pitchFamily="34" charset="-120"/>
+                <a:ea typeface="Microsoft JhengHei" pitchFamily="34" charset="-120"/>
+              </a:rPr>
+              <a:t>盾甲與旌旗照耀在光中</a:t>
+            </a:r>
+          </a:p>
+          <a:p>
+            <a:pPr marL="0" indent="0" algn="ctr">
+              <a:buNone/>
+            </a:pPr>
+            <a:r>
+              <a:rPr lang="zh-TW" altLang="en-US" sz="6400" b="1" dirty="0">
+                <a:solidFill>
+                  <a:srgbClr val="660033"/>
+                </a:solidFill>
+                <a:latin typeface="Microsoft JhengHei" pitchFamily="34" charset="-120"/>
+                <a:ea typeface="Microsoft JhengHei" pitchFamily="34" charset="-120"/>
+              </a:rPr>
+              <a:t>為主真理而戰必凱旋</a:t>
+            </a:r>
+          </a:p>
+        </p:txBody>
+      </p:sp>
+      <p:sp>
+        <p:nvSpPr>
+          <p:cNvPr id="3" name="TextBox 2">
+            <a:extLst>
+              <a:ext uri="{FF2B5EF4-FFF2-40B4-BE49-F238E27FC236}">
+                <a16:creationId xmlns:a16="http://schemas.microsoft.com/office/drawing/2014/main" id="{82CA32A2-F350-0816-ED56-B456E27C5587}"/>
+              </a:ext>
+            </a:extLst>
+          </p:cNvPr>
+          <p:cNvSpPr txBox="1"/>
+          <p:nvPr/>
+        </p:nvSpPr>
+        <p:spPr>
+          <a:xfrm>
+            <a:off x="0" y="5061182"/>
+            <a:ext cx="12192000" cy="707886"/>
+          </a:xfrm>
+          <a:prstGeom prst="rect">
+            <a:avLst/>
+          </a:prstGeom>
+          <a:noFill/>
+        </p:spPr>
+        <p:txBody>
+          <a:bodyPr wrap="square" rtlCol="0">
+            <a:spAutoFit/>
+          </a:bodyPr>
+          <a:lstStyle/>
+          <a:p>
+            <a:pPr algn="ctr"/>
+            <a:r>
+              <a:rPr lang="en-US" sz="4000" b="1" dirty="0">
+                <a:solidFill>
+                  <a:srgbClr val="660033"/>
+                </a:solidFill>
+              </a:rPr>
+              <a:t>( 2 / 3 )</a:t>
+            </a:r>
+            <a:endParaRPr lang="vi-VN" sz="4000" b="1" dirty="0">
+              <a:solidFill>
+                <a:srgbClr val="660033"/>
+              </a:solidFill>
+            </a:endParaRPr>
+          </a:p>
+        </p:txBody>
+      </p:sp>
+    </p:spTree>
+    <p:extLst>
+      <p:ext uri="{BB962C8B-B14F-4D97-AF65-F5344CB8AC3E}">
+        <p14:creationId xmlns:p14="http://schemas.microsoft.com/office/powerpoint/2010/main" val="2282895811"/>
+      </p:ext>
+    </p:extLst>
+  </p:cSld>
+  <p:clrMapOvr>
+    <a:masterClrMapping/>
+  </p:clrMapOvr>
+</p:sld>
+</file>
+
+<file path=ppt/slides/slide8.xml><?xml version="1.0" encoding="utf-8"?>
+<p:sld xmlns:a="http://schemas.openxmlformats.org/drawingml/2006/main" xmlns:r="http://schemas.openxmlformats.org/officeDocument/2006/relationships" xmlns:p="http://schemas.openxmlformats.org/presentationml/2006/main">
+  <p:cSld>
+    <p:spTree>
+      <p:nvGrpSpPr>
+        <p:cNvPr id="1" name="">
+          <a:extLst>
+            <a:ext uri="{FF2B5EF4-FFF2-40B4-BE49-F238E27FC236}">
+              <a16:creationId xmlns:a16="http://schemas.microsoft.com/office/drawing/2014/main" id="{C7D7E5D4-4A51-9519-A193-C8B13D418FAA}"/>
+            </a:ext>
+          </a:extLst>
+        </p:cNvPr>
+        <p:cNvGrpSpPr/>
+        <p:nvPr/>
+      </p:nvGrpSpPr>
+      <p:grpSpPr>
+        <a:xfrm>
+          <a:off x="0" y="0"/>
+          <a:ext cx="0" cy="0"/>
+          <a:chOff x="0" y="0"/>
+          <a:chExt cx="0" cy="0"/>
+        </a:xfrm>
+      </p:grpSpPr>
+      <p:sp>
+        <p:nvSpPr>
+          <p:cNvPr id="5" name="內容版面配置區 4">
+            <a:extLst>
+              <a:ext uri="{FF2B5EF4-FFF2-40B4-BE49-F238E27FC236}">
+                <a16:creationId xmlns:a16="http://schemas.microsoft.com/office/drawing/2014/main" id="{12B5BC64-2802-959D-63E0-31873A5C59EB}"/>
+              </a:ext>
+            </a:extLst>
+          </p:cNvPr>
+          <p:cNvSpPr>
+            <a:spLocks noGrp="1"/>
+          </p:cNvSpPr>
+          <p:nvPr>
+            <p:ph idx="1"/>
+          </p:nvPr>
+        </p:nvSpPr>
+        <p:spPr>
+          <a:xfrm>
+            <a:off x="0" y="2084851"/>
+            <a:ext cx="12192000" cy="2404863"/>
+          </a:xfrm>
+        </p:spPr>
+        <p:txBody>
+          <a:bodyPr anchor="ctr">
+            <a:normAutofit/>
+          </a:bodyPr>
+          <a:lstStyle/>
+          <a:p>
+            <a:pPr marL="0" indent="0" algn="ctr">
+              <a:buNone/>
+            </a:pPr>
+            <a:r>
+              <a:rPr lang="zh-TW" altLang="en-US" sz="6400" b="1" dirty="0">
+                <a:solidFill>
+                  <a:srgbClr val="660033"/>
+                </a:solidFill>
+                <a:latin typeface="Microsoft JhengHei" pitchFamily="34" charset="-120"/>
+                <a:ea typeface="Microsoft JhengHei" pitchFamily="34" charset="-120"/>
+              </a:rPr>
+              <a:t>精兵興起  集隊主旌旗下</a:t>
+            </a:r>
+          </a:p>
+          <a:p>
+            <a:pPr marL="0" indent="0" algn="ctr">
+              <a:buNone/>
+            </a:pPr>
+            <a:r>
+              <a:rPr lang="zh-TW" altLang="en-US" sz="6400" b="1" dirty="0">
+                <a:solidFill>
+                  <a:srgbClr val="660033"/>
+                </a:solidFill>
+                <a:latin typeface="Microsoft JhengHei" pitchFamily="34" charset="-120"/>
+                <a:ea typeface="Microsoft JhengHei" pitchFamily="34" charset="-120"/>
+              </a:rPr>
               <a:t>預備前進 將此令傳開</a:t>
             </a:r>
           </a:p>
-          <a:p>
-            <a:pPr algn="ctr">
+        </p:txBody>
+      </p:sp>
+    </p:spTree>
+    <p:extLst>
+      <p:ext uri="{BB962C8B-B14F-4D97-AF65-F5344CB8AC3E}">
+        <p14:creationId xmlns:p14="http://schemas.microsoft.com/office/powerpoint/2010/main" val="2324760580"/>
+      </p:ext>
+    </p:extLst>
+  </p:cSld>
+  <p:clrMapOvr>
+    <a:masterClrMapping/>
+  </p:clrMapOvr>
+</p:sld>
+</file>
+
+<file path=ppt/slides/slide9.xml><?xml version="1.0" encoding="utf-8"?>
+<p:sld xmlns:a="http://schemas.openxmlformats.org/drawingml/2006/main" xmlns:r="http://schemas.openxmlformats.org/officeDocument/2006/relationships" xmlns:p="http://schemas.openxmlformats.org/presentationml/2006/main">
+  <p:cSld>
+    <p:spTree>
+      <p:nvGrpSpPr>
+        <p:cNvPr id="1" name="">
+          <a:extLst>
+            <a:ext uri="{FF2B5EF4-FFF2-40B4-BE49-F238E27FC236}">
+              <a16:creationId xmlns:a16="http://schemas.microsoft.com/office/drawing/2014/main" id="{18F9CD8F-5B69-976F-6F6F-5AF9077EDBD1}"/>
+            </a:ext>
+          </a:extLst>
+        </p:cNvPr>
+        <p:cNvGrpSpPr/>
+        <p:nvPr/>
+      </p:nvGrpSpPr>
+      <p:grpSpPr>
+        <a:xfrm>
+          <a:off x="0" y="0"/>
+          <a:ext cx="0" cy="0"/>
+          <a:chOff x="0" y="0"/>
+          <a:chExt cx="0" cy="0"/>
+        </a:xfrm>
+      </p:grpSpPr>
+      <p:sp>
+        <p:nvSpPr>
+          <p:cNvPr id="5" name="內容版面配置區 4">
+            <a:extLst>
+              <a:ext uri="{FF2B5EF4-FFF2-40B4-BE49-F238E27FC236}">
+                <a16:creationId xmlns:a16="http://schemas.microsoft.com/office/drawing/2014/main" id="{32F37EFC-71E7-2FE8-7B84-878EED99732B}"/>
+              </a:ext>
+            </a:extLst>
+          </p:cNvPr>
+          <p:cNvSpPr>
+            <a:spLocks noGrp="1"/>
+          </p:cNvSpPr>
+          <p:nvPr>
+            <p:ph idx="1"/>
+          </p:nvPr>
+        </p:nvSpPr>
+        <p:spPr>
+          <a:xfrm>
+            <a:off x="0" y="2084851"/>
+            <a:ext cx="12192000" cy="2404863"/>
+          </a:xfrm>
+        </p:spPr>
+        <p:txBody>
+          <a:bodyPr anchor="ctr">
+            <a:normAutofit/>
+          </a:bodyPr>
+          <a:lstStyle/>
+          <a:p>
+            <a:pPr marL="0" indent="0" algn="ctr">
               <a:buNone/>
             </a:pPr>
             <a:r>
-              <a:rPr lang="zh-TW" altLang="en-US" sz="5400" dirty="0"/>
-              <a:t>向前 向前 高聲唱和散那</a:t>
-            </a:r>
-          </a:p>
-          <a:p>
-            <a:pPr algn="ctr">
+              <a:rPr lang="zh-TW" altLang="en-US" sz="6400" b="1" dirty="0">
+                <a:solidFill>
+                  <a:srgbClr val="660033"/>
+                </a:solidFill>
+                <a:latin typeface="Microsoft JhengHei" pitchFamily="34" charset="-120"/>
+                <a:ea typeface="Microsoft JhengHei" pitchFamily="34" charset="-120"/>
+              </a:rPr>
+              <a:t>向前  向前  高聲唱和散那</a:t>
+            </a:r>
+          </a:p>
+          <a:p>
+            <a:pPr marL="0" indent="0" algn="ctr">
               <a:buNone/>
             </a:pPr>
             <a:r>
-              <a:rPr lang="zh-TW" altLang="en-US" sz="5400" dirty="0"/>
+              <a:rPr lang="zh-TW" altLang="en-US" sz="6400" b="1" dirty="0">
+                <a:solidFill>
+                  <a:srgbClr val="660033"/>
+                </a:solidFill>
+                <a:latin typeface="Microsoft JhengHei" pitchFamily="34" charset="-120"/>
+                <a:ea typeface="Microsoft JhengHei" pitchFamily="34" charset="-120"/>
+              </a:rPr>
               <a:t>基督為此雄師之元帥</a:t>
             </a:r>
           </a:p>
         </p:txBody>
       </p:sp>
     </p:spTree>
+    <p:extLst>
+      <p:ext uri="{BB962C8B-B14F-4D97-AF65-F5344CB8AC3E}">
+        <p14:creationId xmlns:p14="http://schemas.microsoft.com/office/powerpoint/2010/main" val="414444705"/>
+      </p:ext>
+    </p:extLst>
   </p:cSld>
   <p:clrMapOvr>
     <a:masterClrMapping/>
@@ -3845,56 +4628,114 @@
 </file>
 
 <file path=ppt/theme/theme1.xml><?xml version="1.0" encoding="utf-8"?>
-<a:theme xmlns:a="http://schemas.openxmlformats.org/drawingml/2006/main" name="佈景主題3">
+<a:theme xmlns:a="http://schemas.openxmlformats.org/drawingml/2006/main" name="Theme1">
   <a:themeElements>
-    <a:clrScheme name="Diseño predeterminado 1">
+    <a:clrScheme name="Office">
       <a:dk1>
-        <a:srgbClr val="000000"/>
+        <a:sysClr val="windowText" lastClr="000000"/>
       </a:dk1>
       <a:lt1>
-        <a:srgbClr val="FFFFFF"/>
+        <a:sysClr val="window" lastClr="FFFFFF"/>
       </a:lt1>
       <a:dk2>
-        <a:srgbClr val="000000"/>
+        <a:srgbClr val="1F497D"/>
       </a:dk2>
       <a:lt2>
-        <a:srgbClr val="808080"/>
+        <a:srgbClr val="EEECE1"/>
       </a:lt2>
       <a:accent1>
-        <a:srgbClr val="BBE0E3"/>
+        <a:srgbClr val="4F81BD"/>
       </a:accent1>
       <a:accent2>
-        <a:srgbClr val="333399"/>
+        <a:srgbClr val="C0504D"/>
       </a:accent2>
       <a:accent3>
-        <a:srgbClr val="FFFFFF"/>
+        <a:srgbClr val="9BBB59"/>
       </a:accent3>
       <a:accent4>
-        <a:srgbClr val="000000"/>
+        <a:srgbClr val="8064A2"/>
       </a:accent4>
       <a:accent5>
-        <a:srgbClr val="DAEDEF"/>
+        <a:srgbClr val="4BACC6"/>
       </a:accent5>
       <a:accent6>
-        <a:srgbClr val="2D2D8A"/>
+        <a:srgbClr val="F79646"/>
       </a:accent6>
       <a:hlink>
-        <a:srgbClr val="009999"/>
+        <a:srgbClr val="0000FF"/>
       </a:hlink>
       <a:folHlink>
-        <a:srgbClr val="99CC00"/>
+        <a:srgbClr val="800080"/>
       </a:folHlink>
     </a:clrScheme>
-    <a:fontScheme name="Diseño predeterminado">
+    <a:fontScheme name="Office">
       <a:majorFont>
-        <a:latin typeface="Arial"/>
+        <a:latin typeface="Calibri"/>
         <a:ea typeface=""/>
-        <a:cs typeface="Arial"/>
+        <a:cs typeface=""/>
+        <a:font script="Jpan" typeface="ＭＳ Ｐゴシック"/>
+        <a:font script="Hang" typeface="맑은 고딕"/>
+        <a:font script="Hans" typeface="宋体"/>
+        <a:font script="Hant" typeface="新細明體"/>
+        <a:font script="Arab" typeface="Times New Roman"/>
+        <a:font script="Hebr" typeface="Times New Roman"/>
+        <a:font script="Thai" typeface="Angsana New"/>
+        <a:font script="Ethi" typeface="Nyala"/>
+        <a:font script="Beng" typeface="Vrinda"/>
+        <a:font script="Gujr" typeface="Shruti"/>
+        <a:font script="Khmr" typeface="MoolBoran"/>
+        <a:font script="Knda" typeface="Tunga"/>
+        <a:font script="Guru" typeface="Raavi"/>
+        <a:font script="Cans" typeface="Euphemia"/>
+        <a:font script="Cher" typeface="Plantagenet Cherokee"/>
+        <a:font script="Yiii" typeface="Microsoft Yi Baiti"/>
+        <a:font script="Tibt" typeface="Microsoft Himalaya"/>
+        <a:font script="Thaa" typeface="MV Boli"/>
+        <a:font script="Deva" typeface="Mangal"/>
+        <a:font script="Telu" typeface="Gautami"/>
+        <a:font script="Taml" typeface="Latha"/>
+        <a:font script="Syrc" typeface="Estrangelo Edessa"/>
+        <a:font script="Orya" typeface="Kalinga"/>
+        <a:font script="Mlym" typeface="Kartika"/>
+        <a:font script="Laoo" typeface="DokChampa"/>
+        <a:font script="Sinh" typeface="Iskoola Pota"/>
+        <a:font script="Mong" typeface="Mongolian Baiti"/>
+        <a:font script="Viet" typeface="Times New Roman"/>
+        <a:font script="Uigh" typeface="Microsoft Uighur"/>
       </a:majorFont>
       <a:minorFont>
-        <a:latin typeface="Arial"/>
+        <a:latin typeface="Calibri"/>
         <a:ea typeface=""/>
-        <a:cs typeface="Arial"/>
+        <a:cs typeface=""/>
+        <a:font script="Jpan" typeface="ＭＳ Ｐゴシック"/>
+        <a:font script="Hang" typeface="맑은 고딕"/>
+        <a:font script="Hans" typeface="宋体"/>
+        <a:font script="Hant" typeface="新細明體"/>
+        <a:font script="Arab" typeface="Arial"/>
+        <a:font script="Hebr" typeface="Arial"/>
+        <a:font script="Thai" typeface="Cordia New"/>
+        <a:font script="Ethi" typeface="Nyala"/>
+        <a:font script="Beng" typeface="Vrinda"/>
+        <a:font script="Gujr" typeface="Shruti"/>
+        <a:font script="Khmr" typeface="DaunPenh"/>
+        <a:font script="Knda" typeface="Tunga"/>
+        <a:font script="Guru" typeface="Raavi"/>
+        <a:font script="Cans" typeface="Euphemia"/>
+        <a:font script="Cher" typeface="Plantagenet Cherokee"/>
+        <a:font script="Yiii" typeface="Microsoft Yi Baiti"/>
+        <a:font script="Tibt" typeface="Microsoft Himalaya"/>
+        <a:font script="Thaa" typeface="MV Boli"/>
+        <a:font script="Deva" typeface="Mangal"/>
+        <a:font script="Telu" typeface="Gautami"/>
+        <a:font script="Taml" typeface="Latha"/>
+        <a:font script="Syrc" typeface="Estrangelo Edessa"/>
+        <a:font script="Orya" typeface="Kalinga"/>
+        <a:font script="Mlym" typeface="Kartika"/>
+        <a:font script="Laoo" typeface="DokChampa"/>
+        <a:font script="Sinh" typeface="Iskoola Pota"/>
+        <a:font script="Mong" typeface="Mongolian Baiti"/>
+        <a:font script="Viet" typeface="Arial"/>
+        <a:font script="Uigh" typeface="Microsoft Uighur"/>
       </a:minorFont>
     </a:fontScheme>
     <a:fmtScheme name="Office">
@@ -4064,627 +4905,12 @@
       </a:bgFillStyleLst>
     </a:fmtScheme>
   </a:themeElements>
-  <a:objectDefaults>
-    <a:spDef>
-      <a:spPr bwMode="auto">
-        <a:xfrm>
-          <a:off x="0" y="0"/>
-          <a:ext cx="1" cy="1"/>
-        </a:xfrm>
-        <a:custGeom>
-          <a:avLst/>
-          <a:gdLst/>
-          <a:ahLst/>
-          <a:cxnLst/>
-          <a:rect l="0" t="0" r="0" b="0"/>
-          <a:pathLst/>
-        </a:custGeom>
-        <a:solidFill>
-          <a:schemeClr val="accent1"/>
-        </a:solidFill>
-        <a:ln w="9525" cap="flat" cmpd="sng" algn="ctr">
-          <a:solidFill>
-            <a:schemeClr val="tx1"/>
-          </a:solidFill>
-          <a:prstDash val="solid"/>
-          <a:round/>
-          <a:headEnd type="none" w="med" len="med"/>
-          <a:tailEnd type="none" w="med" len="med"/>
-        </a:ln>
-        <a:effectLst/>
-      </a:spPr>
-      <a:bodyPr vert="horz" wrap="square" lIns="91440" tIns="45720" rIns="91440" bIns="45720" numCol="1" anchor="t" anchorCtr="0" compatLnSpc="1">
-        <a:prstTxWarp prst="textNoShape">
-          <a:avLst/>
-        </a:prstTxWarp>
-      </a:bodyPr>
-      <a:lstStyle>
-        <a:defPPr marL="0" marR="0" indent="0" algn="l" defTabSz="914400" rtl="0" eaLnBrk="1" fontAlgn="base" latinLnBrk="0" hangingPunct="1">
-          <a:lnSpc>
-            <a:spcPct val="100000"/>
-          </a:lnSpc>
-          <a:spcBef>
-            <a:spcPct val="0"/>
-          </a:spcBef>
-          <a:spcAft>
-            <a:spcPct val="0"/>
-          </a:spcAft>
-          <a:buClrTx/>
-          <a:buSzTx/>
-          <a:buFontTx/>
-          <a:buNone/>
-          <a:tabLst/>
-          <a:defRPr kumimoji="0" lang="es-ES" sz="1800" b="0" i="0" u="none" strike="noStrike" cap="none" normalizeH="0" baseline="0" smtClean="0">
-            <a:ln>
-              <a:noFill/>
-            </a:ln>
-            <a:solidFill>
-              <a:schemeClr val="tx1"/>
-            </a:solidFill>
-            <a:effectLst/>
-            <a:latin typeface="Arial" charset="0"/>
-            <a:cs typeface="Arial" charset="0"/>
-          </a:defRPr>
-        </a:defPPr>
-      </a:lstStyle>
-    </a:spDef>
-    <a:lnDef>
-      <a:spPr bwMode="auto">
-        <a:xfrm>
-          <a:off x="0" y="0"/>
-          <a:ext cx="1" cy="1"/>
-        </a:xfrm>
-        <a:custGeom>
-          <a:avLst/>
-          <a:gdLst/>
-          <a:ahLst/>
-          <a:cxnLst/>
-          <a:rect l="0" t="0" r="0" b="0"/>
-          <a:pathLst/>
-        </a:custGeom>
-        <a:solidFill>
-          <a:schemeClr val="accent1"/>
-        </a:solidFill>
-        <a:ln w="9525" cap="flat" cmpd="sng" algn="ctr">
-          <a:solidFill>
-            <a:schemeClr val="tx1"/>
-          </a:solidFill>
-          <a:prstDash val="solid"/>
-          <a:round/>
-          <a:headEnd type="none" w="med" len="med"/>
-          <a:tailEnd type="none" w="med" len="med"/>
-        </a:ln>
-        <a:effectLst/>
-      </a:spPr>
-      <a:bodyPr vert="horz" wrap="square" lIns="91440" tIns="45720" rIns="91440" bIns="45720" numCol="1" anchor="t" anchorCtr="0" compatLnSpc="1">
-        <a:prstTxWarp prst="textNoShape">
-          <a:avLst/>
-        </a:prstTxWarp>
-      </a:bodyPr>
-      <a:lstStyle>
-        <a:defPPr marL="0" marR="0" indent="0" algn="l" defTabSz="914400" rtl="0" eaLnBrk="1" fontAlgn="base" latinLnBrk="0" hangingPunct="1">
-          <a:lnSpc>
-            <a:spcPct val="100000"/>
-          </a:lnSpc>
-          <a:spcBef>
-            <a:spcPct val="0"/>
-          </a:spcBef>
-          <a:spcAft>
-            <a:spcPct val="0"/>
-          </a:spcAft>
-          <a:buClrTx/>
-          <a:buSzTx/>
-          <a:buFontTx/>
-          <a:buNone/>
-          <a:tabLst/>
-          <a:defRPr kumimoji="0" lang="es-ES" sz="1800" b="0" i="0" u="none" strike="noStrike" cap="none" normalizeH="0" baseline="0" smtClean="0">
-            <a:ln>
-              <a:noFill/>
-            </a:ln>
-            <a:solidFill>
-              <a:schemeClr val="tx1"/>
-            </a:solidFill>
-            <a:effectLst/>
-            <a:latin typeface="Arial" charset="0"/>
-            <a:cs typeface="Arial" charset="0"/>
-          </a:defRPr>
-        </a:defPPr>
-      </a:lstStyle>
-    </a:lnDef>
-  </a:objectDefaults>
-  <a:extraClrSchemeLst>
-    <a:extraClrScheme>
-      <a:clrScheme name="Diseño predeterminado 1">
-        <a:dk1>
-          <a:srgbClr val="000000"/>
-        </a:dk1>
-        <a:lt1>
-          <a:srgbClr val="FFFFFF"/>
-        </a:lt1>
-        <a:dk2>
-          <a:srgbClr val="000000"/>
-        </a:dk2>
-        <a:lt2>
-          <a:srgbClr val="808080"/>
-        </a:lt2>
-        <a:accent1>
-          <a:srgbClr val="BBE0E3"/>
-        </a:accent1>
-        <a:accent2>
-          <a:srgbClr val="333399"/>
-        </a:accent2>
-        <a:accent3>
-          <a:srgbClr val="FFFFFF"/>
-        </a:accent3>
-        <a:accent4>
-          <a:srgbClr val="000000"/>
-        </a:accent4>
-        <a:accent5>
-          <a:srgbClr val="DAEDEF"/>
-        </a:accent5>
-        <a:accent6>
-          <a:srgbClr val="2D2D8A"/>
-        </a:accent6>
-        <a:hlink>
-          <a:srgbClr val="009999"/>
-        </a:hlink>
-        <a:folHlink>
-          <a:srgbClr val="99CC00"/>
-        </a:folHlink>
-      </a:clrScheme>
-      <a:clrMap bg1="lt1" tx1="dk1" bg2="lt2" tx2="dk2" accent1="accent1" accent2="accent2" accent3="accent3" accent4="accent4" accent5="accent5" accent6="accent6" hlink="hlink" folHlink="folHlink"/>
-    </a:extraClrScheme>
-    <a:extraClrScheme>
-      <a:clrScheme name="Diseño predeterminado 2">
-        <a:dk1>
-          <a:srgbClr val="000000"/>
-        </a:dk1>
-        <a:lt1>
-          <a:srgbClr val="FFFFFF"/>
-        </a:lt1>
-        <a:dk2>
-          <a:srgbClr val="000000"/>
-        </a:dk2>
-        <a:lt2>
-          <a:srgbClr val="969696"/>
-        </a:lt2>
-        <a:accent1>
-          <a:srgbClr val="FBDF53"/>
-        </a:accent1>
-        <a:accent2>
-          <a:srgbClr val="FF9966"/>
-        </a:accent2>
-        <a:accent3>
-          <a:srgbClr val="FFFFFF"/>
-        </a:accent3>
-        <a:accent4>
-          <a:srgbClr val="000000"/>
-        </a:accent4>
-        <a:accent5>
-          <a:srgbClr val="FDECB3"/>
-        </a:accent5>
-        <a:accent6>
-          <a:srgbClr val="E78A5C"/>
-        </a:accent6>
-        <a:hlink>
-          <a:srgbClr val="CC3300"/>
-        </a:hlink>
-        <a:folHlink>
-          <a:srgbClr val="996600"/>
-        </a:folHlink>
-      </a:clrScheme>
-      <a:clrMap bg1="lt1" tx1="dk1" bg2="lt2" tx2="dk2" accent1="accent1" accent2="accent2" accent3="accent3" accent4="accent4" accent5="accent5" accent6="accent6" hlink="hlink" folHlink="folHlink"/>
-    </a:extraClrScheme>
-    <a:extraClrScheme>
-      <a:clrScheme name="Diseño predeterminado 3">
-        <a:dk1>
-          <a:srgbClr val="000000"/>
-        </a:dk1>
-        <a:lt1>
-          <a:srgbClr val="FFFFFF"/>
-        </a:lt1>
-        <a:dk2>
-          <a:srgbClr val="000000"/>
-        </a:dk2>
-        <a:lt2>
-          <a:srgbClr val="808080"/>
-        </a:lt2>
-        <a:accent1>
-          <a:srgbClr val="99CCFF"/>
-        </a:accent1>
-        <a:accent2>
-          <a:srgbClr val="CCCCFF"/>
-        </a:accent2>
-        <a:accent3>
-          <a:srgbClr val="FFFFFF"/>
-        </a:accent3>
-        <a:accent4>
-          <a:srgbClr val="000000"/>
-        </a:accent4>
-        <a:accent5>
-          <a:srgbClr val="CAE2FF"/>
-        </a:accent5>
-        <a:accent6>
-          <a:srgbClr val="B9B9E7"/>
-        </a:accent6>
-        <a:hlink>
-          <a:srgbClr val="3333CC"/>
-        </a:hlink>
-        <a:folHlink>
-          <a:srgbClr val="AF67FF"/>
-        </a:folHlink>
-      </a:clrScheme>
-      <a:clrMap bg1="lt1" tx1="dk1" bg2="lt2" tx2="dk2" accent1="accent1" accent2="accent2" accent3="accent3" accent4="accent4" accent5="accent5" accent6="accent6" hlink="hlink" folHlink="folHlink"/>
-    </a:extraClrScheme>
-    <a:extraClrScheme>
-      <a:clrScheme name="Diseño predeterminado 4">
-        <a:dk1>
-          <a:srgbClr val="000000"/>
-        </a:dk1>
-        <a:lt1>
-          <a:srgbClr val="DEF6F1"/>
-        </a:lt1>
-        <a:dk2>
-          <a:srgbClr val="000000"/>
-        </a:dk2>
-        <a:lt2>
-          <a:srgbClr val="969696"/>
-        </a:lt2>
-        <a:accent1>
-          <a:srgbClr val="FFFFFF"/>
-        </a:accent1>
-        <a:accent2>
-          <a:srgbClr val="8DC6FF"/>
-        </a:accent2>
-        <a:accent3>
-          <a:srgbClr val="ECFAF7"/>
-        </a:accent3>
-        <a:accent4>
-          <a:srgbClr val="000000"/>
-        </a:accent4>
-        <a:accent5>
-          <a:srgbClr val="FFFFFF"/>
-        </a:accent5>
-        <a:accent6>
-          <a:srgbClr val="7FB3E7"/>
-        </a:accent6>
-        <a:hlink>
-          <a:srgbClr val="0066CC"/>
-        </a:hlink>
-        <a:folHlink>
-          <a:srgbClr val="00A800"/>
-        </a:folHlink>
-      </a:clrScheme>
-      <a:clrMap bg1="lt1" tx1="dk1" bg2="lt2" tx2="dk2" accent1="accent1" accent2="accent2" accent3="accent3" accent4="accent4" accent5="accent5" accent6="accent6" hlink="hlink" folHlink="folHlink"/>
-    </a:extraClrScheme>
-    <a:extraClrScheme>
-      <a:clrScheme name="Diseño predeterminado 5">
-        <a:dk1>
-          <a:srgbClr val="000000"/>
-        </a:dk1>
-        <a:lt1>
-          <a:srgbClr val="FFFFD9"/>
-        </a:lt1>
-        <a:dk2>
-          <a:srgbClr val="000000"/>
-        </a:dk2>
-        <a:lt2>
-          <a:srgbClr val="777777"/>
-        </a:lt2>
-        <a:accent1>
-          <a:srgbClr val="FFFFF7"/>
-        </a:accent1>
-        <a:accent2>
-          <a:srgbClr val="33CCCC"/>
-        </a:accent2>
-        <a:accent3>
-          <a:srgbClr val="FFFFE9"/>
-        </a:accent3>
-        <a:accent4>
-          <a:srgbClr val="000000"/>
-        </a:accent4>
-        <a:accent5>
-          <a:srgbClr val="FFFFFA"/>
-        </a:accent5>
-        <a:accent6>
-          <a:srgbClr val="2DB9B9"/>
-        </a:accent6>
-        <a:hlink>
-          <a:srgbClr val="FF5050"/>
-        </a:hlink>
-        <a:folHlink>
-          <a:srgbClr val="FF9900"/>
-        </a:folHlink>
-      </a:clrScheme>
-      <a:clrMap bg1="lt1" tx1="dk1" bg2="lt2" tx2="dk2" accent1="accent1" accent2="accent2" accent3="accent3" accent4="accent4" accent5="accent5" accent6="accent6" hlink="hlink" folHlink="folHlink"/>
-    </a:extraClrScheme>
-    <a:extraClrScheme>
-      <a:clrScheme name="Diseño predeterminado 6">
-        <a:dk1>
-          <a:srgbClr val="005A58"/>
-        </a:dk1>
-        <a:lt1>
-          <a:srgbClr val="FFFFFF"/>
-        </a:lt1>
-        <a:dk2>
-          <a:srgbClr val="008080"/>
-        </a:dk2>
-        <a:lt2>
-          <a:srgbClr val="FFFF99"/>
-        </a:lt2>
-        <a:accent1>
-          <a:srgbClr val="006462"/>
-        </a:accent1>
-        <a:accent2>
-          <a:srgbClr val="6D6FC7"/>
-        </a:accent2>
-        <a:accent3>
-          <a:srgbClr val="AAC0C0"/>
-        </a:accent3>
-        <a:accent4>
-          <a:srgbClr val="DADADA"/>
-        </a:accent4>
-        <a:accent5>
-          <a:srgbClr val="AAB8B7"/>
-        </a:accent5>
-        <a:accent6>
-          <a:srgbClr val="6264B4"/>
-        </a:accent6>
-        <a:hlink>
-          <a:srgbClr val="00FFFF"/>
-        </a:hlink>
-        <a:folHlink>
-          <a:srgbClr val="00FF00"/>
-        </a:folHlink>
-      </a:clrScheme>
-      <a:clrMap bg1="dk2" tx1="lt1" bg2="dk1" tx2="lt2" accent1="accent1" accent2="accent2" accent3="accent3" accent4="accent4" accent5="accent5" accent6="accent6" hlink="hlink" folHlink="folHlink"/>
-    </a:extraClrScheme>
-    <a:extraClrScheme>
-      <a:clrScheme name="Diseño predeterminado 7">
-        <a:dk1>
-          <a:srgbClr val="5C1F00"/>
-        </a:dk1>
-        <a:lt1>
-          <a:srgbClr val="FFFFFF"/>
-        </a:lt1>
-        <a:dk2>
-          <a:srgbClr val="800000"/>
-        </a:dk2>
-        <a:lt2>
-          <a:srgbClr val="DFD293"/>
-        </a:lt2>
-        <a:accent1>
-          <a:srgbClr val="CC3300"/>
-        </a:accent1>
-        <a:accent2>
-          <a:srgbClr val="BE7960"/>
-        </a:accent2>
-        <a:accent3>
-          <a:srgbClr val="C0AAAA"/>
-        </a:accent3>
-        <a:accent4>
-          <a:srgbClr val="DADADA"/>
-        </a:accent4>
-        <a:accent5>
-          <a:srgbClr val="E2ADAA"/>
-        </a:accent5>
-        <a:accent6>
-          <a:srgbClr val="AC6D56"/>
-        </a:accent6>
-        <a:hlink>
-          <a:srgbClr val="FFFF99"/>
-        </a:hlink>
-        <a:folHlink>
-          <a:srgbClr val="D3A219"/>
-        </a:folHlink>
-      </a:clrScheme>
-      <a:clrMap bg1="dk2" tx1="lt1" bg2="dk1" tx2="lt2" accent1="accent1" accent2="accent2" accent3="accent3" accent4="accent4" accent5="accent5" accent6="accent6" hlink="hlink" folHlink="folHlink"/>
-    </a:extraClrScheme>
-    <a:extraClrScheme>
-      <a:clrScheme name="Diseño predeterminado 8">
-        <a:dk1>
-          <a:srgbClr val="003366"/>
-        </a:dk1>
-        <a:lt1>
-          <a:srgbClr val="FFFFFF"/>
-        </a:lt1>
-        <a:dk2>
-          <a:srgbClr val="000099"/>
-        </a:dk2>
-        <a:lt2>
-          <a:srgbClr val="CCFFFF"/>
-        </a:lt2>
-        <a:accent1>
-          <a:srgbClr val="3366CC"/>
-        </a:accent1>
-        <a:accent2>
-          <a:srgbClr val="00B000"/>
-        </a:accent2>
-        <a:accent3>
-          <a:srgbClr val="AAAACA"/>
-        </a:accent3>
-        <a:accent4>
-          <a:srgbClr val="DADADA"/>
-        </a:accent4>
-        <a:accent5>
-          <a:srgbClr val="ADB8E2"/>
-        </a:accent5>
-        <a:accent6>
-          <a:srgbClr val="009F00"/>
-        </a:accent6>
-        <a:hlink>
-          <a:srgbClr val="66CCFF"/>
-        </a:hlink>
-        <a:folHlink>
-          <a:srgbClr val="FFE701"/>
-        </a:folHlink>
-      </a:clrScheme>
-      <a:clrMap bg1="dk2" tx1="lt1" bg2="dk1" tx2="lt2" accent1="accent1" accent2="accent2" accent3="accent3" accent4="accent4" accent5="accent5" accent6="accent6" hlink="hlink" folHlink="folHlink"/>
-    </a:extraClrScheme>
-    <a:extraClrScheme>
-      <a:clrScheme name="Diseño predeterminado 9">
-        <a:dk1>
-          <a:srgbClr val="336699"/>
-        </a:dk1>
-        <a:lt1>
-          <a:srgbClr val="FFFFFF"/>
-        </a:lt1>
-        <a:dk2>
-          <a:srgbClr val="000000"/>
-        </a:dk2>
-        <a:lt2>
-          <a:srgbClr val="E3EBF1"/>
-        </a:lt2>
-        <a:accent1>
-          <a:srgbClr val="003399"/>
-        </a:accent1>
-        <a:accent2>
-          <a:srgbClr val="468A4B"/>
-        </a:accent2>
-        <a:accent3>
-          <a:srgbClr val="AAAAAA"/>
-        </a:accent3>
-        <a:accent4>
-          <a:srgbClr val="DADADA"/>
-        </a:accent4>
-        <a:accent5>
-          <a:srgbClr val="AAADCA"/>
-        </a:accent5>
-        <a:accent6>
-          <a:srgbClr val="3F7D43"/>
-        </a:accent6>
-        <a:hlink>
-          <a:srgbClr val="66CCFF"/>
-        </a:hlink>
-        <a:folHlink>
-          <a:srgbClr val="F0E500"/>
-        </a:folHlink>
-      </a:clrScheme>
-      <a:clrMap bg1="dk2" tx1="lt1" bg2="dk1" tx2="lt2" accent1="accent1" accent2="accent2" accent3="accent3" accent4="accent4" accent5="accent5" accent6="accent6" hlink="hlink" folHlink="folHlink"/>
-    </a:extraClrScheme>
-    <a:extraClrScheme>
-      <a:clrScheme name="Diseño predeterminado 10">
-        <a:dk1>
-          <a:srgbClr val="777777"/>
-        </a:dk1>
-        <a:lt1>
-          <a:srgbClr val="FFFFFF"/>
-        </a:lt1>
-        <a:dk2>
-          <a:srgbClr val="686B5D"/>
-        </a:dk2>
-        <a:lt2>
-          <a:srgbClr val="D1D1CB"/>
-        </a:lt2>
-        <a:accent1>
-          <a:srgbClr val="909082"/>
-        </a:accent1>
-        <a:accent2>
-          <a:srgbClr val="809EA8"/>
-        </a:accent2>
-        <a:accent3>
-          <a:srgbClr val="B9BAB6"/>
-        </a:accent3>
-        <a:accent4>
-          <a:srgbClr val="DADADA"/>
-        </a:accent4>
-        <a:accent5>
-          <a:srgbClr val="C6C6C1"/>
-        </a:accent5>
-        <a:accent6>
-          <a:srgbClr val="738F98"/>
-        </a:accent6>
-        <a:hlink>
-          <a:srgbClr val="FFCC66"/>
-        </a:hlink>
-        <a:folHlink>
-          <a:srgbClr val="E9DCB9"/>
-        </a:folHlink>
-      </a:clrScheme>
-      <a:clrMap bg1="dk2" tx1="lt1" bg2="dk1" tx2="lt2" accent1="accent1" accent2="accent2" accent3="accent3" accent4="accent4" accent5="accent5" accent6="accent6" hlink="hlink" folHlink="folHlink"/>
-    </a:extraClrScheme>
-    <a:extraClrScheme>
-      <a:clrScheme name="Diseño predeterminado 11">
-        <a:dk1>
-          <a:srgbClr val="3E3E5C"/>
-        </a:dk1>
-        <a:lt1>
-          <a:srgbClr val="FFFFFF"/>
-        </a:lt1>
-        <a:dk2>
-          <a:srgbClr val="666699"/>
-        </a:dk2>
-        <a:lt2>
-          <a:srgbClr val="FFFFFF"/>
-        </a:lt2>
-        <a:accent1>
-          <a:srgbClr val="60597B"/>
-        </a:accent1>
-        <a:accent2>
-          <a:srgbClr val="6666FF"/>
-        </a:accent2>
-        <a:accent3>
-          <a:srgbClr val="B8B8CA"/>
-        </a:accent3>
-        <a:accent4>
-          <a:srgbClr val="DADADA"/>
-        </a:accent4>
-        <a:accent5>
-          <a:srgbClr val="B6B5BF"/>
-        </a:accent5>
-        <a:accent6>
-          <a:srgbClr val="5C5CE7"/>
-        </a:accent6>
-        <a:hlink>
-          <a:srgbClr val="99CCFF"/>
-        </a:hlink>
-        <a:folHlink>
-          <a:srgbClr val="FFFF99"/>
-        </a:folHlink>
-      </a:clrScheme>
-      <a:clrMap bg1="dk2" tx1="lt1" bg2="dk1" tx2="lt2" accent1="accent1" accent2="accent2" accent3="accent3" accent4="accent4" accent5="accent5" accent6="accent6" hlink="hlink" folHlink="folHlink"/>
-    </a:extraClrScheme>
-    <a:extraClrScheme>
-      <a:clrScheme name="Diseño predeterminado 12">
-        <a:dk1>
-          <a:srgbClr val="2D2015"/>
-        </a:dk1>
-        <a:lt1>
-          <a:srgbClr val="FFFFFF"/>
-        </a:lt1>
-        <a:dk2>
-          <a:srgbClr val="523E26"/>
-        </a:dk2>
-        <a:lt2>
-          <a:srgbClr val="DFC08D"/>
-        </a:lt2>
-        <a:accent1>
-          <a:srgbClr val="8C7B70"/>
-        </a:accent1>
-        <a:accent2>
-          <a:srgbClr val="8F5F2F"/>
-        </a:accent2>
-        <a:accent3>
-          <a:srgbClr val="B3AFAC"/>
-        </a:accent3>
-        <a:accent4>
-          <a:srgbClr val="DADADA"/>
-        </a:accent4>
-        <a:accent5>
-          <a:srgbClr val="C5BFBB"/>
-        </a:accent5>
-        <a:accent6>
-          <a:srgbClr val="81552A"/>
-        </a:accent6>
-        <a:hlink>
-          <a:srgbClr val="CCB400"/>
-        </a:hlink>
-        <a:folHlink>
-          <a:srgbClr val="8C9EA0"/>
-        </a:folHlink>
-      </a:clrScheme>
-      <a:clrMap bg1="dk2" tx1="lt1" bg2="dk1" tx2="lt2" accent1="accent1" accent2="accent2" accent3="accent3" accent4="accent4" accent5="accent5" accent6="accent6" hlink="hlink" folHlink="folHlink"/>
-    </a:extraClrScheme>
-  </a:extraClrSchemeLst>
+  <a:objectDefaults/>
+  <a:extraClrSchemeLst/>
+  <a:extLst>
+    <a:ext uri="{05A4C25C-085E-4340-85A3-A5531E510DB2}">
+      <thm15:themeFamily xmlns:thm15="http://schemas.microsoft.com/office/thememl/2012/main" name="Theme1" id="{75BBF97F-0525-4D7F-ABA1-4CCFA07F43A2}" vid="{8D3552C7-B8E4-422B-9896-C8F00D815D11}"/>
+    </a:ext>
+  </a:extLst>
 </a:theme>
 </file>